--- a/docs/docs-new/WHYAI slide1.pptx
+++ b/docs/docs-new/WHYAI slide1.pptx
@@ -4,6 +4,9 @@
   <p:sldMasterIdLst>
     <p:sldMasterId id="2147483648" r:id="rId1"/>
   </p:sldMasterIdLst>
+  <p:notesMasterIdLst>
+    <p:notesMasterId r:id="rId48"/>
+  </p:notesMasterIdLst>
   <p:sldIdLst>
     <p:sldId id="256" r:id="rId2"/>
     <p:sldId id="259" r:id="rId3"/>
@@ -30,9 +33,27 @@
     <p:sldId id="283" r:id="rId24"/>
     <p:sldId id="290" r:id="rId25"/>
     <p:sldId id="289" r:id="rId26"/>
-    <p:sldId id="286" r:id="rId27"/>
-    <p:sldId id="287" r:id="rId28"/>
-    <p:sldId id="288" r:id="rId29"/>
+    <p:sldId id="291" r:id="rId27"/>
+    <p:sldId id="286" r:id="rId28"/>
+    <p:sldId id="287" r:id="rId29"/>
+    <p:sldId id="288" r:id="rId30"/>
+    <p:sldId id="293" r:id="rId31"/>
+    <p:sldId id="292" r:id="rId32"/>
+    <p:sldId id="294" r:id="rId33"/>
+    <p:sldId id="295" r:id="rId34"/>
+    <p:sldId id="297" r:id="rId35"/>
+    <p:sldId id="298" r:id="rId36"/>
+    <p:sldId id="299" r:id="rId37"/>
+    <p:sldId id="310" r:id="rId38"/>
+    <p:sldId id="300" r:id="rId39"/>
+    <p:sldId id="305" r:id="rId40"/>
+    <p:sldId id="301" r:id="rId41"/>
+    <p:sldId id="306" r:id="rId42"/>
+    <p:sldId id="303" r:id="rId43"/>
+    <p:sldId id="307" r:id="rId44"/>
+    <p:sldId id="304" r:id="rId45"/>
+    <p:sldId id="308" r:id="rId46"/>
+    <p:sldId id="309" r:id="rId47"/>
   </p:sldIdLst>
   <p:sldSz cx="12192000" cy="6858000"/>
   <p:notesSz cx="6858000" cy="9144000"/>
@@ -150,6 +171,1188 @@
 </p:presentation>
 </file>
 
+<file path=ppt/notesMasters/notesMaster1.xml><?xml version="1.0" encoding="utf-8"?>
+<p:notesMaster xmlns:a="http://schemas.openxmlformats.org/drawingml/2006/main" xmlns:r="http://schemas.openxmlformats.org/officeDocument/2006/relationships" xmlns:p="http://schemas.openxmlformats.org/presentationml/2006/main">
+  <p:cSld>
+    <p:bg>
+      <p:bgRef idx="1001">
+        <a:schemeClr val="bg1"/>
+      </p:bgRef>
+    </p:bg>
+    <p:spTree>
+      <p:nvGrpSpPr>
+        <p:cNvPr id="1" name=""/>
+        <p:cNvGrpSpPr/>
+        <p:nvPr/>
+      </p:nvGrpSpPr>
+      <p:grpSpPr>
+        <a:xfrm>
+          <a:off x="0" y="0"/>
+          <a:ext cx="0" cy="0"/>
+          <a:chOff x="0" y="0"/>
+          <a:chExt cx="0" cy="0"/>
+        </a:xfrm>
+      </p:grpSpPr>
+      <p:sp>
+        <p:nvSpPr>
+          <p:cNvPr id="2" name="ヘッダー プレースホルダー 1"/>
+          <p:cNvSpPr>
+            <a:spLocks noGrp="1"/>
+          </p:cNvSpPr>
+          <p:nvPr>
+            <p:ph type="hdr" sz="quarter"/>
+          </p:nvPr>
+        </p:nvSpPr>
+        <p:spPr>
+          <a:xfrm>
+            <a:off x="0" y="0"/>
+            <a:ext cx="2971800" cy="458788"/>
+          </a:xfrm>
+          <a:prstGeom prst="rect">
+            <a:avLst/>
+          </a:prstGeom>
+        </p:spPr>
+        <p:txBody>
+          <a:bodyPr vert="horz" lIns="91440" tIns="45720" rIns="91440" bIns="45720" rtlCol="0"/>
+          <a:lstStyle>
+            <a:lvl1pPr algn="l">
+              <a:defRPr sz="1200"/>
+            </a:lvl1pPr>
+          </a:lstStyle>
+          <a:p>
+            <a:endParaRPr kumimoji="1" lang="ja-JP" altLang="en-US"/>
+          </a:p>
+        </p:txBody>
+      </p:sp>
+      <p:sp>
+        <p:nvSpPr>
+          <p:cNvPr id="3" name="日付プレースホルダー 2"/>
+          <p:cNvSpPr>
+            <a:spLocks noGrp="1"/>
+          </p:cNvSpPr>
+          <p:nvPr>
+            <p:ph type="dt" idx="1"/>
+          </p:nvPr>
+        </p:nvSpPr>
+        <p:spPr>
+          <a:xfrm>
+            <a:off x="3884613" y="0"/>
+            <a:ext cx="2971800" cy="458788"/>
+          </a:xfrm>
+          <a:prstGeom prst="rect">
+            <a:avLst/>
+          </a:prstGeom>
+        </p:spPr>
+        <p:txBody>
+          <a:bodyPr vert="horz" lIns="91440" tIns="45720" rIns="91440" bIns="45720" rtlCol="0"/>
+          <a:lstStyle>
+            <a:lvl1pPr algn="r">
+              <a:defRPr sz="1200"/>
+            </a:lvl1pPr>
+          </a:lstStyle>
+          <a:p>
+            <a:fld id="{787E6C24-CA75-4F5D-975A-79916794B33D}" type="datetimeFigureOut">
+              <a:rPr kumimoji="1" lang="ja-JP" altLang="en-US" smtClean="0"/>
+              <a:t>2026/2/9</a:t>
+            </a:fld>
+            <a:endParaRPr kumimoji="1" lang="ja-JP" altLang="en-US"/>
+          </a:p>
+        </p:txBody>
+      </p:sp>
+      <p:sp>
+        <p:nvSpPr>
+          <p:cNvPr id="4" name="スライド イメージ プレースホルダー 3"/>
+          <p:cNvSpPr>
+            <a:spLocks noGrp="1" noRot="1" noChangeAspect="1"/>
+          </p:cNvSpPr>
+          <p:nvPr>
+            <p:ph type="sldImg" idx="2"/>
+          </p:nvPr>
+        </p:nvSpPr>
+        <p:spPr>
+          <a:xfrm>
+            <a:off x="685800" y="1143000"/>
+            <a:ext cx="5486400" cy="3086100"/>
+          </a:xfrm>
+          <a:prstGeom prst="rect">
+            <a:avLst/>
+          </a:prstGeom>
+          <a:noFill/>
+          <a:ln w="12700">
+            <a:solidFill>
+              <a:prstClr val="black"/>
+            </a:solidFill>
+          </a:ln>
+        </p:spPr>
+        <p:txBody>
+          <a:bodyPr vert="horz" lIns="91440" tIns="45720" rIns="91440" bIns="45720" rtlCol="0" anchor="ctr"/>
+          <a:lstStyle/>
+          <a:p>
+            <a:endParaRPr lang="ja-JP" altLang="en-US"/>
+          </a:p>
+        </p:txBody>
+      </p:sp>
+      <p:sp>
+        <p:nvSpPr>
+          <p:cNvPr id="5" name="ノート プレースホルダー 4"/>
+          <p:cNvSpPr>
+            <a:spLocks noGrp="1"/>
+          </p:cNvSpPr>
+          <p:nvPr>
+            <p:ph type="body" sz="quarter" idx="3"/>
+          </p:nvPr>
+        </p:nvSpPr>
+        <p:spPr>
+          <a:xfrm>
+            <a:off x="685800" y="4400550"/>
+            <a:ext cx="5486400" cy="3600450"/>
+          </a:xfrm>
+          <a:prstGeom prst="rect">
+            <a:avLst/>
+          </a:prstGeom>
+        </p:spPr>
+        <p:txBody>
+          <a:bodyPr vert="horz" lIns="91440" tIns="45720" rIns="91440" bIns="45720" rtlCol="0"/>
+          <a:lstStyle/>
+          <a:p>
+            <a:pPr lvl="0"/>
+            <a:r>
+              <a:rPr kumimoji="1" lang="ja-JP" altLang="en-US"/>
+              <a:t>マスター テキストの書式設定</a:t>
+            </a:r>
+          </a:p>
+          <a:p>
+            <a:pPr lvl="1"/>
+            <a:r>
+              <a:rPr kumimoji="1" lang="ja-JP" altLang="en-US"/>
+              <a:t>第 </a:t>
+            </a:r>
+            <a:r>
+              <a:rPr kumimoji="1" lang="en-US" altLang="ja-JP"/>
+              <a:t>2 </a:t>
+            </a:r>
+            <a:r>
+              <a:rPr kumimoji="1" lang="ja-JP" altLang="en-US"/>
+              <a:t>レベル</a:t>
+            </a:r>
+          </a:p>
+          <a:p>
+            <a:pPr lvl="2"/>
+            <a:r>
+              <a:rPr kumimoji="1" lang="ja-JP" altLang="en-US"/>
+              <a:t>第 </a:t>
+            </a:r>
+            <a:r>
+              <a:rPr kumimoji="1" lang="en-US" altLang="ja-JP"/>
+              <a:t>3 </a:t>
+            </a:r>
+            <a:r>
+              <a:rPr kumimoji="1" lang="ja-JP" altLang="en-US"/>
+              <a:t>レベル</a:t>
+            </a:r>
+          </a:p>
+          <a:p>
+            <a:pPr lvl="3"/>
+            <a:r>
+              <a:rPr kumimoji="1" lang="ja-JP" altLang="en-US"/>
+              <a:t>第 </a:t>
+            </a:r>
+            <a:r>
+              <a:rPr kumimoji="1" lang="en-US" altLang="ja-JP"/>
+              <a:t>4 </a:t>
+            </a:r>
+            <a:r>
+              <a:rPr kumimoji="1" lang="ja-JP" altLang="en-US"/>
+              <a:t>レベル</a:t>
+            </a:r>
+          </a:p>
+          <a:p>
+            <a:pPr lvl="4"/>
+            <a:r>
+              <a:rPr kumimoji="1" lang="ja-JP" altLang="en-US"/>
+              <a:t>第 </a:t>
+            </a:r>
+            <a:r>
+              <a:rPr kumimoji="1" lang="en-US" altLang="ja-JP"/>
+              <a:t>5 </a:t>
+            </a:r>
+            <a:r>
+              <a:rPr kumimoji="1" lang="ja-JP" altLang="en-US"/>
+              <a:t>レベル</a:t>
+            </a:r>
+          </a:p>
+        </p:txBody>
+      </p:sp>
+      <p:sp>
+        <p:nvSpPr>
+          <p:cNvPr id="6" name="フッター プレースホルダー 5"/>
+          <p:cNvSpPr>
+            <a:spLocks noGrp="1"/>
+          </p:cNvSpPr>
+          <p:nvPr>
+            <p:ph type="ftr" sz="quarter" idx="4"/>
+          </p:nvPr>
+        </p:nvSpPr>
+        <p:spPr>
+          <a:xfrm>
+            <a:off x="0" y="8685213"/>
+            <a:ext cx="2971800" cy="458787"/>
+          </a:xfrm>
+          <a:prstGeom prst="rect">
+            <a:avLst/>
+          </a:prstGeom>
+        </p:spPr>
+        <p:txBody>
+          <a:bodyPr vert="horz" lIns="91440" tIns="45720" rIns="91440" bIns="45720" rtlCol="0" anchor="b"/>
+          <a:lstStyle>
+            <a:lvl1pPr algn="l">
+              <a:defRPr sz="1200"/>
+            </a:lvl1pPr>
+          </a:lstStyle>
+          <a:p>
+            <a:endParaRPr kumimoji="1" lang="ja-JP" altLang="en-US"/>
+          </a:p>
+        </p:txBody>
+      </p:sp>
+      <p:sp>
+        <p:nvSpPr>
+          <p:cNvPr id="7" name="スライド番号プレースホルダー 6"/>
+          <p:cNvSpPr>
+            <a:spLocks noGrp="1"/>
+          </p:cNvSpPr>
+          <p:nvPr>
+            <p:ph type="sldNum" sz="quarter" idx="5"/>
+          </p:nvPr>
+        </p:nvSpPr>
+        <p:spPr>
+          <a:xfrm>
+            <a:off x="3884613" y="8685213"/>
+            <a:ext cx="2971800" cy="458787"/>
+          </a:xfrm>
+          <a:prstGeom prst="rect">
+            <a:avLst/>
+          </a:prstGeom>
+        </p:spPr>
+        <p:txBody>
+          <a:bodyPr vert="horz" lIns="91440" tIns="45720" rIns="91440" bIns="45720" rtlCol="0" anchor="b"/>
+          <a:lstStyle>
+            <a:lvl1pPr algn="r">
+              <a:defRPr sz="1200"/>
+            </a:lvl1pPr>
+          </a:lstStyle>
+          <a:p>
+            <a:fld id="{085FE038-F309-4EC6-B35A-496186F30A45}" type="slidenum">
+              <a:rPr kumimoji="1" lang="ja-JP" altLang="en-US" smtClean="0"/>
+              <a:t>‹#›</a:t>
+            </a:fld>
+            <a:endParaRPr kumimoji="1" lang="ja-JP" altLang="en-US"/>
+          </a:p>
+        </p:txBody>
+      </p:sp>
+    </p:spTree>
+    <p:extLst>
+      <p:ext uri="{BB962C8B-B14F-4D97-AF65-F5344CB8AC3E}">
+        <p14:creationId xmlns:p14="http://schemas.microsoft.com/office/powerpoint/2010/main" val="2240170093"/>
+      </p:ext>
+    </p:extLst>
+  </p:cSld>
+  <p:clrMap bg1="lt1" tx1="dk1" bg2="lt2" tx2="dk2" accent1="accent1" accent2="accent2" accent3="accent3" accent4="accent4" accent5="accent5" accent6="accent6" hlink="hlink" folHlink="folHlink"/>
+  <p:notesStyle>
+    <a:lvl1pPr marL="0" algn="l" defTabSz="914400" rtl="0" eaLnBrk="1" latinLnBrk="0" hangingPunct="1">
+      <a:defRPr kumimoji="1" sz="1200" kern="1200">
+        <a:solidFill>
+          <a:schemeClr val="tx1"/>
+        </a:solidFill>
+        <a:latin typeface="+mn-lt"/>
+        <a:ea typeface="+mn-ea"/>
+        <a:cs typeface="+mn-cs"/>
+      </a:defRPr>
+    </a:lvl1pPr>
+    <a:lvl2pPr marL="457200" algn="l" defTabSz="914400" rtl="0" eaLnBrk="1" latinLnBrk="0" hangingPunct="1">
+      <a:defRPr kumimoji="1" sz="1200" kern="1200">
+        <a:solidFill>
+          <a:schemeClr val="tx1"/>
+        </a:solidFill>
+        <a:latin typeface="+mn-lt"/>
+        <a:ea typeface="+mn-ea"/>
+        <a:cs typeface="+mn-cs"/>
+      </a:defRPr>
+    </a:lvl2pPr>
+    <a:lvl3pPr marL="914400" algn="l" defTabSz="914400" rtl="0" eaLnBrk="1" latinLnBrk="0" hangingPunct="1">
+      <a:defRPr kumimoji="1" sz="1200" kern="1200">
+        <a:solidFill>
+          <a:schemeClr val="tx1"/>
+        </a:solidFill>
+        <a:latin typeface="+mn-lt"/>
+        <a:ea typeface="+mn-ea"/>
+        <a:cs typeface="+mn-cs"/>
+      </a:defRPr>
+    </a:lvl3pPr>
+    <a:lvl4pPr marL="1371600" algn="l" defTabSz="914400" rtl="0" eaLnBrk="1" latinLnBrk="0" hangingPunct="1">
+      <a:defRPr kumimoji="1" sz="1200" kern="1200">
+        <a:solidFill>
+          <a:schemeClr val="tx1"/>
+        </a:solidFill>
+        <a:latin typeface="+mn-lt"/>
+        <a:ea typeface="+mn-ea"/>
+        <a:cs typeface="+mn-cs"/>
+      </a:defRPr>
+    </a:lvl4pPr>
+    <a:lvl5pPr marL="1828800" algn="l" defTabSz="914400" rtl="0" eaLnBrk="1" latinLnBrk="0" hangingPunct="1">
+      <a:defRPr kumimoji="1" sz="1200" kern="1200">
+        <a:solidFill>
+          <a:schemeClr val="tx1"/>
+        </a:solidFill>
+        <a:latin typeface="+mn-lt"/>
+        <a:ea typeface="+mn-ea"/>
+        <a:cs typeface="+mn-cs"/>
+      </a:defRPr>
+    </a:lvl5pPr>
+    <a:lvl6pPr marL="2286000" algn="l" defTabSz="914400" rtl="0" eaLnBrk="1" latinLnBrk="0" hangingPunct="1">
+      <a:defRPr kumimoji="1" sz="1200" kern="1200">
+        <a:solidFill>
+          <a:schemeClr val="tx1"/>
+        </a:solidFill>
+        <a:latin typeface="+mn-lt"/>
+        <a:ea typeface="+mn-ea"/>
+        <a:cs typeface="+mn-cs"/>
+      </a:defRPr>
+    </a:lvl6pPr>
+    <a:lvl7pPr marL="2743200" algn="l" defTabSz="914400" rtl="0" eaLnBrk="1" latinLnBrk="0" hangingPunct="1">
+      <a:defRPr kumimoji="1" sz="1200" kern="1200">
+        <a:solidFill>
+          <a:schemeClr val="tx1"/>
+        </a:solidFill>
+        <a:latin typeface="+mn-lt"/>
+        <a:ea typeface="+mn-ea"/>
+        <a:cs typeface="+mn-cs"/>
+      </a:defRPr>
+    </a:lvl7pPr>
+    <a:lvl8pPr marL="3200400" algn="l" defTabSz="914400" rtl="0" eaLnBrk="1" latinLnBrk="0" hangingPunct="1">
+      <a:defRPr kumimoji="1" sz="1200" kern="1200">
+        <a:solidFill>
+          <a:schemeClr val="tx1"/>
+        </a:solidFill>
+        <a:latin typeface="+mn-lt"/>
+        <a:ea typeface="+mn-ea"/>
+        <a:cs typeface="+mn-cs"/>
+      </a:defRPr>
+    </a:lvl8pPr>
+    <a:lvl9pPr marL="3657600" algn="l" defTabSz="914400" rtl="0" eaLnBrk="1" latinLnBrk="0" hangingPunct="1">
+      <a:defRPr kumimoji="1" sz="1200" kern="1200">
+        <a:solidFill>
+          <a:schemeClr val="tx1"/>
+        </a:solidFill>
+        <a:latin typeface="+mn-lt"/>
+        <a:ea typeface="+mn-ea"/>
+        <a:cs typeface="+mn-cs"/>
+      </a:defRPr>
+    </a:lvl9pPr>
+  </p:notesStyle>
+</p:notesMaster>
+</file>
+
+<file path=ppt/notesSlides/notesSlide1.xml><?xml version="1.0" encoding="utf-8"?>
+<p:notes xmlns:a="http://schemas.openxmlformats.org/drawingml/2006/main" xmlns:r="http://schemas.openxmlformats.org/officeDocument/2006/relationships" xmlns:p="http://schemas.openxmlformats.org/presentationml/2006/main">
+  <p:cSld>
+    <p:spTree>
+      <p:nvGrpSpPr>
+        <p:cNvPr id="1" name=""/>
+        <p:cNvGrpSpPr/>
+        <p:nvPr/>
+      </p:nvGrpSpPr>
+      <p:grpSpPr>
+        <a:xfrm>
+          <a:off x="0" y="0"/>
+          <a:ext cx="0" cy="0"/>
+          <a:chOff x="0" y="0"/>
+          <a:chExt cx="0" cy="0"/>
+        </a:xfrm>
+      </p:grpSpPr>
+      <p:sp>
+        <p:nvSpPr>
+          <p:cNvPr id="2" name="スライド イメージ プレースホルダー 1"/>
+          <p:cNvSpPr>
+            <a:spLocks noGrp="1" noRot="1" noChangeAspect="1"/>
+          </p:cNvSpPr>
+          <p:nvPr>
+            <p:ph type="sldImg"/>
+          </p:nvPr>
+        </p:nvSpPr>
+        <p:spPr/>
+      </p:sp>
+      <p:sp>
+        <p:nvSpPr>
+          <p:cNvPr id="3" name="ノート プレースホルダー 2"/>
+          <p:cNvSpPr>
+            <a:spLocks noGrp="1"/>
+          </p:cNvSpPr>
+          <p:nvPr>
+            <p:ph type="body" idx="1"/>
+          </p:nvPr>
+        </p:nvSpPr>
+        <p:spPr/>
+        <p:txBody>
+          <a:bodyPr/>
+          <a:lstStyle/>
+          <a:p>
+            <a:r>
+              <a:rPr kumimoji="1" lang="ja-JP" altLang="en-US" dirty="0"/>
+              <a:t>学校</a:t>
+            </a:r>
+            <a:r>
+              <a:rPr kumimoji="1" lang="en-US" altLang="ja-JP" dirty="0"/>
+              <a:t>,</a:t>
+            </a:r>
+            <a:r>
+              <a:rPr kumimoji="1" lang="ja-JP" altLang="en-US" dirty="0"/>
+              <a:t>学年</a:t>
+            </a:r>
+            <a:r>
+              <a:rPr kumimoji="1" lang="en-US" altLang="ja-JP" dirty="0"/>
+              <a:t>,</a:t>
+            </a:r>
+            <a:r>
+              <a:rPr kumimoji="1" lang="ja-JP" altLang="en-US" dirty="0"/>
+              <a:t>名前</a:t>
+            </a:r>
+            <a:r>
+              <a:rPr kumimoji="1" lang="en-US" altLang="ja-JP" dirty="0"/>
+              <a:t>,</a:t>
+            </a:r>
+            <a:r>
+              <a:rPr kumimoji="1" lang="ja-JP" altLang="en-US" dirty="0"/>
+              <a:t>挨拶</a:t>
+            </a:r>
+            <a:endParaRPr kumimoji="1" lang="en-US" altLang="ja-JP" dirty="0"/>
+          </a:p>
+        </p:txBody>
+      </p:sp>
+      <p:sp>
+        <p:nvSpPr>
+          <p:cNvPr id="4" name="スライド番号プレースホルダー 3"/>
+          <p:cNvSpPr>
+            <a:spLocks noGrp="1"/>
+          </p:cNvSpPr>
+          <p:nvPr>
+            <p:ph type="sldNum" sz="quarter" idx="5"/>
+          </p:nvPr>
+        </p:nvSpPr>
+        <p:spPr/>
+        <p:txBody>
+          <a:bodyPr/>
+          <a:lstStyle/>
+          <a:p>
+            <a:fld id="{085FE038-F309-4EC6-B35A-496186F30A45}" type="slidenum">
+              <a:rPr kumimoji="1" lang="ja-JP" altLang="en-US" smtClean="0"/>
+              <a:t>1</a:t>
+            </a:fld>
+            <a:endParaRPr kumimoji="1" lang="ja-JP" altLang="en-US"/>
+          </a:p>
+        </p:txBody>
+      </p:sp>
+    </p:spTree>
+    <p:extLst>
+      <p:ext uri="{BB962C8B-B14F-4D97-AF65-F5344CB8AC3E}">
+        <p14:creationId xmlns:p14="http://schemas.microsoft.com/office/powerpoint/2010/main" val="4226209756"/>
+      </p:ext>
+    </p:extLst>
+  </p:cSld>
+  <p:clrMapOvr>
+    <a:masterClrMapping/>
+  </p:clrMapOvr>
+</p:notes>
+</file>
+
+<file path=ppt/notesSlides/notesSlide2.xml><?xml version="1.0" encoding="utf-8"?>
+<p:notes xmlns:a="http://schemas.openxmlformats.org/drawingml/2006/main" xmlns:r="http://schemas.openxmlformats.org/officeDocument/2006/relationships" xmlns:p="http://schemas.openxmlformats.org/presentationml/2006/main">
+  <p:cSld>
+    <p:spTree>
+      <p:nvGrpSpPr>
+        <p:cNvPr id="1" name=""/>
+        <p:cNvGrpSpPr/>
+        <p:nvPr/>
+      </p:nvGrpSpPr>
+      <p:grpSpPr>
+        <a:xfrm>
+          <a:off x="0" y="0"/>
+          <a:ext cx="0" cy="0"/>
+          <a:chOff x="0" y="0"/>
+          <a:chExt cx="0" cy="0"/>
+        </a:xfrm>
+      </p:grpSpPr>
+      <p:sp>
+        <p:nvSpPr>
+          <p:cNvPr id="2" name="スライド イメージ プレースホルダー 1"/>
+          <p:cNvSpPr>
+            <a:spLocks noGrp="1" noRot="1" noChangeAspect="1"/>
+          </p:cNvSpPr>
+          <p:nvPr>
+            <p:ph type="sldImg"/>
+          </p:nvPr>
+        </p:nvSpPr>
+        <p:spPr/>
+      </p:sp>
+      <p:sp>
+        <p:nvSpPr>
+          <p:cNvPr id="3" name="ノート プレースホルダー 2"/>
+          <p:cNvSpPr>
+            <a:spLocks noGrp="1"/>
+          </p:cNvSpPr>
+          <p:nvPr>
+            <p:ph type="body" idx="1"/>
+          </p:nvPr>
+        </p:nvSpPr>
+        <p:spPr/>
+        <p:txBody>
+          <a:bodyPr/>
+          <a:lstStyle/>
+          <a:p>
+            <a:r>
+              <a:rPr kumimoji="1" lang="ja-JP" altLang="en-US" dirty="0"/>
+              <a:t>なんとなく</a:t>
+            </a:r>
+          </a:p>
+        </p:txBody>
+      </p:sp>
+      <p:sp>
+        <p:nvSpPr>
+          <p:cNvPr id="4" name="スライド番号プレースホルダー 3"/>
+          <p:cNvSpPr>
+            <a:spLocks noGrp="1"/>
+          </p:cNvSpPr>
+          <p:nvPr>
+            <p:ph type="sldNum" sz="quarter" idx="5"/>
+          </p:nvPr>
+        </p:nvSpPr>
+        <p:spPr/>
+        <p:txBody>
+          <a:bodyPr/>
+          <a:lstStyle/>
+          <a:p>
+            <a:fld id="{085FE038-F309-4EC6-B35A-496186F30A45}" type="slidenum">
+              <a:rPr kumimoji="1" lang="ja-JP" altLang="en-US" smtClean="0"/>
+              <a:t>2</a:t>
+            </a:fld>
+            <a:endParaRPr kumimoji="1" lang="ja-JP" altLang="en-US"/>
+          </a:p>
+        </p:txBody>
+      </p:sp>
+    </p:spTree>
+    <p:extLst>
+      <p:ext uri="{BB962C8B-B14F-4D97-AF65-F5344CB8AC3E}">
+        <p14:creationId xmlns:p14="http://schemas.microsoft.com/office/powerpoint/2010/main" val="3675859023"/>
+      </p:ext>
+    </p:extLst>
+  </p:cSld>
+  <p:clrMapOvr>
+    <a:masterClrMapping/>
+  </p:clrMapOvr>
+</p:notes>
+</file>
+
+<file path=ppt/notesSlides/notesSlide3.xml><?xml version="1.0" encoding="utf-8"?>
+<p:notes xmlns:a="http://schemas.openxmlformats.org/drawingml/2006/main" xmlns:r="http://schemas.openxmlformats.org/officeDocument/2006/relationships" xmlns:p="http://schemas.openxmlformats.org/presentationml/2006/main">
+  <p:cSld>
+    <p:spTree>
+      <p:nvGrpSpPr>
+        <p:cNvPr id="1" name=""/>
+        <p:cNvGrpSpPr/>
+        <p:nvPr/>
+      </p:nvGrpSpPr>
+      <p:grpSpPr>
+        <a:xfrm>
+          <a:off x="0" y="0"/>
+          <a:ext cx="0" cy="0"/>
+          <a:chOff x="0" y="0"/>
+          <a:chExt cx="0" cy="0"/>
+        </a:xfrm>
+      </p:grpSpPr>
+      <p:sp>
+        <p:nvSpPr>
+          <p:cNvPr id="2" name="スライド イメージ プレースホルダー 1"/>
+          <p:cNvSpPr>
+            <a:spLocks noGrp="1" noRot="1" noChangeAspect="1"/>
+          </p:cNvSpPr>
+          <p:nvPr>
+            <p:ph type="sldImg"/>
+          </p:nvPr>
+        </p:nvSpPr>
+        <p:spPr/>
+      </p:sp>
+      <p:sp>
+        <p:nvSpPr>
+          <p:cNvPr id="3" name="ノート プレースホルダー 2"/>
+          <p:cNvSpPr>
+            <a:spLocks noGrp="1"/>
+          </p:cNvSpPr>
+          <p:nvPr>
+            <p:ph type="body" idx="1"/>
+          </p:nvPr>
+        </p:nvSpPr>
+        <p:spPr/>
+        <p:txBody>
+          <a:bodyPr/>
+          <a:lstStyle/>
+          <a:p>
+            <a:endParaRPr kumimoji="1" lang="ja-JP" altLang="en-US" dirty="0"/>
+          </a:p>
+        </p:txBody>
+      </p:sp>
+      <p:sp>
+        <p:nvSpPr>
+          <p:cNvPr id="4" name="スライド番号プレースホルダー 3"/>
+          <p:cNvSpPr>
+            <a:spLocks noGrp="1"/>
+          </p:cNvSpPr>
+          <p:nvPr>
+            <p:ph type="sldNum" sz="quarter" idx="5"/>
+          </p:nvPr>
+        </p:nvSpPr>
+        <p:spPr/>
+        <p:txBody>
+          <a:bodyPr/>
+          <a:lstStyle/>
+          <a:p>
+            <a:fld id="{085FE038-F309-4EC6-B35A-496186F30A45}" type="slidenum">
+              <a:rPr kumimoji="1" lang="ja-JP" altLang="en-US" smtClean="0"/>
+              <a:t>3</a:t>
+            </a:fld>
+            <a:endParaRPr kumimoji="1" lang="ja-JP" altLang="en-US"/>
+          </a:p>
+        </p:txBody>
+      </p:sp>
+    </p:spTree>
+    <p:extLst>
+      <p:ext uri="{BB962C8B-B14F-4D97-AF65-F5344CB8AC3E}">
+        <p14:creationId xmlns:p14="http://schemas.microsoft.com/office/powerpoint/2010/main" val="3519085225"/>
+      </p:ext>
+    </p:extLst>
+  </p:cSld>
+  <p:clrMapOvr>
+    <a:masterClrMapping/>
+  </p:clrMapOvr>
+</p:notes>
+</file>
+
+<file path=ppt/notesSlides/notesSlide4.xml><?xml version="1.0" encoding="utf-8"?>
+<p:notes xmlns:a="http://schemas.openxmlformats.org/drawingml/2006/main" xmlns:r="http://schemas.openxmlformats.org/officeDocument/2006/relationships" xmlns:p="http://schemas.openxmlformats.org/presentationml/2006/main">
+  <p:cSld>
+    <p:spTree>
+      <p:nvGrpSpPr>
+        <p:cNvPr id="1" name=""/>
+        <p:cNvGrpSpPr/>
+        <p:nvPr/>
+      </p:nvGrpSpPr>
+      <p:grpSpPr>
+        <a:xfrm>
+          <a:off x="0" y="0"/>
+          <a:ext cx="0" cy="0"/>
+          <a:chOff x="0" y="0"/>
+          <a:chExt cx="0" cy="0"/>
+        </a:xfrm>
+      </p:grpSpPr>
+      <p:sp>
+        <p:nvSpPr>
+          <p:cNvPr id="2" name="スライド イメージ プレースホルダー 1"/>
+          <p:cNvSpPr>
+            <a:spLocks noGrp="1" noRot="1" noChangeAspect="1"/>
+          </p:cNvSpPr>
+          <p:nvPr>
+            <p:ph type="sldImg"/>
+          </p:nvPr>
+        </p:nvSpPr>
+        <p:spPr/>
+      </p:sp>
+      <p:sp>
+        <p:nvSpPr>
+          <p:cNvPr id="3" name="ノート プレースホルダー 2"/>
+          <p:cNvSpPr>
+            <a:spLocks noGrp="1"/>
+          </p:cNvSpPr>
+          <p:nvPr>
+            <p:ph type="body" idx="1"/>
+          </p:nvPr>
+        </p:nvSpPr>
+        <p:spPr/>
+        <p:txBody>
+          <a:bodyPr/>
+          <a:lstStyle/>
+          <a:p>
+            <a:endParaRPr kumimoji="1" lang="ja-JP" altLang="en-US" dirty="0"/>
+          </a:p>
+        </p:txBody>
+      </p:sp>
+      <p:sp>
+        <p:nvSpPr>
+          <p:cNvPr id="4" name="スライド番号プレースホルダー 3"/>
+          <p:cNvSpPr>
+            <a:spLocks noGrp="1"/>
+          </p:cNvSpPr>
+          <p:nvPr>
+            <p:ph type="sldNum" sz="quarter" idx="5"/>
+          </p:nvPr>
+        </p:nvSpPr>
+        <p:spPr/>
+        <p:txBody>
+          <a:bodyPr/>
+          <a:lstStyle/>
+          <a:p>
+            <a:fld id="{085FE038-F309-4EC6-B35A-496186F30A45}" type="slidenum">
+              <a:rPr kumimoji="1" lang="ja-JP" altLang="en-US" smtClean="0"/>
+              <a:t>4</a:t>
+            </a:fld>
+            <a:endParaRPr kumimoji="1" lang="ja-JP" altLang="en-US"/>
+          </a:p>
+        </p:txBody>
+      </p:sp>
+    </p:spTree>
+    <p:extLst>
+      <p:ext uri="{BB962C8B-B14F-4D97-AF65-F5344CB8AC3E}">
+        <p14:creationId xmlns:p14="http://schemas.microsoft.com/office/powerpoint/2010/main" val="2839033479"/>
+      </p:ext>
+    </p:extLst>
+  </p:cSld>
+  <p:clrMapOvr>
+    <a:masterClrMapping/>
+  </p:clrMapOvr>
+</p:notes>
+</file>
+
+<file path=ppt/notesSlides/notesSlide5.xml><?xml version="1.0" encoding="utf-8"?>
+<p:notes xmlns:a="http://schemas.openxmlformats.org/drawingml/2006/main" xmlns:r="http://schemas.openxmlformats.org/officeDocument/2006/relationships" xmlns:p="http://schemas.openxmlformats.org/presentationml/2006/main">
+  <p:cSld>
+    <p:spTree>
+      <p:nvGrpSpPr>
+        <p:cNvPr id="1" name=""/>
+        <p:cNvGrpSpPr/>
+        <p:nvPr/>
+      </p:nvGrpSpPr>
+      <p:grpSpPr>
+        <a:xfrm>
+          <a:off x="0" y="0"/>
+          <a:ext cx="0" cy="0"/>
+          <a:chOff x="0" y="0"/>
+          <a:chExt cx="0" cy="0"/>
+        </a:xfrm>
+      </p:grpSpPr>
+      <p:sp>
+        <p:nvSpPr>
+          <p:cNvPr id="2" name="スライド イメージ プレースホルダー 1"/>
+          <p:cNvSpPr>
+            <a:spLocks noGrp="1" noRot="1" noChangeAspect="1"/>
+          </p:cNvSpPr>
+          <p:nvPr>
+            <p:ph type="sldImg"/>
+          </p:nvPr>
+        </p:nvSpPr>
+        <p:spPr/>
+      </p:sp>
+      <p:sp>
+        <p:nvSpPr>
+          <p:cNvPr id="3" name="ノート プレースホルダー 2"/>
+          <p:cNvSpPr>
+            <a:spLocks noGrp="1"/>
+          </p:cNvSpPr>
+          <p:nvPr>
+            <p:ph type="body" idx="1"/>
+          </p:nvPr>
+        </p:nvSpPr>
+        <p:spPr/>
+        <p:txBody>
+          <a:bodyPr/>
+          <a:lstStyle/>
+          <a:p>
+            <a:r>
+              <a:rPr kumimoji="1" lang="ja-JP" altLang="en-US" dirty="0"/>
+              <a:t>中学生時代、私はプログラミングを学ぼう</a:t>
+            </a:r>
+            <a:r>
+              <a:rPr kumimoji="1" lang="ja-JP" altLang="en-US"/>
+              <a:t>として挫折しました</a:t>
+            </a:r>
+            <a:endParaRPr kumimoji="1" lang="ja-JP" altLang="en-US" dirty="0"/>
+          </a:p>
+        </p:txBody>
+      </p:sp>
+      <p:sp>
+        <p:nvSpPr>
+          <p:cNvPr id="4" name="スライド番号プレースホルダー 3"/>
+          <p:cNvSpPr>
+            <a:spLocks noGrp="1"/>
+          </p:cNvSpPr>
+          <p:nvPr>
+            <p:ph type="sldNum" sz="quarter" idx="5"/>
+          </p:nvPr>
+        </p:nvSpPr>
+        <p:spPr/>
+        <p:txBody>
+          <a:bodyPr/>
+          <a:lstStyle/>
+          <a:p>
+            <a:fld id="{085FE038-F309-4EC6-B35A-496186F30A45}" type="slidenum">
+              <a:rPr kumimoji="1" lang="ja-JP" altLang="en-US" smtClean="0"/>
+              <a:t>5</a:t>
+            </a:fld>
+            <a:endParaRPr kumimoji="1" lang="ja-JP" altLang="en-US"/>
+          </a:p>
+        </p:txBody>
+      </p:sp>
+    </p:spTree>
+    <p:extLst>
+      <p:ext uri="{BB962C8B-B14F-4D97-AF65-F5344CB8AC3E}">
+        <p14:creationId xmlns:p14="http://schemas.microsoft.com/office/powerpoint/2010/main" val="2679746350"/>
+      </p:ext>
+    </p:extLst>
+  </p:cSld>
+  <p:clrMapOvr>
+    <a:masterClrMapping/>
+  </p:clrMapOvr>
+</p:notes>
+</file>
+
+<file path=ppt/notesSlides/notesSlide6.xml><?xml version="1.0" encoding="utf-8"?>
+<p:notes xmlns:a="http://schemas.openxmlformats.org/drawingml/2006/main" xmlns:r="http://schemas.openxmlformats.org/officeDocument/2006/relationships" xmlns:p="http://schemas.openxmlformats.org/presentationml/2006/main">
+  <p:cSld>
+    <p:spTree>
+      <p:nvGrpSpPr>
+        <p:cNvPr id="1" name=""/>
+        <p:cNvGrpSpPr/>
+        <p:nvPr/>
+      </p:nvGrpSpPr>
+      <p:grpSpPr>
+        <a:xfrm>
+          <a:off x="0" y="0"/>
+          <a:ext cx="0" cy="0"/>
+          <a:chOff x="0" y="0"/>
+          <a:chExt cx="0" cy="0"/>
+        </a:xfrm>
+      </p:grpSpPr>
+      <p:sp>
+        <p:nvSpPr>
+          <p:cNvPr id="2" name="スライド イメージ プレースホルダー 1"/>
+          <p:cNvSpPr>
+            <a:spLocks noGrp="1" noRot="1" noChangeAspect="1"/>
+          </p:cNvSpPr>
+          <p:nvPr>
+            <p:ph type="sldImg"/>
+          </p:nvPr>
+        </p:nvSpPr>
+        <p:spPr/>
+      </p:sp>
+      <p:sp>
+        <p:nvSpPr>
+          <p:cNvPr id="3" name="ノート プレースホルダー 2"/>
+          <p:cNvSpPr>
+            <a:spLocks noGrp="1"/>
+          </p:cNvSpPr>
+          <p:nvPr>
+            <p:ph type="body" idx="1"/>
+          </p:nvPr>
+        </p:nvSpPr>
+        <p:spPr/>
+        <p:txBody>
+          <a:bodyPr/>
+          <a:lstStyle/>
+          <a:p>
+            <a:r>
+              <a:rPr kumimoji="1" lang="ja-JP" altLang="en-US" dirty="0"/>
+              <a:t>今日発表するのは、それを根本から解決する</a:t>
+            </a:r>
+          </a:p>
+        </p:txBody>
+      </p:sp>
+      <p:sp>
+        <p:nvSpPr>
+          <p:cNvPr id="4" name="スライド番号プレースホルダー 3"/>
+          <p:cNvSpPr>
+            <a:spLocks noGrp="1"/>
+          </p:cNvSpPr>
+          <p:nvPr>
+            <p:ph type="sldNum" sz="quarter" idx="5"/>
+          </p:nvPr>
+        </p:nvSpPr>
+        <p:spPr/>
+        <p:txBody>
+          <a:bodyPr/>
+          <a:lstStyle/>
+          <a:p>
+            <a:fld id="{085FE038-F309-4EC6-B35A-496186F30A45}" type="slidenum">
+              <a:rPr kumimoji="1" lang="ja-JP" altLang="en-US" smtClean="0"/>
+              <a:t>11</a:t>
+            </a:fld>
+            <a:endParaRPr kumimoji="1" lang="ja-JP" altLang="en-US"/>
+          </a:p>
+        </p:txBody>
+      </p:sp>
+    </p:spTree>
+    <p:extLst>
+      <p:ext uri="{BB962C8B-B14F-4D97-AF65-F5344CB8AC3E}">
+        <p14:creationId xmlns:p14="http://schemas.microsoft.com/office/powerpoint/2010/main" val="3297794226"/>
+      </p:ext>
+    </p:extLst>
+  </p:cSld>
+  <p:clrMapOvr>
+    <a:masterClrMapping/>
+  </p:clrMapOvr>
+</p:notes>
+</file>
+
+<file path=ppt/notesSlides/notesSlide7.xml><?xml version="1.0" encoding="utf-8"?>
+<p:notes xmlns:a="http://schemas.openxmlformats.org/drawingml/2006/main" xmlns:r="http://schemas.openxmlformats.org/officeDocument/2006/relationships" xmlns:p="http://schemas.openxmlformats.org/presentationml/2006/main">
+  <p:cSld>
+    <p:spTree>
+      <p:nvGrpSpPr>
+        <p:cNvPr id="1" name=""/>
+        <p:cNvGrpSpPr/>
+        <p:nvPr/>
+      </p:nvGrpSpPr>
+      <p:grpSpPr>
+        <a:xfrm>
+          <a:off x="0" y="0"/>
+          <a:ext cx="0" cy="0"/>
+          <a:chOff x="0" y="0"/>
+          <a:chExt cx="0" cy="0"/>
+        </a:xfrm>
+      </p:grpSpPr>
+      <p:sp>
+        <p:nvSpPr>
+          <p:cNvPr id="2" name="スライド イメージ プレースホルダー 1"/>
+          <p:cNvSpPr>
+            <a:spLocks noGrp="1" noRot="1" noChangeAspect="1"/>
+          </p:cNvSpPr>
+          <p:nvPr>
+            <p:ph type="sldImg"/>
+          </p:nvPr>
+        </p:nvSpPr>
+        <p:spPr/>
+      </p:sp>
+      <p:sp>
+        <p:nvSpPr>
+          <p:cNvPr id="3" name="ノート プレースホルダー 2"/>
+          <p:cNvSpPr>
+            <a:spLocks noGrp="1"/>
+          </p:cNvSpPr>
+          <p:nvPr>
+            <p:ph type="body" idx="1"/>
+          </p:nvPr>
+        </p:nvSpPr>
+        <p:spPr/>
+        <p:txBody>
+          <a:bodyPr/>
+          <a:lstStyle/>
+          <a:p>
+            <a:endParaRPr kumimoji="1" lang="ja-JP" altLang="en-US" dirty="0"/>
+          </a:p>
+        </p:txBody>
+      </p:sp>
+      <p:sp>
+        <p:nvSpPr>
+          <p:cNvPr id="4" name="スライド番号プレースホルダー 3"/>
+          <p:cNvSpPr>
+            <a:spLocks noGrp="1"/>
+          </p:cNvSpPr>
+          <p:nvPr>
+            <p:ph type="sldNum" sz="quarter" idx="5"/>
+          </p:nvPr>
+        </p:nvSpPr>
+        <p:spPr/>
+        <p:txBody>
+          <a:bodyPr/>
+          <a:lstStyle/>
+          <a:p>
+            <a:fld id="{085FE038-F309-4EC6-B35A-496186F30A45}" type="slidenum">
+              <a:rPr kumimoji="1" lang="ja-JP" altLang="en-US" smtClean="0"/>
+              <a:t>12</a:t>
+            </a:fld>
+            <a:endParaRPr kumimoji="1" lang="ja-JP" altLang="en-US"/>
+          </a:p>
+        </p:txBody>
+      </p:sp>
+    </p:spTree>
+    <p:extLst>
+      <p:ext uri="{BB962C8B-B14F-4D97-AF65-F5344CB8AC3E}">
+        <p14:creationId xmlns:p14="http://schemas.microsoft.com/office/powerpoint/2010/main" val="3254759127"/>
+      </p:ext>
+    </p:extLst>
+  </p:cSld>
+  <p:clrMapOvr>
+    <a:masterClrMapping/>
+  </p:clrMapOvr>
+</p:notes>
+</file>
+
+<file path=ppt/notesSlides/notesSlide8.xml><?xml version="1.0" encoding="utf-8"?>
+<p:notes xmlns:a="http://schemas.openxmlformats.org/drawingml/2006/main" xmlns:r="http://schemas.openxmlformats.org/officeDocument/2006/relationships" xmlns:p="http://schemas.openxmlformats.org/presentationml/2006/main">
+  <p:cSld>
+    <p:spTree>
+      <p:nvGrpSpPr>
+        <p:cNvPr id="1" name=""/>
+        <p:cNvGrpSpPr/>
+        <p:nvPr/>
+      </p:nvGrpSpPr>
+      <p:grpSpPr>
+        <a:xfrm>
+          <a:off x="0" y="0"/>
+          <a:ext cx="0" cy="0"/>
+          <a:chOff x="0" y="0"/>
+          <a:chExt cx="0" cy="0"/>
+        </a:xfrm>
+      </p:grpSpPr>
+      <p:sp>
+        <p:nvSpPr>
+          <p:cNvPr id="2" name="スライド イメージ プレースホルダー 1"/>
+          <p:cNvSpPr>
+            <a:spLocks noGrp="1" noRot="1" noChangeAspect="1"/>
+          </p:cNvSpPr>
+          <p:nvPr>
+            <p:ph type="sldImg"/>
+          </p:nvPr>
+        </p:nvSpPr>
+        <p:spPr/>
+      </p:sp>
+      <p:sp>
+        <p:nvSpPr>
+          <p:cNvPr id="3" name="ノート プレースホルダー 2"/>
+          <p:cNvSpPr>
+            <a:spLocks noGrp="1"/>
+          </p:cNvSpPr>
+          <p:nvPr>
+            <p:ph type="body" idx="1"/>
+          </p:nvPr>
+        </p:nvSpPr>
+        <p:spPr/>
+        <p:txBody>
+          <a:bodyPr/>
+          <a:lstStyle/>
+          <a:p>
+            <a:r>
+              <a:rPr kumimoji="1" lang="ja-JP" altLang="en-US" dirty="0"/>
+              <a:t>エンジニアが～ための様々な機能</a:t>
+            </a:r>
+          </a:p>
+        </p:txBody>
+      </p:sp>
+      <p:sp>
+        <p:nvSpPr>
+          <p:cNvPr id="4" name="スライド番号プレースホルダー 3"/>
+          <p:cNvSpPr>
+            <a:spLocks noGrp="1"/>
+          </p:cNvSpPr>
+          <p:nvPr>
+            <p:ph type="sldNum" sz="quarter" idx="5"/>
+          </p:nvPr>
+        </p:nvSpPr>
+        <p:spPr/>
+        <p:txBody>
+          <a:bodyPr/>
+          <a:lstStyle/>
+          <a:p>
+            <a:fld id="{085FE038-F309-4EC6-B35A-496186F30A45}" type="slidenum">
+              <a:rPr kumimoji="1" lang="ja-JP" altLang="en-US" smtClean="0"/>
+              <a:t>19</a:t>
+            </a:fld>
+            <a:endParaRPr kumimoji="1" lang="ja-JP" altLang="en-US"/>
+          </a:p>
+        </p:txBody>
+      </p:sp>
+    </p:spTree>
+    <p:extLst>
+      <p:ext uri="{BB962C8B-B14F-4D97-AF65-F5344CB8AC3E}">
+        <p14:creationId xmlns:p14="http://schemas.microsoft.com/office/powerpoint/2010/main" val="222295041"/>
+      </p:ext>
+    </p:extLst>
+  </p:cSld>
+  <p:clrMapOvr>
+    <a:masterClrMapping/>
+  </p:clrMapOvr>
+</p:notes>
+</file>
+
+<file path=ppt/notesSlides/notesSlide9.xml><?xml version="1.0" encoding="utf-8"?>
+<p:notes xmlns:a="http://schemas.openxmlformats.org/drawingml/2006/main" xmlns:r="http://schemas.openxmlformats.org/officeDocument/2006/relationships" xmlns:p="http://schemas.openxmlformats.org/presentationml/2006/main">
+  <p:cSld>
+    <p:spTree>
+      <p:nvGrpSpPr>
+        <p:cNvPr id="1" name=""/>
+        <p:cNvGrpSpPr/>
+        <p:nvPr/>
+      </p:nvGrpSpPr>
+      <p:grpSpPr>
+        <a:xfrm>
+          <a:off x="0" y="0"/>
+          <a:ext cx="0" cy="0"/>
+          <a:chOff x="0" y="0"/>
+          <a:chExt cx="0" cy="0"/>
+        </a:xfrm>
+      </p:grpSpPr>
+      <p:sp>
+        <p:nvSpPr>
+          <p:cNvPr id="2" name="スライド イメージ プレースホルダー 1"/>
+          <p:cNvSpPr>
+            <a:spLocks noGrp="1" noRot="1" noChangeAspect="1"/>
+          </p:cNvSpPr>
+          <p:nvPr>
+            <p:ph type="sldImg"/>
+          </p:nvPr>
+        </p:nvSpPr>
+        <p:spPr/>
+      </p:sp>
+      <p:sp>
+        <p:nvSpPr>
+          <p:cNvPr id="3" name="ノート プレースホルダー 2"/>
+          <p:cNvSpPr>
+            <a:spLocks noGrp="1"/>
+          </p:cNvSpPr>
+          <p:nvPr>
+            <p:ph type="body" idx="1"/>
+          </p:nvPr>
+        </p:nvSpPr>
+        <p:spPr/>
+        <p:txBody>
+          <a:bodyPr/>
+          <a:lstStyle/>
+          <a:p>
+            <a:endParaRPr kumimoji="1" lang="ja-JP" altLang="en-US" dirty="0"/>
+          </a:p>
+        </p:txBody>
+      </p:sp>
+      <p:sp>
+        <p:nvSpPr>
+          <p:cNvPr id="4" name="スライド番号プレースホルダー 3"/>
+          <p:cNvSpPr>
+            <a:spLocks noGrp="1"/>
+          </p:cNvSpPr>
+          <p:nvPr>
+            <p:ph type="sldNum" sz="quarter" idx="5"/>
+          </p:nvPr>
+        </p:nvSpPr>
+        <p:spPr/>
+        <p:txBody>
+          <a:bodyPr/>
+          <a:lstStyle/>
+          <a:p>
+            <a:fld id="{085FE038-F309-4EC6-B35A-496186F30A45}" type="slidenum">
+              <a:rPr kumimoji="1" lang="ja-JP" altLang="en-US" smtClean="0"/>
+              <a:t>46</a:t>
+            </a:fld>
+            <a:endParaRPr kumimoji="1" lang="ja-JP" altLang="en-US"/>
+          </a:p>
+        </p:txBody>
+      </p:sp>
+    </p:spTree>
+    <p:extLst>
+      <p:ext uri="{BB962C8B-B14F-4D97-AF65-F5344CB8AC3E}">
+        <p14:creationId xmlns:p14="http://schemas.microsoft.com/office/powerpoint/2010/main" val="150479662"/>
+      </p:ext>
+    </p:extLst>
+  </p:cSld>
+  <p:clrMapOvr>
+    <a:masterClrMapping/>
+  </p:clrMapOvr>
+</p:notes>
+</file>
+
 <file path=ppt/slideLayouts/slideLayout1.xml><?xml version="1.0" encoding="utf-8"?>
 <p:sldLayout xmlns:a="http://schemas.openxmlformats.org/drawingml/2006/main" xmlns:r="http://schemas.openxmlformats.org/officeDocument/2006/relationships" xmlns:p="http://schemas.openxmlformats.org/presentationml/2006/main" type="title" preserve="1">
   <p:cSld name="タイトル スライド">
@@ -297,7 +1500,7 @@
           <a:p>
             <a:fld id="{0A045D78-A883-4E90-82FC-268462053A40}" type="datetimeFigureOut">
               <a:rPr kumimoji="1" lang="ja-JP" altLang="en-US" smtClean="0"/>
-              <a:t>2026/2/8</a:t>
+              <a:t>2026/2/9</a:t>
             </a:fld>
             <a:endParaRPr kumimoji="1" lang="ja-JP" altLang="en-US"/>
           </a:p>
@@ -527,7 +1730,7 @@
           <a:p>
             <a:fld id="{0A045D78-A883-4E90-82FC-268462053A40}" type="datetimeFigureOut">
               <a:rPr kumimoji="1" lang="ja-JP" altLang="en-US" smtClean="0"/>
-              <a:t>2026/2/8</a:t>
+              <a:t>2026/2/9</a:t>
             </a:fld>
             <a:endParaRPr kumimoji="1" lang="ja-JP" altLang="en-US"/>
           </a:p>
@@ -767,7 +1970,7 @@
           <a:p>
             <a:fld id="{0A045D78-A883-4E90-82FC-268462053A40}" type="datetimeFigureOut">
               <a:rPr kumimoji="1" lang="ja-JP" altLang="en-US" smtClean="0"/>
-              <a:t>2026/2/8</a:t>
+              <a:t>2026/2/9</a:t>
             </a:fld>
             <a:endParaRPr kumimoji="1" lang="ja-JP" altLang="en-US"/>
           </a:p>
@@ -997,7 +2200,7 @@
           <a:p>
             <a:fld id="{0A045D78-A883-4E90-82FC-268462053A40}" type="datetimeFigureOut">
               <a:rPr kumimoji="1" lang="ja-JP" altLang="en-US" smtClean="0"/>
-              <a:t>2026/2/8</a:t>
+              <a:t>2026/2/9</a:t>
             </a:fld>
             <a:endParaRPr kumimoji="1" lang="ja-JP" altLang="en-US"/>
           </a:p>
@@ -1272,7 +2475,7 @@
           <a:p>
             <a:fld id="{0A045D78-A883-4E90-82FC-268462053A40}" type="datetimeFigureOut">
               <a:rPr kumimoji="1" lang="ja-JP" altLang="en-US" smtClean="0"/>
-              <a:t>2026/2/8</a:t>
+              <a:t>2026/2/9</a:t>
             </a:fld>
             <a:endParaRPr kumimoji="1" lang="ja-JP" altLang="en-US"/>
           </a:p>
@@ -1601,7 +2804,7 @@
           <a:p>
             <a:fld id="{0A045D78-A883-4E90-82FC-268462053A40}" type="datetimeFigureOut">
               <a:rPr kumimoji="1" lang="ja-JP" altLang="en-US" smtClean="0"/>
-              <a:t>2026/2/8</a:t>
+              <a:t>2026/2/9</a:t>
             </a:fld>
             <a:endParaRPr kumimoji="1" lang="ja-JP" altLang="en-US"/>
           </a:p>
@@ -2077,7 +3280,7 @@
           <a:p>
             <a:fld id="{0A045D78-A883-4E90-82FC-268462053A40}" type="datetimeFigureOut">
               <a:rPr kumimoji="1" lang="ja-JP" altLang="en-US" smtClean="0"/>
-              <a:t>2026/2/8</a:t>
+              <a:t>2026/2/9</a:t>
             </a:fld>
             <a:endParaRPr kumimoji="1" lang="ja-JP" altLang="en-US"/>
           </a:p>
@@ -2218,7 +3421,7 @@
           <a:p>
             <a:fld id="{0A045D78-A883-4E90-82FC-268462053A40}" type="datetimeFigureOut">
               <a:rPr kumimoji="1" lang="ja-JP" altLang="en-US" smtClean="0"/>
-              <a:t>2026/2/8</a:t>
+              <a:t>2026/2/9</a:t>
             </a:fld>
             <a:endParaRPr kumimoji="1" lang="ja-JP" altLang="en-US"/>
           </a:p>
@@ -2331,7 +3534,7 @@
           <a:p>
             <a:fld id="{0A045D78-A883-4E90-82FC-268462053A40}" type="datetimeFigureOut">
               <a:rPr kumimoji="1" lang="ja-JP" altLang="en-US" smtClean="0"/>
-              <a:t>2026/2/8</a:t>
+              <a:t>2026/2/9</a:t>
             </a:fld>
             <a:endParaRPr kumimoji="1" lang="ja-JP" altLang="en-US"/>
           </a:p>
@@ -2674,7 +3877,7 @@
           <a:p>
             <a:fld id="{0A045D78-A883-4E90-82FC-268462053A40}" type="datetimeFigureOut">
               <a:rPr kumimoji="1" lang="ja-JP" altLang="en-US" smtClean="0"/>
-              <a:t>2026/2/8</a:t>
+              <a:t>2026/2/9</a:t>
             </a:fld>
             <a:endParaRPr kumimoji="1" lang="ja-JP" altLang="en-US"/>
           </a:p>
@@ -2962,7 +4165,7 @@
           <a:p>
             <a:fld id="{0A045D78-A883-4E90-82FC-268462053A40}" type="datetimeFigureOut">
               <a:rPr kumimoji="1" lang="ja-JP" altLang="en-US" smtClean="0"/>
-              <a:t>2026/2/8</a:t>
+              <a:t>2026/2/9</a:t>
             </a:fld>
             <a:endParaRPr kumimoji="1" lang="ja-JP" altLang="en-US"/>
           </a:p>
@@ -3235,7 +4438,7 @@
           <a:p>
             <a:fld id="{0A045D78-A883-4E90-82FC-268462053A40}" type="datetimeFigureOut">
               <a:rPr kumimoji="1" lang="ja-JP" altLang="en-US" smtClean="0"/>
-              <a:t>2026/2/8</a:t>
+              <a:t>2026/2/9</a:t>
             </a:fld>
             <a:endParaRPr kumimoji="1" lang="ja-JP" altLang="en-US"/>
           </a:p>
@@ -7327,10 +8530,10 @@
       </p:grpSpPr>
       <p:sp>
         <p:nvSpPr>
-          <p:cNvPr id="4" name="タイトル 1">
-            <a:extLst>
-              <a:ext uri="{FF2B5EF4-FFF2-40B4-BE49-F238E27FC236}">
-                <a16:creationId xmlns:a16="http://schemas.microsoft.com/office/drawing/2014/main" id="{943E7DF2-E38E-2847-9E2F-8C72D5155F81}"/>
+          <p:cNvPr id="2" name="タイトル 1">
+            <a:extLst>
+              <a:ext uri="{FF2B5EF4-FFF2-40B4-BE49-F238E27FC236}">
+                <a16:creationId xmlns:a16="http://schemas.microsoft.com/office/drawing/2014/main" id="{1B897576-8227-598A-6928-EFC346360CF8}"/>
               </a:ext>
             </a:extLst>
           </p:cNvPr>
@@ -7341,8 +8544,8 @@
         </p:nvSpPr>
         <p:spPr>
           <a:xfrm>
-            <a:off x="-292309" y="626694"/>
-            <a:ext cx="12776617" cy="5604611"/>
+            <a:off x="1139998" y="2884235"/>
+            <a:ext cx="9912003" cy="1089529"/>
           </a:xfrm>
           <a:prstGeom prst="rect">
             <a:avLst/>
@@ -7373,84 +8576,13 @@
           </a:lstStyle>
           <a:p>
             <a:r>
-              <a:rPr lang="ja-JP" altLang="en-US" sz="19900" dirty="0">
-                <a:solidFill>
-                  <a:schemeClr val="bg1">
-                    <a:lumMod val="95000"/>
-                  </a:schemeClr>
-                </a:solidFill>
-                <a:latin typeface="源ノ角ゴシック JP Heavy" panose="020B0A00000000000000" pitchFamily="34" charset="-128"/>
-                <a:ea typeface="源ノ角ゴシック JP Heavy" panose="020B0A00000000000000" pitchFamily="34" charset="-128"/>
-              </a:rPr>
-              <a:t>システムの設計</a:t>
-            </a:r>
-            <a:endParaRPr lang="en-US" altLang="ja-JP" sz="19900" dirty="0">
-              <a:solidFill>
-                <a:schemeClr val="bg1">
-                  <a:lumMod val="95000"/>
-                </a:schemeClr>
-              </a:solidFill>
-              <a:latin typeface="源ノ角ゴシック JP Heavy" panose="020B0A00000000000000" pitchFamily="34" charset="-128"/>
-              <a:ea typeface="源ノ角ゴシック JP Heavy" panose="020B0A00000000000000" pitchFamily="34" charset="-128"/>
-            </a:endParaRPr>
-          </a:p>
-        </p:txBody>
-      </p:sp>
-      <p:sp>
-        <p:nvSpPr>
-          <p:cNvPr id="2" name="タイトル 1">
-            <a:extLst>
-              <a:ext uri="{FF2B5EF4-FFF2-40B4-BE49-F238E27FC236}">
-                <a16:creationId xmlns:a16="http://schemas.microsoft.com/office/drawing/2014/main" id="{1B897576-8227-598A-6928-EFC346360CF8}"/>
-              </a:ext>
-            </a:extLst>
-          </p:cNvPr>
-          <p:cNvSpPr txBox="1">
-            <a:spLocks/>
-          </p:cNvSpPr>
-          <p:nvPr/>
-        </p:nvSpPr>
-        <p:spPr>
-          <a:xfrm>
-            <a:off x="2279997" y="3008884"/>
-            <a:ext cx="7632003" cy="840230"/>
-          </a:xfrm>
-          <a:prstGeom prst="rect">
-            <a:avLst/>
-          </a:prstGeom>
-        </p:spPr>
-        <p:txBody>
-          <a:bodyPr vert="horz" wrap="square" lIns="91440" tIns="45720" rIns="91440" bIns="45720" rtlCol="0" anchor="ctr" anchorCtr="0">
-            <a:spAutoFit/>
-          </a:bodyPr>
-          <a:lstStyle>
-            <a:lvl1pPr algn="ctr" defTabSz="914400" rtl="0" eaLnBrk="1" latinLnBrk="0" hangingPunct="1">
-              <a:lnSpc>
-                <a:spcPct val="90000"/>
-              </a:lnSpc>
-              <a:spcBef>
-                <a:spcPct val="0"/>
-              </a:spcBef>
-              <a:buNone/>
-              <a:defRPr kumimoji="1" sz="6000" kern="1200">
-                <a:solidFill>
-                  <a:schemeClr val="tx1"/>
-                </a:solidFill>
-                <a:latin typeface="+mj-lt"/>
-                <a:ea typeface="+mj-ea"/>
-                <a:cs typeface="+mj-cs"/>
-              </a:defRPr>
-            </a:lvl1pPr>
-          </a:lstStyle>
-          <a:p>
-            <a:r>
-              <a:rPr lang="ja-JP" altLang="en-US" sz="5400" dirty="0">
-                <a:latin typeface="源ノ角ゴシック JP Heavy" panose="020B0A00000000000000" pitchFamily="34" charset="-128"/>
-                <a:ea typeface="源ノ角ゴシック JP Heavy" panose="020B0A00000000000000" pitchFamily="34" charset="-128"/>
-              </a:rPr>
-              <a:t>他のサービスとは違う</a:t>
-            </a:r>
-            <a:endParaRPr lang="en-US" altLang="ja-JP" sz="5400" dirty="0">
+              <a:rPr lang="ja-JP" altLang="en-US" sz="7200" dirty="0">
+                <a:latin typeface="源ノ角ゴシック JP Heavy" panose="020B0A00000000000000" pitchFamily="34" charset="-128"/>
+                <a:ea typeface="源ノ角ゴシック JP Heavy" panose="020B0A00000000000000" pitchFamily="34" charset="-128"/>
+              </a:rPr>
+              <a:t>詳細なロジック設計</a:t>
+            </a:r>
+            <a:endParaRPr lang="en-US" altLang="ja-JP" sz="7200" dirty="0">
               <a:latin typeface="源ノ角ゴシック JP Heavy" panose="020B0A00000000000000" pitchFamily="34" charset="-128"/>
               <a:ea typeface="源ノ角ゴシック JP Heavy" panose="020B0A00000000000000" pitchFamily="34" charset="-128"/>
             </a:endParaRPr>
@@ -7476,7 +8608,7 @@
     <p:bg>
       <p:bgPr>
         <a:solidFill>
-          <a:schemeClr val="bg1"/>
+          <a:srgbClr val="FFFFFF"/>
         </a:solidFill>
         <a:effectLst/>
       </p:bgPr>
@@ -7503,20 +8635,22 @@
       </p:grpSpPr>
       <p:sp>
         <p:nvSpPr>
-          <p:cNvPr id="10" name="テキスト ボックス 9">
-            <a:extLst>
-              <a:ext uri="{FF2B5EF4-FFF2-40B4-BE49-F238E27FC236}">
-                <a16:creationId xmlns:a16="http://schemas.microsoft.com/office/drawing/2014/main" id="{00C53DDF-E39A-ED1E-62A6-F352E8C75373}"/>
-              </a:ext>
-            </a:extLst>
-          </p:cNvPr>
-          <p:cNvSpPr txBox="1"/>
+          <p:cNvPr id="5" name="タイトル 1">
+            <a:extLst>
+              <a:ext uri="{FF2B5EF4-FFF2-40B4-BE49-F238E27FC236}">
+                <a16:creationId xmlns:a16="http://schemas.microsoft.com/office/drawing/2014/main" id="{6B192B97-5EE1-9F9B-E614-A644B10AF625}"/>
+              </a:ext>
+            </a:extLst>
+          </p:cNvPr>
+          <p:cNvSpPr txBox="1">
+            <a:spLocks/>
+          </p:cNvSpPr>
           <p:nvPr/>
         </p:nvSpPr>
         <p:spPr>
           <a:xfrm>
-            <a:off x="893309" y="3013501"/>
-            <a:ext cx="10405382" cy="830997"/>
+            <a:off x="0" y="269820"/>
+            <a:ext cx="12192000" cy="6858000"/>
           </a:xfrm>
           <a:prstGeom prst="rect">
             <a:avLst/>
@@ -7524,6 +8658,68 @@
           <a:noFill/>
         </p:spPr>
         <p:txBody>
+          <a:bodyPr vert="horz" lIns="91440" tIns="45720" rIns="91440" bIns="45720" rtlCol="0" anchor="ctr" anchorCtr="0">
+            <a:normAutofit/>
+          </a:bodyPr>
+          <a:lstStyle>
+            <a:lvl1pPr algn="ctr" defTabSz="914400" rtl="0" eaLnBrk="1" latinLnBrk="0" hangingPunct="1">
+              <a:lnSpc>
+                <a:spcPct val="90000"/>
+              </a:lnSpc>
+              <a:spcBef>
+                <a:spcPct val="0"/>
+              </a:spcBef>
+              <a:buNone/>
+              <a:defRPr kumimoji="1" sz="6000" kern="1200">
+                <a:solidFill>
+                  <a:schemeClr val="tx1"/>
+                </a:solidFill>
+                <a:latin typeface="+mj-lt"/>
+                <a:ea typeface="+mj-ea"/>
+                <a:cs typeface="+mj-cs"/>
+              </a:defRPr>
+            </a:lvl1pPr>
+          </a:lstStyle>
+          <a:p>
+            <a:r>
+              <a:rPr lang="ja-JP" altLang="en-US" sz="19900" dirty="0">
+                <a:solidFill>
+                  <a:schemeClr val="accent6">
+                    <a:lumMod val="40000"/>
+                    <a:lumOff val="60000"/>
+                  </a:schemeClr>
+                </a:solidFill>
+                <a:latin typeface="源ノ角ゴシック JP Heavy" panose="020B0A00000000000000" pitchFamily="34" charset="-128"/>
+                <a:ea typeface="源ノ角ゴシック JP Heavy" panose="020B0A00000000000000" pitchFamily="34" charset="-128"/>
+              </a:rPr>
+              <a:t>ロジック</a:t>
+            </a:r>
+          </a:p>
+        </p:txBody>
+      </p:sp>
+      <p:sp>
+        <p:nvSpPr>
+          <p:cNvPr id="10" name="テキスト ボックス 9">
+            <a:extLst>
+              <a:ext uri="{FF2B5EF4-FFF2-40B4-BE49-F238E27FC236}">
+                <a16:creationId xmlns:a16="http://schemas.microsoft.com/office/drawing/2014/main" id="{00C53DDF-E39A-ED1E-62A6-F352E8C75373}"/>
+              </a:ext>
+            </a:extLst>
+          </p:cNvPr>
+          <p:cNvSpPr txBox="1"/>
+          <p:nvPr/>
+        </p:nvSpPr>
+        <p:spPr>
+          <a:xfrm>
+            <a:off x="893309" y="2967335"/>
+            <a:ext cx="10405382" cy="923330"/>
+          </a:xfrm>
+          <a:prstGeom prst="rect">
+            <a:avLst/>
+          </a:prstGeom>
+          <a:noFill/>
+        </p:spPr>
+        <p:txBody>
           <a:bodyPr wrap="square" anchor="ctr" anchorCtr="0">
             <a:spAutoFit/>
           </a:bodyPr>
@@ -7531,12 +8727,91 @@
           <a:p>
             <a:pPr algn="ctr"/>
             <a:r>
-              <a:rPr lang="ja-JP" altLang="en-US" sz="4800" dirty="0">
-                <a:latin typeface="源ノ角ゴシック JP Heavy" panose="020B0A00000000000000" pitchFamily="34" charset="-128"/>
-                <a:ea typeface="源ノ角ゴシック JP Heavy" panose="020B0A00000000000000" pitchFamily="34" charset="-128"/>
-              </a:rPr>
-              <a:t>教えない、評価しない、推奨しない</a:t>
-            </a:r>
+              <a:rPr lang="ja-JP" altLang="en-US" sz="5400" dirty="0">
+                <a:latin typeface="源ノ角ゴシック JP Heavy" panose="020B0A00000000000000" pitchFamily="34" charset="-128"/>
+                <a:ea typeface="源ノ角ゴシック JP Heavy" panose="020B0A00000000000000" pitchFamily="34" charset="-128"/>
+              </a:rPr>
+              <a:t>視点操作子</a:t>
+            </a:r>
+          </a:p>
+        </p:txBody>
+      </p:sp>
+      <p:sp>
+        <p:nvSpPr>
+          <p:cNvPr id="2" name="テキスト ボックス 1">
+            <a:extLst>
+              <a:ext uri="{FF2B5EF4-FFF2-40B4-BE49-F238E27FC236}">
+                <a16:creationId xmlns:a16="http://schemas.microsoft.com/office/drawing/2014/main" id="{D510902F-2F88-EEE7-C38C-AC30013C4A12}"/>
+              </a:ext>
+            </a:extLst>
+          </p:cNvPr>
+          <p:cNvSpPr txBox="1"/>
+          <p:nvPr/>
+        </p:nvSpPr>
+        <p:spPr>
+          <a:xfrm>
+            <a:off x="893309" y="1253356"/>
+            <a:ext cx="10405382" cy="923330"/>
+          </a:xfrm>
+          <a:prstGeom prst="rect">
+            <a:avLst/>
+          </a:prstGeom>
+          <a:noFill/>
+        </p:spPr>
+        <p:txBody>
+          <a:bodyPr wrap="square" anchor="ctr" anchorCtr="0">
+            <a:spAutoFit/>
+          </a:bodyPr>
+          <a:lstStyle/>
+          <a:p>
+            <a:pPr algn="ctr"/>
+            <a:r>
+              <a:rPr lang="ja-JP" altLang="en-US" sz="5400" dirty="0">
+                <a:latin typeface="源ノ角ゴシック JP Heavy" panose="020B0A00000000000000" pitchFamily="34" charset="-128"/>
+                <a:ea typeface="源ノ角ゴシック JP Heavy" panose="020B0A00000000000000" pitchFamily="34" charset="-128"/>
+              </a:rPr>
+              <a:t>迷子状態</a:t>
+            </a:r>
+          </a:p>
+        </p:txBody>
+      </p:sp>
+      <p:sp>
+        <p:nvSpPr>
+          <p:cNvPr id="4" name="テキスト ボックス 3">
+            <a:extLst>
+              <a:ext uri="{FF2B5EF4-FFF2-40B4-BE49-F238E27FC236}">
+                <a16:creationId xmlns:a16="http://schemas.microsoft.com/office/drawing/2014/main" id="{3FC13341-96D7-BF2F-A3D2-AA8BD6E33E54}"/>
+              </a:ext>
+            </a:extLst>
+          </p:cNvPr>
+          <p:cNvSpPr txBox="1"/>
+          <p:nvPr/>
+        </p:nvSpPr>
+        <p:spPr>
+          <a:xfrm>
+            <a:off x="3049044" y="4681314"/>
+            <a:ext cx="6093912" cy="923330"/>
+          </a:xfrm>
+          <a:prstGeom prst="rect">
+            <a:avLst/>
+          </a:prstGeom>
+          <a:noFill/>
+        </p:spPr>
+        <p:txBody>
+          <a:bodyPr wrap="square" anchor="ctr" anchorCtr="0">
+            <a:spAutoFit/>
+          </a:bodyPr>
+          <a:lstStyle/>
+          <a:p>
+            <a:pPr algn="ctr"/>
+            <a:r>
+              <a:rPr lang="ja-JP" altLang="en-US" sz="5400" dirty="0">
+                <a:latin typeface="源ノ角ゴシック JP Heavy" panose="020B0A00000000000000" pitchFamily="34" charset="-128"/>
+                <a:ea typeface="源ノ角ゴシック JP Heavy" panose="020B0A00000000000000" pitchFamily="34" charset="-128"/>
+              </a:rPr>
+              <a:t>構造レイヤー</a:t>
+            </a:r>
+            <a:endParaRPr lang="ja-JP" altLang="en-US" sz="5400" dirty="0"/>
           </a:p>
         </p:txBody>
       </p:sp>
@@ -7554,6 +8829,149 @@
 </file>
 
 <file path=ppt/slides/slide26.xml><?xml version="1.0" encoding="utf-8"?>
+<p:sld xmlns:a="http://schemas.openxmlformats.org/drawingml/2006/main" xmlns:r="http://schemas.openxmlformats.org/officeDocument/2006/relationships" xmlns:p="http://schemas.openxmlformats.org/presentationml/2006/main">
+  <p:cSld>
+    <p:bg>
+      <p:bgPr>
+        <a:solidFill>
+          <a:srgbClr val="FFFFFF"/>
+        </a:solidFill>
+        <a:effectLst/>
+      </p:bgPr>
+    </p:bg>
+    <p:spTree>
+      <p:nvGrpSpPr>
+        <p:cNvPr id="1" name="">
+          <a:extLst>
+            <a:ext uri="{FF2B5EF4-FFF2-40B4-BE49-F238E27FC236}">
+              <a16:creationId xmlns:a16="http://schemas.microsoft.com/office/drawing/2014/main" id="{4B3922D2-6952-4186-DC85-139A58218004}"/>
+            </a:ext>
+          </a:extLst>
+        </p:cNvPr>
+        <p:cNvGrpSpPr/>
+        <p:nvPr/>
+      </p:nvGrpSpPr>
+      <p:grpSpPr>
+        <a:xfrm>
+          <a:off x="0" y="0"/>
+          <a:ext cx="0" cy="0"/>
+          <a:chOff x="0" y="0"/>
+          <a:chExt cx="0" cy="0"/>
+        </a:xfrm>
+      </p:grpSpPr>
+      <p:sp>
+        <p:nvSpPr>
+          <p:cNvPr id="6" name="テキスト ボックス 5">
+            <a:extLst>
+              <a:ext uri="{FF2B5EF4-FFF2-40B4-BE49-F238E27FC236}">
+                <a16:creationId xmlns:a16="http://schemas.microsoft.com/office/drawing/2014/main" id="{02FA0A6E-BA74-9430-E884-A254634C7F9D}"/>
+              </a:ext>
+            </a:extLst>
+          </p:cNvPr>
+          <p:cNvSpPr txBox="1"/>
+          <p:nvPr/>
+        </p:nvSpPr>
+        <p:spPr>
+          <a:xfrm>
+            <a:off x="6096001" y="2453669"/>
+            <a:ext cx="4227184" cy="2308324"/>
+          </a:xfrm>
+          <a:prstGeom prst="rect">
+            <a:avLst/>
+          </a:prstGeom>
+          <a:noFill/>
+        </p:spPr>
+        <p:txBody>
+          <a:bodyPr wrap="square">
+            <a:spAutoFit/>
+          </a:bodyPr>
+          <a:lstStyle/>
+          <a:p>
+            <a:pPr algn="ctr"/>
+            <a:r>
+              <a:rPr lang="ja-JP" altLang="en-US" sz="7200" dirty="0">
+                <a:latin typeface="源ノ角ゴシック JP Heavy" panose="020B0A00000000000000" pitchFamily="34" charset="-128"/>
+                <a:ea typeface="源ノ角ゴシック JP Heavy" panose="020B0A00000000000000" pitchFamily="34" charset="-128"/>
+              </a:rPr>
+              <a:t>学習を</a:t>
+            </a:r>
+            <a:endParaRPr lang="en-US" altLang="ja-JP" sz="7200" dirty="0">
+              <a:latin typeface="源ノ角ゴシック JP Heavy" panose="020B0A00000000000000" pitchFamily="34" charset="-128"/>
+              <a:ea typeface="源ノ角ゴシック JP Heavy" panose="020B0A00000000000000" pitchFamily="34" charset="-128"/>
+            </a:endParaRPr>
+          </a:p>
+          <a:p>
+            <a:pPr algn="ctr"/>
+            <a:r>
+              <a:rPr lang="ja-JP" altLang="en-US" sz="7200" dirty="0">
+                <a:latin typeface="源ノ角ゴシック JP Heavy" panose="020B0A00000000000000" pitchFamily="34" charset="-128"/>
+                <a:ea typeface="源ノ角ゴシック JP Heavy" panose="020B0A00000000000000" pitchFamily="34" charset="-128"/>
+              </a:rPr>
+              <a:t>サポート</a:t>
+            </a:r>
+          </a:p>
+        </p:txBody>
+      </p:sp>
+      <p:sp>
+        <p:nvSpPr>
+          <p:cNvPr id="8" name="テキスト ボックス 7">
+            <a:extLst>
+              <a:ext uri="{FF2B5EF4-FFF2-40B4-BE49-F238E27FC236}">
+                <a16:creationId xmlns:a16="http://schemas.microsoft.com/office/drawing/2014/main" id="{1B405B49-B70A-666B-33A2-09163813E5A6}"/>
+              </a:ext>
+            </a:extLst>
+          </p:cNvPr>
+          <p:cNvSpPr txBox="1"/>
+          <p:nvPr/>
+        </p:nvSpPr>
+        <p:spPr>
+          <a:xfrm>
+            <a:off x="1868815" y="2823001"/>
+            <a:ext cx="4227185" cy="1569660"/>
+          </a:xfrm>
+          <a:prstGeom prst="rect">
+            <a:avLst/>
+          </a:prstGeom>
+          <a:noFill/>
+        </p:spPr>
+        <p:txBody>
+          <a:bodyPr wrap="square">
+            <a:spAutoFit/>
+          </a:bodyPr>
+          <a:lstStyle/>
+          <a:p>
+            <a:r>
+              <a:rPr lang="ja-JP" altLang="en-US" sz="9600" dirty="0">
+                <a:solidFill>
+                  <a:srgbClr val="00B0F0"/>
+                </a:solidFill>
+                <a:latin typeface="源ノ角ゴシック JP Heavy" panose="020B0A00000000000000" pitchFamily="34" charset="-128"/>
+                <a:ea typeface="源ノ角ゴシック JP Heavy" panose="020B0A00000000000000" pitchFamily="34" charset="-128"/>
+              </a:rPr>
+              <a:t>効率的</a:t>
+            </a:r>
+            <a:endParaRPr lang="ja-JP" altLang="en-US" sz="9600" dirty="0">
+              <a:solidFill>
+                <a:srgbClr val="00B0F0"/>
+              </a:solidFill>
+            </a:endParaRPr>
+          </a:p>
+        </p:txBody>
+      </p:sp>
+    </p:spTree>
+    <p:extLst>
+      <p:ext uri="{BB962C8B-B14F-4D97-AF65-F5344CB8AC3E}">
+        <p14:creationId xmlns:p14="http://schemas.microsoft.com/office/powerpoint/2010/main" val="3951323408"/>
+      </p:ext>
+    </p:extLst>
+  </p:cSld>
+  <p:clrMapOvr>
+    <a:masterClrMapping/>
+  </p:clrMapOvr>
+</p:sld>
+</file>
+
+<file path=ppt/slides/slide27.xml><?xml version="1.0" encoding="utf-8"?>
 <p:sld xmlns:a="http://schemas.openxmlformats.org/drawingml/2006/main" xmlns:r="http://schemas.openxmlformats.org/officeDocument/2006/relationships" xmlns:p="http://schemas.openxmlformats.org/presentationml/2006/main">
   <p:cSld>
     <p:bg>
@@ -7767,7 +9185,7 @@
 </p:sld>
 </file>
 
-<file path=ppt/slides/slide27.xml><?xml version="1.0" encoding="utf-8"?>
+<file path=ppt/slides/slide28.xml><?xml version="1.0" encoding="utf-8"?>
 <p:sld xmlns:a="http://schemas.openxmlformats.org/drawingml/2006/main" xmlns:r="http://schemas.openxmlformats.org/officeDocument/2006/relationships" xmlns:p="http://schemas.openxmlformats.org/presentationml/2006/main">
   <p:cSld>
     <p:bg>
@@ -7981,7 +9399,7 @@
 </p:sld>
 </file>
 
-<file path=ppt/slides/slide28.xml><?xml version="1.0" encoding="utf-8"?>
+<file path=ppt/slides/slide29.xml><?xml version="1.0" encoding="utf-8"?>
 <p:sld xmlns:a="http://schemas.openxmlformats.org/drawingml/2006/main" xmlns:r="http://schemas.openxmlformats.org/officeDocument/2006/relationships" xmlns:p="http://schemas.openxmlformats.org/presentationml/2006/main">
   <p:cSld>
     <p:bg>
@@ -8307,6 +9725,2217 @@
 </p:sld>
 </file>
 
+<file path=ppt/slides/slide30.xml><?xml version="1.0" encoding="utf-8"?>
+<p:sld xmlns:a="http://schemas.openxmlformats.org/drawingml/2006/main" xmlns:r="http://schemas.openxmlformats.org/officeDocument/2006/relationships" xmlns:p="http://schemas.openxmlformats.org/presentationml/2006/main">
+  <p:cSld>
+    <p:bg>
+      <p:bgPr>
+        <a:solidFill>
+          <a:schemeClr val="bg1"/>
+        </a:solidFill>
+        <a:effectLst/>
+      </p:bgPr>
+    </p:bg>
+    <p:spTree>
+      <p:nvGrpSpPr>
+        <p:cNvPr id="1" name="">
+          <a:extLst>
+            <a:ext uri="{FF2B5EF4-FFF2-40B4-BE49-F238E27FC236}">
+              <a16:creationId xmlns:a16="http://schemas.microsoft.com/office/drawing/2014/main" id="{C27F1122-A230-06B9-A99F-DFCDA70523EC}"/>
+            </a:ext>
+          </a:extLst>
+        </p:cNvPr>
+        <p:cNvGrpSpPr/>
+        <p:nvPr/>
+      </p:nvGrpSpPr>
+      <p:grpSpPr>
+        <a:xfrm>
+          <a:off x="0" y="0"/>
+          <a:ext cx="0" cy="0"/>
+          <a:chOff x="0" y="0"/>
+          <a:chExt cx="0" cy="0"/>
+        </a:xfrm>
+      </p:grpSpPr>
+      <p:sp>
+        <p:nvSpPr>
+          <p:cNvPr id="9" name="タイトル 1">
+            <a:extLst>
+              <a:ext uri="{FF2B5EF4-FFF2-40B4-BE49-F238E27FC236}">
+                <a16:creationId xmlns:a16="http://schemas.microsoft.com/office/drawing/2014/main" id="{912D5852-FFB9-AF12-3FE3-9A369E0230F4}"/>
+              </a:ext>
+            </a:extLst>
+          </p:cNvPr>
+          <p:cNvSpPr txBox="1">
+            <a:spLocks/>
+          </p:cNvSpPr>
+          <p:nvPr/>
+        </p:nvSpPr>
+        <p:spPr>
+          <a:xfrm>
+            <a:off x="6566316" y="2023572"/>
+            <a:ext cx="5004216" cy="2810855"/>
+          </a:xfrm>
+          <a:prstGeom prst="rect">
+            <a:avLst/>
+          </a:prstGeom>
+          <a:noFill/>
+        </p:spPr>
+        <p:txBody>
+          <a:bodyPr vert="horz" lIns="91440" tIns="45720" rIns="91440" bIns="45720" rtlCol="0" anchor="ctr" anchorCtr="0">
+            <a:normAutofit/>
+          </a:bodyPr>
+          <a:lstStyle>
+            <a:lvl1pPr algn="ctr" defTabSz="914400" rtl="0" eaLnBrk="1" latinLnBrk="0" hangingPunct="1">
+              <a:lnSpc>
+                <a:spcPct val="90000"/>
+              </a:lnSpc>
+              <a:spcBef>
+                <a:spcPct val="0"/>
+              </a:spcBef>
+              <a:buNone/>
+              <a:defRPr kumimoji="1" sz="6000" kern="1200">
+                <a:solidFill>
+                  <a:schemeClr val="tx1"/>
+                </a:solidFill>
+                <a:latin typeface="+mj-lt"/>
+                <a:ea typeface="+mj-ea"/>
+                <a:cs typeface="+mj-cs"/>
+              </a:defRPr>
+            </a:lvl1pPr>
+          </a:lstStyle>
+          <a:p>
+            <a:r>
+              <a:rPr lang="ja-JP" altLang="en-US" sz="11500" dirty="0">
+                <a:solidFill>
+                  <a:srgbClr val="FFCC99"/>
+                </a:solidFill>
+                <a:latin typeface="源ノ角ゴシック JP Heavy" panose="020B0A00000000000000" pitchFamily="34" charset="-128"/>
+                <a:ea typeface="源ノ角ゴシック JP Heavy" panose="020B0A00000000000000" pitchFamily="34" charset="-128"/>
+              </a:rPr>
+              <a:t>成長</a:t>
+            </a:r>
+          </a:p>
+        </p:txBody>
+      </p:sp>
+      <p:sp>
+        <p:nvSpPr>
+          <p:cNvPr id="8" name="タイトル 1">
+            <a:extLst>
+              <a:ext uri="{FF2B5EF4-FFF2-40B4-BE49-F238E27FC236}">
+                <a16:creationId xmlns:a16="http://schemas.microsoft.com/office/drawing/2014/main" id="{9A7183A4-F8E5-006A-8CDC-914F267EA385}"/>
+              </a:ext>
+            </a:extLst>
+          </p:cNvPr>
+          <p:cNvSpPr txBox="1">
+            <a:spLocks/>
+          </p:cNvSpPr>
+          <p:nvPr/>
+        </p:nvSpPr>
+        <p:spPr>
+          <a:xfrm>
+            <a:off x="432008" y="2023572"/>
+            <a:ext cx="5004216" cy="2810855"/>
+          </a:xfrm>
+          <a:prstGeom prst="rect">
+            <a:avLst/>
+          </a:prstGeom>
+          <a:noFill/>
+        </p:spPr>
+        <p:txBody>
+          <a:bodyPr vert="horz" lIns="91440" tIns="45720" rIns="91440" bIns="45720" rtlCol="0" anchor="ctr" anchorCtr="0">
+            <a:normAutofit/>
+          </a:bodyPr>
+          <a:lstStyle>
+            <a:lvl1pPr algn="ctr" defTabSz="914400" rtl="0" eaLnBrk="1" latinLnBrk="0" hangingPunct="1">
+              <a:lnSpc>
+                <a:spcPct val="90000"/>
+              </a:lnSpc>
+              <a:spcBef>
+                <a:spcPct val="0"/>
+              </a:spcBef>
+              <a:buNone/>
+              <a:defRPr kumimoji="1" sz="6000" kern="1200">
+                <a:solidFill>
+                  <a:schemeClr val="tx1"/>
+                </a:solidFill>
+                <a:latin typeface="+mj-lt"/>
+                <a:ea typeface="+mj-ea"/>
+                <a:cs typeface="+mj-cs"/>
+              </a:defRPr>
+            </a:lvl1pPr>
+          </a:lstStyle>
+          <a:p>
+            <a:r>
+              <a:rPr lang="ja-JP" altLang="en-US" sz="11500" dirty="0">
+                <a:solidFill>
+                  <a:schemeClr val="accent6">
+                    <a:lumMod val="20000"/>
+                    <a:lumOff val="80000"/>
+                  </a:schemeClr>
+                </a:solidFill>
+                <a:latin typeface="源ノ角ゴシック JP Heavy" panose="020B0A00000000000000" pitchFamily="34" charset="-128"/>
+                <a:ea typeface="源ノ角ゴシック JP Heavy" panose="020B0A00000000000000" pitchFamily="34" charset="-128"/>
+              </a:rPr>
+              <a:t>生成</a:t>
+            </a:r>
+          </a:p>
+        </p:txBody>
+      </p:sp>
+      <p:sp>
+        <p:nvSpPr>
+          <p:cNvPr id="3" name="タイトル 1">
+            <a:extLst>
+              <a:ext uri="{FF2B5EF4-FFF2-40B4-BE49-F238E27FC236}">
+                <a16:creationId xmlns:a16="http://schemas.microsoft.com/office/drawing/2014/main" id="{F04B1D9F-3B17-445C-27BC-B4C7C6E9C182}"/>
+              </a:ext>
+            </a:extLst>
+          </p:cNvPr>
+          <p:cNvSpPr txBox="1">
+            <a:spLocks/>
+          </p:cNvSpPr>
+          <p:nvPr/>
+        </p:nvSpPr>
+        <p:spPr>
+          <a:xfrm>
+            <a:off x="6515100" y="3645447"/>
+            <a:ext cx="5055433" cy="701731"/>
+          </a:xfrm>
+          <a:prstGeom prst="rect">
+            <a:avLst/>
+          </a:prstGeom>
+        </p:spPr>
+        <p:txBody>
+          <a:bodyPr vert="horz" wrap="square" lIns="91440" tIns="45720" rIns="91440" bIns="45720" rtlCol="0" anchor="ctr" anchorCtr="0">
+            <a:spAutoFit/>
+          </a:bodyPr>
+          <a:lstStyle>
+            <a:lvl1pPr algn="ctr" defTabSz="914400" rtl="0" eaLnBrk="1" latinLnBrk="0" hangingPunct="1">
+              <a:lnSpc>
+                <a:spcPct val="90000"/>
+              </a:lnSpc>
+              <a:spcBef>
+                <a:spcPct val="0"/>
+              </a:spcBef>
+              <a:buNone/>
+              <a:defRPr kumimoji="1" sz="6000" kern="1200">
+                <a:solidFill>
+                  <a:schemeClr val="tx1"/>
+                </a:solidFill>
+                <a:latin typeface="+mj-lt"/>
+                <a:ea typeface="+mj-ea"/>
+                <a:cs typeface="+mj-cs"/>
+              </a:defRPr>
+            </a:lvl1pPr>
+          </a:lstStyle>
+          <a:p>
+            <a:r>
+              <a:rPr lang="ja-JP" altLang="en-US" sz="4400" dirty="0">
+                <a:latin typeface="源ノ角ゴシック JP Heavy" panose="020B0A00000000000000" pitchFamily="34" charset="-128"/>
+                <a:ea typeface="源ノ角ゴシック JP Heavy" panose="020B0A00000000000000" pitchFamily="34" charset="-128"/>
+              </a:rPr>
+              <a:t>理解の手助け</a:t>
+            </a:r>
+            <a:endParaRPr lang="en-US" altLang="ja-JP" sz="4400" dirty="0">
+              <a:latin typeface="源ノ角ゴシック JP Heavy" panose="020B0A00000000000000" pitchFamily="34" charset="-128"/>
+              <a:ea typeface="源ノ角ゴシック JP Heavy" panose="020B0A00000000000000" pitchFamily="34" charset="-128"/>
+            </a:endParaRPr>
+          </a:p>
+        </p:txBody>
+      </p:sp>
+      <p:sp>
+        <p:nvSpPr>
+          <p:cNvPr id="2" name="タイトル 1">
+            <a:extLst>
+              <a:ext uri="{FF2B5EF4-FFF2-40B4-BE49-F238E27FC236}">
+                <a16:creationId xmlns:a16="http://schemas.microsoft.com/office/drawing/2014/main" id="{56B09E4C-1A2B-AFC8-B0CE-063207D5893D}"/>
+              </a:ext>
+            </a:extLst>
+          </p:cNvPr>
+          <p:cNvSpPr txBox="1">
+            <a:spLocks/>
+          </p:cNvSpPr>
+          <p:nvPr/>
+        </p:nvSpPr>
+        <p:spPr>
+          <a:xfrm>
+            <a:off x="6515100" y="2471216"/>
+            <a:ext cx="5055433" cy="701731"/>
+          </a:xfrm>
+          <a:prstGeom prst="rect">
+            <a:avLst/>
+          </a:prstGeom>
+        </p:spPr>
+        <p:txBody>
+          <a:bodyPr vert="horz" wrap="square" lIns="91440" tIns="45720" rIns="91440" bIns="45720" rtlCol="0" anchor="ctr" anchorCtr="0">
+            <a:spAutoFit/>
+          </a:bodyPr>
+          <a:lstStyle>
+            <a:lvl1pPr algn="ctr" defTabSz="914400" rtl="0" eaLnBrk="1" latinLnBrk="0" hangingPunct="1">
+              <a:lnSpc>
+                <a:spcPct val="90000"/>
+              </a:lnSpc>
+              <a:spcBef>
+                <a:spcPct val="0"/>
+              </a:spcBef>
+              <a:buNone/>
+              <a:defRPr kumimoji="1" sz="6000" kern="1200">
+                <a:solidFill>
+                  <a:schemeClr val="tx1"/>
+                </a:solidFill>
+                <a:latin typeface="+mj-lt"/>
+                <a:ea typeface="+mj-ea"/>
+                <a:cs typeface="+mj-cs"/>
+              </a:defRPr>
+            </a:lvl1pPr>
+          </a:lstStyle>
+          <a:p>
+            <a:r>
+              <a:rPr lang="ja-JP" altLang="en-US" sz="4400" dirty="0">
+                <a:latin typeface="源ノ角ゴシック JP Heavy" panose="020B0A00000000000000" pitchFamily="34" charset="-128"/>
+                <a:ea typeface="源ノ角ゴシック JP Heavy" panose="020B0A00000000000000" pitchFamily="34" charset="-128"/>
+              </a:rPr>
+              <a:t>最適なスタイル</a:t>
+            </a:r>
+            <a:endParaRPr lang="en-US" altLang="ja-JP" sz="4400" dirty="0">
+              <a:latin typeface="源ノ角ゴシック JP Heavy" panose="020B0A00000000000000" pitchFamily="34" charset="-128"/>
+              <a:ea typeface="源ノ角ゴシック JP Heavy" panose="020B0A00000000000000" pitchFamily="34" charset="-128"/>
+            </a:endParaRPr>
+          </a:p>
+        </p:txBody>
+      </p:sp>
+      <p:sp>
+        <p:nvSpPr>
+          <p:cNvPr id="4" name="タイトル 1">
+            <a:extLst>
+              <a:ext uri="{FF2B5EF4-FFF2-40B4-BE49-F238E27FC236}">
+                <a16:creationId xmlns:a16="http://schemas.microsoft.com/office/drawing/2014/main" id="{C7CF4C5D-851D-84BB-B9BA-6BA0098FFBA7}"/>
+              </a:ext>
+            </a:extLst>
+          </p:cNvPr>
+          <p:cNvSpPr txBox="1">
+            <a:spLocks/>
+          </p:cNvSpPr>
+          <p:nvPr/>
+        </p:nvSpPr>
+        <p:spPr>
+          <a:xfrm>
+            <a:off x="6515100" y="3078135"/>
+            <a:ext cx="5055433" cy="701731"/>
+          </a:xfrm>
+          <a:prstGeom prst="rect">
+            <a:avLst/>
+          </a:prstGeom>
+        </p:spPr>
+        <p:txBody>
+          <a:bodyPr vert="horz" wrap="square" lIns="91440" tIns="45720" rIns="91440" bIns="45720" rtlCol="0" anchor="ctr" anchorCtr="0">
+            <a:spAutoFit/>
+          </a:bodyPr>
+          <a:lstStyle>
+            <a:lvl1pPr algn="ctr" defTabSz="914400" rtl="0" eaLnBrk="1" latinLnBrk="0" hangingPunct="1">
+              <a:lnSpc>
+                <a:spcPct val="90000"/>
+              </a:lnSpc>
+              <a:spcBef>
+                <a:spcPct val="0"/>
+              </a:spcBef>
+              <a:buNone/>
+              <a:defRPr kumimoji="1" sz="6000" kern="1200">
+                <a:solidFill>
+                  <a:schemeClr val="tx1"/>
+                </a:solidFill>
+                <a:latin typeface="+mj-lt"/>
+                <a:ea typeface="+mj-ea"/>
+                <a:cs typeface="+mj-cs"/>
+              </a:defRPr>
+            </a:lvl1pPr>
+          </a:lstStyle>
+          <a:p>
+            <a:r>
+              <a:rPr lang="en-US" altLang="ja-JP" sz="4400" dirty="0">
+                <a:latin typeface="源ノ角ゴシック JP Heavy" panose="020B0A00000000000000" pitchFamily="34" charset="-128"/>
+                <a:ea typeface="源ノ角ゴシック JP Heavy" panose="020B0A00000000000000" pitchFamily="34" charset="-128"/>
+              </a:rPr>
+              <a:t>+</a:t>
+            </a:r>
+          </a:p>
+        </p:txBody>
+      </p:sp>
+      <p:sp>
+        <p:nvSpPr>
+          <p:cNvPr id="5" name="タイトル 1">
+            <a:extLst>
+              <a:ext uri="{FF2B5EF4-FFF2-40B4-BE49-F238E27FC236}">
+                <a16:creationId xmlns:a16="http://schemas.microsoft.com/office/drawing/2014/main" id="{D4357866-A222-6494-78CE-FA7BE0301D93}"/>
+              </a:ext>
+            </a:extLst>
+          </p:cNvPr>
+          <p:cNvSpPr txBox="1">
+            <a:spLocks/>
+          </p:cNvSpPr>
+          <p:nvPr/>
+        </p:nvSpPr>
+        <p:spPr>
+          <a:xfrm>
+            <a:off x="406400" y="2452810"/>
+            <a:ext cx="5055433" cy="1920526"/>
+          </a:xfrm>
+          <a:prstGeom prst="rect">
+            <a:avLst/>
+          </a:prstGeom>
+        </p:spPr>
+        <p:txBody>
+          <a:bodyPr vert="horz" wrap="square" lIns="91440" tIns="45720" rIns="91440" bIns="45720" rtlCol="0" anchor="ctr" anchorCtr="0">
+            <a:spAutoFit/>
+          </a:bodyPr>
+          <a:lstStyle>
+            <a:lvl1pPr algn="ctr" defTabSz="914400" rtl="0" eaLnBrk="1" latinLnBrk="0" hangingPunct="1">
+              <a:lnSpc>
+                <a:spcPct val="90000"/>
+              </a:lnSpc>
+              <a:spcBef>
+                <a:spcPct val="0"/>
+              </a:spcBef>
+              <a:buNone/>
+              <a:defRPr kumimoji="1" sz="6000" kern="1200">
+                <a:solidFill>
+                  <a:schemeClr val="tx1"/>
+                </a:solidFill>
+                <a:latin typeface="+mj-lt"/>
+                <a:ea typeface="+mj-ea"/>
+                <a:cs typeface="+mj-cs"/>
+              </a:defRPr>
+            </a:lvl1pPr>
+          </a:lstStyle>
+          <a:p>
+            <a:r>
+              <a:rPr lang="ja-JP" altLang="en-US" sz="4400" dirty="0">
+                <a:latin typeface="源ノ角ゴシック JP Heavy" panose="020B0A00000000000000" pitchFamily="34" charset="-128"/>
+                <a:ea typeface="源ノ角ゴシック JP Heavy" panose="020B0A00000000000000" pitchFamily="34" charset="-128"/>
+              </a:rPr>
+              <a:t>選択肢</a:t>
+            </a:r>
+            <a:endParaRPr lang="en-US" altLang="ja-JP" sz="4400" dirty="0">
+              <a:latin typeface="源ノ角ゴシック JP Heavy" panose="020B0A00000000000000" pitchFamily="34" charset="-128"/>
+              <a:ea typeface="源ノ角ゴシック JP Heavy" panose="020B0A00000000000000" pitchFamily="34" charset="-128"/>
+            </a:endParaRPr>
+          </a:p>
+          <a:p>
+            <a:r>
+              <a:rPr lang="ja-JP" altLang="en-US" sz="4400" dirty="0">
+                <a:latin typeface="源ノ角ゴシック JP Heavy" panose="020B0A00000000000000" pitchFamily="34" charset="-128"/>
+                <a:ea typeface="源ノ角ゴシック JP Heavy" panose="020B0A00000000000000" pitchFamily="34" charset="-128"/>
+              </a:rPr>
+              <a:t>ドキュメント</a:t>
+            </a:r>
+            <a:endParaRPr lang="en-US" altLang="ja-JP" sz="4400" dirty="0">
+              <a:latin typeface="源ノ角ゴシック JP Heavy" panose="020B0A00000000000000" pitchFamily="34" charset="-128"/>
+              <a:ea typeface="源ノ角ゴシック JP Heavy" panose="020B0A00000000000000" pitchFamily="34" charset="-128"/>
+            </a:endParaRPr>
+          </a:p>
+          <a:p>
+            <a:r>
+              <a:rPr lang="ja-JP" altLang="en-US" sz="4400" dirty="0">
+                <a:latin typeface="源ノ角ゴシック JP Heavy" panose="020B0A00000000000000" pitchFamily="34" charset="-128"/>
+                <a:ea typeface="源ノ角ゴシック JP Heavy" panose="020B0A00000000000000" pitchFamily="34" charset="-128"/>
+              </a:rPr>
+              <a:t>ノードマップ</a:t>
+            </a:r>
+            <a:endParaRPr lang="en-US" altLang="ja-JP" sz="4400" dirty="0">
+              <a:latin typeface="源ノ角ゴシック JP Heavy" panose="020B0A00000000000000" pitchFamily="34" charset="-128"/>
+              <a:ea typeface="源ノ角ゴシック JP Heavy" panose="020B0A00000000000000" pitchFamily="34" charset="-128"/>
+            </a:endParaRPr>
+          </a:p>
+        </p:txBody>
+      </p:sp>
+      <p:sp>
+        <p:nvSpPr>
+          <p:cNvPr id="6" name="矢印: 右 5">
+            <a:extLst>
+              <a:ext uri="{FF2B5EF4-FFF2-40B4-BE49-F238E27FC236}">
+                <a16:creationId xmlns:a16="http://schemas.microsoft.com/office/drawing/2014/main" id="{C0CF3A7D-4430-0E3A-4A5E-52D8640709BA}"/>
+              </a:ext>
+            </a:extLst>
+          </p:cNvPr>
+          <p:cNvSpPr/>
+          <p:nvPr/>
+        </p:nvSpPr>
+        <p:spPr>
+          <a:xfrm>
+            <a:off x="5461833" y="3172947"/>
+            <a:ext cx="787817" cy="512109"/>
+          </a:xfrm>
+          <a:prstGeom prst="rightArrow">
+            <a:avLst>
+              <a:gd name="adj1" fmla="val 29258"/>
+              <a:gd name="adj2" fmla="val 67779"/>
+            </a:avLst>
+          </a:prstGeom>
+          <a:ln>
+            <a:noFill/>
+          </a:ln>
+        </p:spPr>
+        <p:style>
+          <a:lnRef idx="2">
+            <a:schemeClr val="dk1">
+              <a:shade val="15000"/>
+            </a:schemeClr>
+          </a:lnRef>
+          <a:fillRef idx="1">
+            <a:schemeClr val="dk1"/>
+          </a:fillRef>
+          <a:effectRef idx="0">
+            <a:schemeClr val="dk1"/>
+          </a:effectRef>
+          <a:fontRef idx="minor">
+            <a:schemeClr val="lt1"/>
+          </a:fontRef>
+        </p:style>
+        <p:txBody>
+          <a:bodyPr rtlCol="0" anchor="ctr"/>
+          <a:lstStyle/>
+          <a:p>
+            <a:pPr algn="ctr"/>
+            <a:endParaRPr kumimoji="1" lang="ja-JP" altLang="en-US"/>
+          </a:p>
+        </p:txBody>
+      </p:sp>
+    </p:spTree>
+    <p:extLst>
+      <p:ext uri="{BB962C8B-B14F-4D97-AF65-F5344CB8AC3E}">
+        <p14:creationId xmlns:p14="http://schemas.microsoft.com/office/powerpoint/2010/main" val="6496709"/>
+      </p:ext>
+    </p:extLst>
+  </p:cSld>
+  <p:clrMapOvr>
+    <a:masterClrMapping/>
+  </p:clrMapOvr>
+</p:sld>
+</file>
+
+<file path=ppt/slides/slide31.xml><?xml version="1.0" encoding="utf-8"?>
+<p:sld xmlns:a="http://schemas.openxmlformats.org/drawingml/2006/main" xmlns:r="http://schemas.openxmlformats.org/officeDocument/2006/relationships" xmlns:p="http://schemas.openxmlformats.org/presentationml/2006/main">
+  <p:cSld>
+    <p:bg>
+      <p:bgPr>
+        <a:solidFill>
+          <a:schemeClr val="tx1">
+            <a:lumMod val="75000"/>
+            <a:lumOff val="25000"/>
+          </a:schemeClr>
+        </a:solidFill>
+        <a:effectLst/>
+      </p:bgPr>
+    </p:bg>
+    <p:spTree>
+      <p:nvGrpSpPr>
+        <p:cNvPr id="1" name="">
+          <a:extLst>
+            <a:ext uri="{FF2B5EF4-FFF2-40B4-BE49-F238E27FC236}">
+              <a16:creationId xmlns:a16="http://schemas.microsoft.com/office/drawing/2014/main" id="{02A0D3D1-3D76-EF7B-4D65-1DC0EC2E91E5}"/>
+            </a:ext>
+          </a:extLst>
+        </p:cNvPr>
+        <p:cNvGrpSpPr/>
+        <p:nvPr/>
+      </p:nvGrpSpPr>
+      <p:grpSpPr>
+        <a:xfrm>
+          <a:off x="0" y="0"/>
+          <a:ext cx="0" cy="0"/>
+          <a:chOff x="0" y="0"/>
+          <a:chExt cx="0" cy="0"/>
+        </a:xfrm>
+      </p:grpSpPr>
+      <p:sp>
+        <p:nvSpPr>
+          <p:cNvPr id="10" name="テキスト ボックス 9">
+            <a:extLst>
+              <a:ext uri="{FF2B5EF4-FFF2-40B4-BE49-F238E27FC236}">
+                <a16:creationId xmlns:a16="http://schemas.microsoft.com/office/drawing/2014/main" id="{6A58E53B-424B-5BA8-09F4-8A8D498D4480}"/>
+              </a:ext>
+            </a:extLst>
+          </p:cNvPr>
+          <p:cNvSpPr txBox="1"/>
+          <p:nvPr/>
+        </p:nvSpPr>
+        <p:spPr>
+          <a:xfrm>
+            <a:off x="2651603" y="1543868"/>
+            <a:ext cx="6888793" cy="3770263"/>
+          </a:xfrm>
+          <a:prstGeom prst="rect">
+            <a:avLst/>
+          </a:prstGeom>
+          <a:noFill/>
+        </p:spPr>
+        <p:txBody>
+          <a:bodyPr wrap="square">
+            <a:spAutoFit/>
+          </a:bodyPr>
+          <a:lstStyle/>
+          <a:p>
+            <a:pPr algn="ctr"/>
+            <a:r>
+              <a:rPr lang="ja-JP" altLang="en-US" sz="23900" dirty="0">
+                <a:solidFill>
+                  <a:schemeClr val="bg1"/>
+                </a:solidFill>
+                <a:latin typeface="源ノ角ゴシック JP Heavy" panose="020B0A00000000000000" pitchFamily="34" charset="-128"/>
+                <a:ea typeface="源ノ角ゴシック JP Heavy" panose="020B0A00000000000000" pitchFamily="34" charset="-128"/>
+              </a:rPr>
+              <a:t>課題</a:t>
+            </a:r>
+            <a:endParaRPr lang="ja-JP" altLang="en-US" sz="23900" dirty="0">
+              <a:solidFill>
+                <a:schemeClr val="bg1"/>
+              </a:solidFill>
+            </a:endParaRPr>
+          </a:p>
+        </p:txBody>
+      </p:sp>
+    </p:spTree>
+    <p:extLst>
+      <p:ext uri="{BB962C8B-B14F-4D97-AF65-F5344CB8AC3E}">
+        <p14:creationId xmlns:p14="http://schemas.microsoft.com/office/powerpoint/2010/main" val="95275543"/>
+      </p:ext>
+    </p:extLst>
+  </p:cSld>
+  <p:clrMapOvr>
+    <a:masterClrMapping/>
+  </p:clrMapOvr>
+</p:sld>
+</file>
+
+<file path=ppt/slides/slide32.xml><?xml version="1.0" encoding="utf-8"?>
+<p:sld xmlns:a="http://schemas.openxmlformats.org/drawingml/2006/main" xmlns:r="http://schemas.openxmlformats.org/officeDocument/2006/relationships" xmlns:p="http://schemas.openxmlformats.org/presentationml/2006/main">
+  <p:cSld>
+    <p:bg>
+      <p:bgPr>
+        <a:solidFill>
+          <a:schemeClr val="bg1"/>
+        </a:solidFill>
+        <a:effectLst/>
+      </p:bgPr>
+    </p:bg>
+    <p:spTree>
+      <p:nvGrpSpPr>
+        <p:cNvPr id="1" name="">
+          <a:extLst>
+            <a:ext uri="{FF2B5EF4-FFF2-40B4-BE49-F238E27FC236}">
+              <a16:creationId xmlns:a16="http://schemas.microsoft.com/office/drawing/2014/main" id="{73E7E7CB-7F95-F18A-6A62-F8DF0BEDBF04}"/>
+            </a:ext>
+          </a:extLst>
+        </p:cNvPr>
+        <p:cNvGrpSpPr/>
+        <p:nvPr/>
+      </p:nvGrpSpPr>
+      <p:grpSpPr>
+        <a:xfrm>
+          <a:off x="0" y="0"/>
+          <a:ext cx="0" cy="0"/>
+          <a:chOff x="0" y="0"/>
+          <a:chExt cx="0" cy="0"/>
+        </a:xfrm>
+      </p:grpSpPr>
+      <p:sp>
+        <p:nvSpPr>
+          <p:cNvPr id="4" name="テキスト ボックス 3">
+            <a:extLst>
+              <a:ext uri="{FF2B5EF4-FFF2-40B4-BE49-F238E27FC236}">
+                <a16:creationId xmlns:a16="http://schemas.microsoft.com/office/drawing/2014/main" id="{4C743D53-E113-5362-58B9-6A801493312F}"/>
+              </a:ext>
+            </a:extLst>
+          </p:cNvPr>
+          <p:cNvSpPr txBox="1"/>
+          <p:nvPr/>
+        </p:nvSpPr>
+        <p:spPr>
+          <a:xfrm>
+            <a:off x="767001" y="2767280"/>
+            <a:ext cx="10657997" cy="1323439"/>
+          </a:xfrm>
+          <a:prstGeom prst="rect">
+            <a:avLst/>
+          </a:prstGeom>
+          <a:noFill/>
+        </p:spPr>
+        <p:txBody>
+          <a:bodyPr wrap="square">
+            <a:spAutoFit/>
+          </a:bodyPr>
+          <a:lstStyle/>
+          <a:p>
+            <a:pPr algn="ctr"/>
+            <a:r>
+              <a:rPr lang="ja-JP" altLang="en-US" sz="8000" dirty="0">
+                <a:latin typeface="源ノ角ゴシック JP Heavy" panose="020B0A00000000000000" pitchFamily="34" charset="-128"/>
+                <a:ea typeface="源ノ角ゴシック JP Heavy" panose="020B0A00000000000000" pitchFamily="34" charset="-128"/>
+              </a:rPr>
+              <a:t>類似サービス</a:t>
+            </a:r>
+            <a:endParaRPr lang="ja-JP" altLang="en-US" sz="8000" dirty="0"/>
+          </a:p>
+        </p:txBody>
+      </p:sp>
+    </p:spTree>
+    <p:extLst>
+      <p:ext uri="{BB962C8B-B14F-4D97-AF65-F5344CB8AC3E}">
+        <p14:creationId xmlns:p14="http://schemas.microsoft.com/office/powerpoint/2010/main" val="671150929"/>
+      </p:ext>
+    </p:extLst>
+  </p:cSld>
+  <p:clrMapOvr>
+    <a:masterClrMapping/>
+  </p:clrMapOvr>
+</p:sld>
+</file>
+
+<file path=ppt/slides/slide33.xml><?xml version="1.0" encoding="utf-8"?>
+<p:sld xmlns:a="http://schemas.openxmlformats.org/drawingml/2006/main" xmlns:r="http://schemas.openxmlformats.org/officeDocument/2006/relationships" xmlns:p="http://schemas.openxmlformats.org/presentationml/2006/main">
+  <p:cSld>
+    <p:bg>
+      <p:bgPr>
+        <a:solidFill>
+          <a:schemeClr val="bg1"/>
+        </a:solidFill>
+        <a:effectLst/>
+      </p:bgPr>
+    </p:bg>
+    <p:spTree>
+      <p:nvGrpSpPr>
+        <p:cNvPr id="1" name="">
+          <a:extLst>
+            <a:ext uri="{FF2B5EF4-FFF2-40B4-BE49-F238E27FC236}">
+              <a16:creationId xmlns:a16="http://schemas.microsoft.com/office/drawing/2014/main" id="{893EA9AA-CF11-9344-4D6D-39476DD05856}"/>
+            </a:ext>
+          </a:extLst>
+        </p:cNvPr>
+        <p:cNvGrpSpPr/>
+        <p:nvPr/>
+      </p:nvGrpSpPr>
+      <p:grpSpPr>
+        <a:xfrm>
+          <a:off x="0" y="0"/>
+          <a:ext cx="0" cy="0"/>
+          <a:chOff x="0" y="0"/>
+          <a:chExt cx="0" cy="0"/>
+        </a:xfrm>
+      </p:grpSpPr>
+      <p:sp>
+        <p:nvSpPr>
+          <p:cNvPr id="4" name="テキスト ボックス 3">
+            <a:extLst>
+              <a:ext uri="{FF2B5EF4-FFF2-40B4-BE49-F238E27FC236}">
+                <a16:creationId xmlns:a16="http://schemas.microsoft.com/office/drawing/2014/main" id="{04ECC031-5B30-B327-1CAE-6101AF58D48D}"/>
+              </a:ext>
+            </a:extLst>
+          </p:cNvPr>
+          <p:cNvSpPr txBox="1"/>
+          <p:nvPr/>
+        </p:nvSpPr>
+        <p:spPr>
+          <a:xfrm>
+            <a:off x="1465492" y="1544366"/>
+            <a:ext cx="2915999" cy="584775"/>
+          </a:xfrm>
+          <a:prstGeom prst="rect">
+            <a:avLst/>
+          </a:prstGeom>
+          <a:noFill/>
+        </p:spPr>
+        <p:txBody>
+          <a:bodyPr wrap="square">
+            <a:spAutoFit/>
+          </a:bodyPr>
+          <a:lstStyle/>
+          <a:p>
+            <a:pPr algn="ctr"/>
+            <a:r>
+              <a:rPr lang="en-US" altLang="ja-JP" sz="3200" dirty="0">
+                <a:latin typeface="源ノ角ゴシック JP Heavy" panose="020B0A00000000000000" pitchFamily="34" charset="-128"/>
+                <a:ea typeface="源ノ角ゴシック JP Heavy" panose="020B0A00000000000000" pitchFamily="34" charset="-128"/>
+              </a:rPr>
+              <a:t>ChatGPT</a:t>
+            </a:r>
+            <a:endParaRPr lang="ja-JP" altLang="en-US" sz="3200" dirty="0">
+              <a:latin typeface="源ノ角ゴシック JP Heavy" panose="020B0A00000000000000" pitchFamily="34" charset="-128"/>
+              <a:ea typeface="源ノ角ゴシック JP Heavy" panose="020B0A00000000000000" pitchFamily="34" charset="-128"/>
+            </a:endParaRPr>
+          </a:p>
+        </p:txBody>
+      </p:sp>
+      <p:sp>
+        <p:nvSpPr>
+          <p:cNvPr id="6" name="テキスト ボックス 5">
+            <a:extLst>
+              <a:ext uri="{FF2B5EF4-FFF2-40B4-BE49-F238E27FC236}">
+                <a16:creationId xmlns:a16="http://schemas.microsoft.com/office/drawing/2014/main" id="{132B3970-F7D2-604A-D8DD-EC84357F51BC}"/>
+              </a:ext>
+            </a:extLst>
+          </p:cNvPr>
+          <p:cNvSpPr txBox="1"/>
+          <p:nvPr/>
+        </p:nvSpPr>
+        <p:spPr>
+          <a:xfrm>
+            <a:off x="1316943" y="4727987"/>
+            <a:ext cx="3213100" cy="1077218"/>
+          </a:xfrm>
+          <a:prstGeom prst="rect">
+            <a:avLst/>
+          </a:prstGeom>
+          <a:noFill/>
+        </p:spPr>
+        <p:txBody>
+          <a:bodyPr wrap="square">
+            <a:spAutoFit/>
+          </a:bodyPr>
+          <a:lstStyle/>
+          <a:p>
+            <a:pPr algn="ctr"/>
+            <a:r>
+              <a:rPr lang="ja-JP" altLang="en-US" sz="3200" dirty="0">
+                <a:latin typeface="源ノ角ゴシック JP Heavy" panose="020B0A00000000000000" pitchFamily="34" charset="-128"/>
+                <a:ea typeface="源ノ角ゴシック JP Heavy" panose="020B0A00000000000000" pitchFamily="34" charset="-128"/>
+              </a:rPr>
+              <a:t>学習モード</a:t>
+            </a:r>
+            <a:endParaRPr lang="en-US" altLang="ja-JP" sz="3200" dirty="0">
+              <a:latin typeface="源ノ角ゴシック JP Heavy" panose="020B0A00000000000000" pitchFamily="34" charset="-128"/>
+              <a:ea typeface="源ノ角ゴシック JP Heavy" panose="020B0A00000000000000" pitchFamily="34" charset="-128"/>
+            </a:endParaRPr>
+          </a:p>
+          <a:p>
+            <a:pPr algn="ctr"/>
+            <a:r>
+              <a:rPr lang="en-US" altLang="ja-JP" sz="3200" dirty="0">
+                <a:latin typeface="源ノ角ゴシック JP Heavy" panose="020B0A00000000000000" pitchFamily="34" charset="-128"/>
+                <a:ea typeface="源ノ角ゴシック JP Heavy" panose="020B0A00000000000000" pitchFamily="34" charset="-128"/>
+              </a:rPr>
+              <a:t>[ study mode ]</a:t>
+            </a:r>
+            <a:endParaRPr lang="ja-JP" altLang="en-US" sz="3200" dirty="0">
+              <a:latin typeface="源ノ角ゴシック JP Heavy" panose="020B0A00000000000000" pitchFamily="34" charset="-128"/>
+              <a:ea typeface="源ノ角ゴシック JP Heavy" panose="020B0A00000000000000" pitchFamily="34" charset="-128"/>
+            </a:endParaRPr>
+          </a:p>
+        </p:txBody>
+      </p:sp>
+      <p:pic>
+        <p:nvPicPr>
+          <p:cNvPr id="1030" name="Picture 6" descr="OpenAI - Wikipedia">
+            <a:extLst>
+              <a:ext uri="{FF2B5EF4-FFF2-40B4-BE49-F238E27FC236}">
+                <a16:creationId xmlns:a16="http://schemas.microsoft.com/office/drawing/2014/main" id="{F4F53506-2D5E-075C-7712-A5EA58AF5A70}"/>
+              </a:ext>
+            </a:extLst>
+          </p:cNvPr>
+          <p:cNvPicPr>
+            <a:picLocks noChangeAspect="1" noChangeArrowheads="1"/>
+          </p:cNvPicPr>
+          <p:nvPr/>
+        </p:nvPicPr>
+        <p:blipFill>
+          <a:blip r:embed="rId2">
+            <a:extLst>
+              <a:ext uri="{28A0092B-C50C-407E-A947-70E740481C1C}">
+                <a14:useLocalDpi xmlns:a14="http://schemas.microsoft.com/office/drawing/2010/main" val="0"/>
+              </a:ext>
+            </a:extLst>
+          </a:blip>
+          <a:srcRect/>
+          <a:stretch>
+            <a:fillRect/>
+          </a:stretch>
+        </p:blipFill>
+        <p:spPr bwMode="auto">
+          <a:xfrm>
+            <a:off x="1851928" y="2361764"/>
+            <a:ext cx="2143125" cy="2133600"/>
+          </a:xfrm>
+          <a:prstGeom prst="rect">
+            <a:avLst/>
+          </a:prstGeom>
+          <a:noFill/>
+          <a:extLst>
+            <a:ext uri="{909E8E84-426E-40DD-AFC4-6F175D3DCCD1}">
+              <a14:hiddenFill xmlns:a14="http://schemas.microsoft.com/office/drawing/2010/main">
+                <a:solidFill>
+                  <a:srgbClr val="FFFFFF"/>
+                </a:solidFill>
+              </a14:hiddenFill>
+            </a:ext>
+          </a:extLst>
+        </p:spPr>
+      </p:pic>
+      <p:sp>
+        <p:nvSpPr>
+          <p:cNvPr id="8" name="テキスト ボックス 7">
+            <a:extLst>
+              <a:ext uri="{FF2B5EF4-FFF2-40B4-BE49-F238E27FC236}">
+                <a16:creationId xmlns:a16="http://schemas.microsoft.com/office/drawing/2014/main" id="{D9D88A51-C595-5B61-9913-849A1B08F5C0}"/>
+              </a:ext>
+            </a:extLst>
+          </p:cNvPr>
+          <p:cNvSpPr txBox="1"/>
+          <p:nvPr/>
+        </p:nvSpPr>
+        <p:spPr>
+          <a:xfrm>
+            <a:off x="5542427" y="2129141"/>
+            <a:ext cx="4536168" cy="523220"/>
+          </a:xfrm>
+          <a:prstGeom prst="rect">
+            <a:avLst/>
+          </a:prstGeom>
+          <a:noFill/>
+        </p:spPr>
+        <p:txBody>
+          <a:bodyPr wrap="square">
+            <a:spAutoFit/>
+          </a:bodyPr>
+          <a:lstStyle/>
+          <a:p>
+            <a:r>
+              <a:rPr lang="en-US" altLang="ja-JP" sz="2800" b="1" i="0" dirty="0">
+                <a:solidFill>
+                  <a:srgbClr val="303030"/>
+                </a:solidFill>
+                <a:effectLst/>
+                <a:latin typeface="源ノ角ゴシック JP Heavy" panose="020B0A00000000000000" pitchFamily="34" charset="-128"/>
+                <a:ea typeface="源ノ角ゴシック JP Heavy" panose="020B0A00000000000000" pitchFamily="34" charset="-128"/>
+              </a:rPr>
+              <a:t>40</a:t>
+            </a:r>
+            <a:r>
+              <a:rPr lang="ja-JP" altLang="en-US" sz="2800" b="1" i="0" dirty="0">
+                <a:solidFill>
+                  <a:srgbClr val="303030"/>
+                </a:solidFill>
+                <a:effectLst/>
+                <a:latin typeface="源ノ角ゴシック JP Heavy" panose="020B0A00000000000000" pitchFamily="34" charset="-128"/>
+                <a:ea typeface="源ノ角ゴシック JP Heavy" panose="020B0A00000000000000" pitchFamily="34" charset="-128"/>
+              </a:rPr>
+              <a:t>以上の専門機関との協力</a:t>
+            </a:r>
+            <a:endParaRPr lang="ja-JP" altLang="en-US" sz="2800" dirty="0">
+              <a:latin typeface="源ノ角ゴシック JP Heavy" panose="020B0A00000000000000" pitchFamily="34" charset="-128"/>
+              <a:ea typeface="源ノ角ゴシック JP Heavy" panose="020B0A00000000000000" pitchFamily="34" charset="-128"/>
+            </a:endParaRPr>
+          </a:p>
+        </p:txBody>
+      </p:sp>
+      <p:sp>
+        <p:nvSpPr>
+          <p:cNvPr id="9" name="テキスト ボックス 8">
+            <a:extLst>
+              <a:ext uri="{FF2B5EF4-FFF2-40B4-BE49-F238E27FC236}">
+                <a16:creationId xmlns:a16="http://schemas.microsoft.com/office/drawing/2014/main" id="{08BA680C-DA68-56F2-95C8-FF1BE84C08A2}"/>
+              </a:ext>
+            </a:extLst>
+          </p:cNvPr>
+          <p:cNvSpPr txBox="1"/>
+          <p:nvPr/>
+        </p:nvSpPr>
+        <p:spPr>
+          <a:xfrm>
+            <a:off x="5542427" y="3036170"/>
+            <a:ext cx="5041900" cy="523220"/>
+          </a:xfrm>
+          <a:prstGeom prst="rect">
+            <a:avLst/>
+          </a:prstGeom>
+          <a:noFill/>
+        </p:spPr>
+        <p:txBody>
+          <a:bodyPr wrap="square">
+            <a:spAutoFit/>
+          </a:bodyPr>
+          <a:lstStyle/>
+          <a:p>
+            <a:r>
+              <a:rPr lang="ja-JP" altLang="en-US" sz="2800" b="1" dirty="0">
+                <a:latin typeface="源ノ角ゴシック JP Heavy" panose="020B0A00000000000000" pitchFamily="34" charset="-128"/>
+                <a:ea typeface="源ノ角ゴシック JP Heavy" panose="020B0A00000000000000" pitchFamily="34" charset="-128"/>
+              </a:rPr>
+              <a:t>インドでの大規模な実地試験</a:t>
+            </a:r>
+            <a:endParaRPr lang="ja-JP" altLang="en-US" sz="2800" dirty="0">
+              <a:latin typeface="源ノ角ゴシック JP Heavy" panose="020B0A00000000000000" pitchFamily="34" charset="-128"/>
+              <a:ea typeface="源ノ角ゴシック JP Heavy" panose="020B0A00000000000000" pitchFamily="34" charset="-128"/>
+            </a:endParaRPr>
+          </a:p>
+        </p:txBody>
+      </p:sp>
+      <p:sp>
+        <p:nvSpPr>
+          <p:cNvPr id="10" name="テキスト ボックス 9">
+            <a:extLst>
+              <a:ext uri="{FF2B5EF4-FFF2-40B4-BE49-F238E27FC236}">
+                <a16:creationId xmlns:a16="http://schemas.microsoft.com/office/drawing/2014/main" id="{350B93D1-7625-EEAF-E879-7FA1612DEFED}"/>
+              </a:ext>
+            </a:extLst>
+          </p:cNvPr>
+          <p:cNvSpPr txBox="1"/>
+          <p:nvPr/>
+        </p:nvSpPr>
+        <p:spPr>
+          <a:xfrm>
+            <a:off x="5542427" y="3943199"/>
+            <a:ext cx="5562600" cy="523220"/>
+          </a:xfrm>
+          <a:prstGeom prst="rect">
+            <a:avLst/>
+          </a:prstGeom>
+          <a:noFill/>
+        </p:spPr>
+        <p:txBody>
+          <a:bodyPr wrap="square">
+            <a:spAutoFit/>
+          </a:bodyPr>
+          <a:lstStyle/>
+          <a:p>
+            <a:r>
+              <a:rPr lang="ja-JP" altLang="en-US" sz="2800" b="1" dirty="0">
+                <a:latin typeface="源ノ角ゴシック JP Heavy" panose="020B0A00000000000000" pitchFamily="34" charset="-128"/>
+                <a:ea typeface="源ノ角ゴシック JP Heavy" panose="020B0A00000000000000" pitchFamily="34" charset="-128"/>
+              </a:rPr>
+              <a:t>スタンフォード大学との研究提携</a:t>
+            </a:r>
+            <a:endParaRPr lang="ja-JP" altLang="en-US" sz="2800" dirty="0">
+              <a:latin typeface="源ノ角ゴシック JP Heavy" panose="020B0A00000000000000" pitchFamily="34" charset="-128"/>
+              <a:ea typeface="源ノ角ゴシック JP Heavy" panose="020B0A00000000000000" pitchFamily="34" charset="-128"/>
+            </a:endParaRPr>
+          </a:p>
+        </p:txBody>
+      </p:sp>
+      <p:sp>
+        <p:nvSpPr>
+          <p:cNvPr id="11" name="テキスト ボックス 10">
+            <a:extLst>
+              <a:ext uri="{FF2B5EF4-FFF2-40B4-BE49-F238E27FC236}">
+                <a16:creationId xmlns:a16="http://schemas.microsoft.com/office/drawing/2014/main" id="{E83AC5AE-440F-2F73-7AC9-1F8C8E0D6BF1}"/>
+              </a:ext>
+            </a:extLst>
+          </p:cNvPr>
+          <p:cNvSpPr txBox="1"/>
+          <p:nvPr/>
+        </p:nvSpPr>
+        <p:spPr>
+          <a:xfrm>
+            <a:off x="5542427" y="4849904"/>
+            <a:ext cx="5041900" cy="523220"/>
+          </a:xfrm>
+          <a:prstGeom prst="rect">
+            <a:avLst/>
+          </a:prstGeom>
+          <a:noFill/>
+        </p:spPr>
+        <p:txBody>
+          <a:bodyPr wrap="square">
+            <a:spAutoFit/>
+          </a:bodyPr>
+          <a:lstStyle/>
+          <a:p>
+            <a:r>
+              <a:rPr lang="en-US" altLang="ja-JP" sz="2800" b="1" dirty="0">
+                <a:latin typeface="源ノ角ゴシック JP Heavy" panose="020B0A00000000000000" pitchFamily="34" charset="-128"/>
+                <a:ea typeface="源ノ角ゴシック JP Heavy" panose="020B0A00000000000000" pitchFamily="34" charset="-128"/>
+              </a:rPr>
+              <a:t>12</a:t>
+            </a:r>
+            <a:r>
+              <a:rPr lang="ja-JP" altLang="en-US" sz="2800" b="1" dirty="0">
+                <a:latin typeface="源ノ角ゴシック JP Heavy" panose="020B0A00000000000000" pitchFamily="34" charset="-128"/>
+                <a:ea typeface="源ノ角ゴシック JP Heavy" panose="020B0A00000000000000" pitchFamily="34" charset="-128"/>
+              </a:rPr>
+              <a:t>万回以上のセッション分析</a:t>
+            </a:r>
+            <a:endParaRPr lang="ja-JP" altLang="en-US" sz="2800" dirty="0">
+              <a:latin typeface="源ノ角ゴシック JP Heavy" panose="020B0A00000000000000" pitchFamily="34" charset="-128"/>
+              <a:ea typeface="源ノ角ゴシック JP Heavy" panose="020B0A00000000000000" pitchFamily="34" charset="-128"/>
+            </a:endParaRPr>
+          </a:p>
+        </p:txBody>
+      </p:sp>
+    </p:spTree>
+    <p:extLst>
+      <p:ext uri="{BB962C8B-B14F-4D97-AF65-F5344CB8AC3E}">
+        <p14:creationId xmlns:p14="http://schemas.microsoft.com/office/powerpoint/2010/main" val="4184401394"/>
+      </p:ext>
+    </p:extLst>
+  </p:cSld>
+  <p:clrMapOvr>
+    <a:masterClrMapping/>
+  </p:clrMapOvr>
+</p:sld>
+</file>
+
+<file path=ppt/slides/slide34.xml><?xml version="1.0" encoding="utf-8"?>
+<p:sld xmlns:a="http://schemas.openxmlformats.org/drawingml/2006/main" xmlns:r="http://schemas.openxmlformats.org/officeDocument/2006/relationships" xmlns:p="http://schemas.openxmlformats.org/presentationml/2006/main">
+  <p:cSld>
+    <p:bg>
+      <p:bgPr>
+        <a:solidFill>
+          <a:schemeClr val="bg1"/>
+        </a:solidFill>
+        <a:effectLst/>
+      </p:bgPr>
+    </p:bg>
+    <p:spTree>
+      <p:nvGrpSpPr>
+        <p:cNvPr id="1" name="">
+          <a:extLst>
+            <a:ext uri="{FF2B5EF4-FFF2-40B4-BE49-F238E27FC236}">
+              <a16:creationId xmlns:a16="http://schemas.microsoft.com/office/drawing/2014/main" id="{1E700066-E766-1B62-2570-8BF6DB6BF1DF}"/>
+            </a:ext>
+          </a:extLst>
+        </p:cNvPr>
+        <p:cNvGrpSpPr/>
+        <p:nvPr/>
+      </p:nvGrpSpPr>
+      <p:grpSpPr>
+        <a:xfrm>
+          <a:off x="0" y="0"/>
+          <a:ext cx="0" cy="0"/>
+          <a:chOff x="0" y="0"/>
+          <a:chExt cx="0" cy="0"/>
+        </a:xfrm>
+      </p:grpSpPr>
+      <p:sp>
+        <p:nvSpPr>
+          <p:cNvPr id="3" name="テキスト ボックス 2">
+            <a:extLst>
+              <a:ext uri="{FF2B5EF4-FFF2-40B4-BE49-F238E27FC236}">
+                <a16:creationId xmlns:a16="http://schemas.microsoft.com/office/drawing/2014/main" id="{00453087-9532-CB88-9373-3A73837AAD32}"/>
+              </a:ext>
+            </a:extLst>
+          </p:cNvPr>
+          <p:cNvSpPr txBox="1"/>
+          <p:nvPr/>
+        </p:nvSpPr>
+        <p:spPr>
+          <a:xfrm>
+            <a:off x="-758825" y="-1062271"/>
+            <a:ext cx="13709650" cy="9279463"/>
+          </a:xfrm>
+          <a:prstGeom prst="rect">
+            <a:avLst/>
+          </a:prstGeom>
+          <a:noFill/>
+        </p:spPr>
+        <p:txBody>
+          <a:bodyPr wrap="square" anchor="ctr" anchorCtr="0">
+            <a:spAutoFit/>
+          </a:bodyPr>
+          <a:lstStyle/>
+          <a:p>
+            <a:pPr algn="ctr"/>
+            <a:r>
+              <a:rPr lang="ja-JP" altLang="en-US" sz="19900" dirty="0">
+                <a:solidFill>
+                  <a:schemeClr val="accent4">
+                    <a:lumMod val="20000"/>
+                    <a:lumOff val="80000"/>
+                  </a:schemeClr>
+                </a:solidFill>
+                <a:latin typeface="源ノ角ゴシック JP Heavy" panose="020B0A00000000000000" pitchFamily="34" charset="-128"/>
+                <a:ea typeface="源ノ角ゴシック JP Heavy" panose="020B0A00000000000000" pitchFamily="34" charset="-128"/>
+              </a:rPr>
+              <a:t>研究 連携</a:t>
+            </a:r>
+            <a:endParaRPr lang="en-US" altLang="ja-JP" sz="19900" dirty="0">
+              <a:solidFill>
+                <a:schemeClr val="accent4">
+                  <a:lumMod val="20000"/>
+                  <a:lumOff val="80000"/>
+                </a:schemeClr>
+              </a:solidFill>
+              <a:latin typeface="源ノ角ゴシック JP Heavy" panose="020B0A00000000000000" pitchFamily="34" charset="-128"/>
+              <a:ea typeface="源ノ角ゴシック JP Heavy" panose="020B0A00000000000000" pitchFamily="34" charset="-128"/>
+            </a:endParaRPr>
+          </a:p>
+          <a:p>
+            <a:pPr algn="ctr"/>
+            <a:r>
+              <a:rPr lang="ja-JP" altLang="en-US" sz="19900" dirty="0">
+                <a:solidFill>
+                  <a:schemeClr val="accent4">
+                    <a:lumMod val="20000"/>
+                    <a:lumOff val="80000"/>
+                  </a:schemeClr>
+                </a:solidFill>
+                <a:latin typeface="源ノ角ゴシック JP Heavy" panose="020B0A00000000000000" pitchFamily="34" charset="-128"/>
+                <a:ea typeface="源ノ角ゴシック JP Heavy" panose="020B0A00000000000000" pitchFamily="34" charset="-128"/>
+              </a:rPr>
+              <a:t>実験 分析</a:t>
+            </a:r>
+            <a:endParaRPr lang="en-US" altLang="ja-JP" sz="19900" dirty="0">
+              <a:solidFill>
+                <a:schemeClr val="accent4">
+                  <a:lumMod val="20000"/>
+                  <a:lumOff val="80000"/>
+                </a:schemeClr>
+              </a:solidFill>
+              <a:latin typeface="源ノ角ゴシック JP Heavy" panose="020B0A00000000000000" pitchFamily="34" charset="-128"/>
+              <a:ea typeface="源ノ角ゴシック JP Heavy" panose="020B0A00000000000000" pitchFamily="34" charset="-128"/>
+            </a:endParaRPr>
+          </a:p>
+          <a:p>
+            <a:pPr algn="ctr"/>
+            <a:r>
+              <a:rPr lang="ja-JP" altLang="en-US" sz="19900" dirty="0">
+                <a:solidFill>
+                  <a:schemeClr val="accent4">
+                    <a:lumMod val="20000"/>
+                    <a:lumOff val="80000"/>
+                  </a:schemeClr>
+                </a:solidFill>
+                <a:latin typeface="源ノ角ゴシック JP Heavy" panose="020B0A00000000000000" pitchFamily="34" charset="-128"/>
+                <a:ea typeface="源ノ角ゴシック JP Heavy" panose="020B0A00000000000000" pitchFamily="34" charset="-128"/>
+              </a:rPr>
+              <a:t>データ</a:t>
+            </a:r>
+          </a:p>
+        </p:txBody>
+      </p:sp>
+      <p:pic>
+        <p:nvPicPr>
+          <p:cNvPr id="1030" name="Picture 6">
+            <a:extLst>
+              <a:ext uri="{FF2B5EF4-FFF2-40B4-BE49-F238E27FC236}">
+                <a16:creationId xmlns:a16="http://schemas.microsoft.com/office/drawing/2014/main" id="{AD36CF6C-2E30-3015-A949-A337A3DA2AF7}"/>
+              </a:ext>
+            </a:extLst>
+          </p:cNvPr>
+          <p:cNvPicPr>
+            <a:picLocks noChangeAspect="1" noChangeArrowheads="1"/>
+          </p:cNvPicPr>
+          <p:nvPr/>
+        </p:nvPicPr>
+        <p:blipFill>
+          <a:blip r:embed="rId2">
+            <a:extLst>
+              <a:ext uri="{28A0092B-C50C-407E-A947-70E740481C1C}">
+                <a14:useLocalDpi xmlns:a14="http://schemas.microsoft.com/office/drawing/2010/main" val="0"/>
+              </a:ext>
+            </a:extLst>
+          </a:blip>
+          <a:srcRect/>
+          <a:stretch/>
+        </p:blipFill>
+        <p:spPr bwMode="auto">
+          <a:xfrm>
+            <a:off x="1619377" y="2249067"/>
+            <a:ext cx="2656789" cy="2656789"/>
+          </a:xfrm>
+          <a:prstGeom prst="rect">
+            <a:avLst/>
+          </a:prstGeom>
+          <a:noFill/>
+          <a:extLst>
+            <a:ext uri="{909E8E84-426E-40DD-AFC4-6F175D3DCCD1}">
+              <a14:hiddenFill xmlns:a14="http://schemas.microsoft.com/office/drawing/2010/main">
+                <a:solidFill>
+                  <a:srgbClr val="FFFFFF"/>
+                </a:solidFill>
+              </a14:hiddenFill>
+            </a:ext>
+          </a:extLst>
+        </p:spPr>
+      </p:pic>
+      <p:sp>
+        <p:nvSpPr>
+          <p:cNvPr id="5" name="タイトル 1">
+            <a:extLst>
+              <a:ext uri="{FF2B5EF4-FFF2-40B4-BE49-F238E27FC236}">
+                <a16:creationId xmlns:a16="http://schemas.microsoft.com/office/drawing/2014/main" id="{9C87DBFA-A5B7-178A-9866-CEC7FA8D6CE3}"/>
+              </a:ext>
+            </a:extLst>
+          </p:cNvPr>
+          <p:cNvSpPr>
+            <a:spLocks noGrp="1"/>
+          </p:cNvSpPr>
+          <p:nvPr>
+            <p:ph type="ctrTitle"/>
+          </p:nvPr>
+        </p:nvSpPr>
+        <p:spPr>
+          <a:xfrm>
+            <a:off x="6485840" y="2836998"/>
+            <a:ext cx="5067300" cy="1480930"/>
+          </a:xfrm>
+        </p:spPr>
+        <p:txBody>
+          <a:bodyPr>
+            <a:normAutofit/>
+          </a:bodyPr>
+          <a:lstStyle/>
+          <a:p>
+            <a:r>
+              <a:rPr kumimoji="1" lang="en-US" altLang="ja-JP" sz="9600" dirty="0">
+                <a:latin typeface="源ノ角ゴシック JP Heavy" panose="020B0A00000000000000" pitchFamily="34" charset="-128"/>
+                <a:ea typeface="源ノ角ゴシック JP Heavy" panose="020B0A00000000000000" pitchFamily="34" charset="-128"/>
+              </a:rPr>
+              <a:t>WHYAI</a:t>
+            </a:r>
+            <a:endParaRPr kumimoji="1" lang="ja-JP" altLang="en-US" sz="9600" dirty="0">
+              <a:latin typeface="源ノ角ゴシック JP Heavy" panose="020B0A00000000000000" pitchFamily="34" charset="-128"/>
+              <a:ea typeface="源ノ角ゴシック JP Heavy" panose="020B0A00000000000000" pitchFamily="34" charset="-128"/>
+            </a:endParaRPr>
+          </a:p>
+        </p:txBody>
+      </p:sp>
+      <p:sp>
+        <p:nvSpPr>
+          <p:cNvPr id="7" name="タイトル 1">
+            <a:extLst>
+              <a:ext uri="{FF2B5EF4-FFF2-40B4-BE49-F238E27FC236}">
+                <a16:creationId xmlns:a16="http://schemas.microsoft.com/office/drawing/2014/main" id="{F3518810-50B0-4BD5-4ADE-B4AB8F8CBE12}"/>
+              </a:ext>
+            </a:extLst>
+          </p:cNvPr>
+          <p:cNvSpPr txBox="1">
+            <a:spLocks/>
+          </p:cNvSpPr>
+          <p:nvPr/>
+        </p:nvSpPr>
+        <p:spPr>
+          <a:xfrm>
+            <a:off x="4276166" y="2388080"/>
+            <a:ext cx="2656789" cy="2378765"/>
+          </a:xfrm>
+          <a:prstGeom prst="rect">
+            <a:avLst/>
+          </a:prstGeom>
+        </p:spPr>
+        <p:txBody>
+          <a:bodyPr vert="horz" lIns="91440" tIns="45720" rIns="91440" bIns="45720" rtlCol="0" anchor="b">
+            <a:normAutofit/>
+          </a:bodyPr>
+          <a:lstStyle>
+            <a:lvl1pPr algn="ctr" defTabSz="914400" rtl="0" eaLnBrk="1" latinLnBrk="0" hangingPunct="1">
+              <a:lnSpc>
+                <a:spcPct val="90000"/>
+              </a:lnSpc>
+              <a:spcBef>
+                <a:spcPct val="0"/>
+              </a:spcBef>
+              <a:buNone/>
+              <a:defRPr kumimoji="1" sz="6000" kern="1200">
+                <a:solidFill>
+                  <a:schemeClr val="tx1"/>
+                </a:solidFill>
+                <a:latin typeface="+mj-lt"/>
+                <a:ea typeface="+mj-ea"/>
+                <a:cs typeface="+mj-cs"/>
+              </a:defRPr>
+            </a:lvl1pPr>
+          </a:lstStyle>
+          <a:p>
+            <a:r>
+              <a:rPr lang="en-US" altLang="ja-JP" sz="14300" dirty="0">
+                <a:latin typeface="源ノ角ゴシック JP Heavy" panose="020B0A00000000000000" pitchFamily="34" charset="-128"/>
+                <a:ea typeface="源ノ角ゴシック JP Heavy" panose="020B0A00000000000000" pitchFamily="34" charset="-128"/>
+              </a:rPr>
+              <a:t>&gt;</a:t>
+            </a:r>
+          </a:p>
+        </p:txBody>
+      </p:sp>
+    </p:spTree>
+    <p:extLst>
+      <p:ext uri="{BB962C8B-B14F-4D97-AF65-F5344CB8AC3E}">
+        <p14:creationId xmlns:p14="http://schemas.microsoft.com/office/powerpoint/2010/main" val="806630871"/>
+      </p:ext>
+    </p:extLst>
+  </p:cSld>
+  <p:clrMapOvr>
+    <a:masterClrMapping/>
+  </p:clrMapOvr>
+</p:sld>
+</file>
+
+<file path=ppt/slides/slide35.xml><?xml version="1.0" encoding="utf-8"?>
+<p:sld xmlns:a="http://schemas.openxmlformats.org/drawingml/2006/main" xmlns:r="http://schemas.openxmlformats.org/officeDocument/2006/relationships" xmlns:p="http://schemas.openxmlformats.org/presentationml/2006/main">
+  <p:cSld>
+    <p:bg>
+      <p:bgPr>
+        <a:solidFill>
+          <a:schemeClr val="bg1"/>
+        </a:solidFill>
+        <a:effectLst/>
+      </p:bgPr>
+    </p:bg>
+    <p:spTree>
+      <p:nvGrpSpPr>
+        <p:cNvPr id="1" name="">
+          <a:extLst>
+            <a:ext uri="{FF2B5EF4-FFF2-40B4-BE49-F238E27FC236}">
+              <a16:creationId xmlns:a16="http://schemas.microsoft.com/office/drawing/2014/main" id="{828FF22F-7568-224F-9571-5CD24F5D8F6B}"/>
+            </a:ext>
+          </a:extLst>
+        </p:cNvPr>
+        <p:cNvGrpSpPr/>
+        <p:nvPr/>
+      </p:nvGrpSpPr>
+      <p:grpSpPr>
+        <a:xfrm>
+          <a:off x="0" y="0"/>
+          <a:ext cx="0" cy="0"/>
+          <a:chOff x="0" y="0"/>
+          <a:chExt cx="0" cy="0"/>
+        </a:xfrm>
+      </p:grpSpPr>
+      <p:sp>
+        <p:nvSpPr>
+          <p:cNvPr id="4" name="テキスト ボックス 3">
+            <a:extLst>
+              <a:ext uri="{FF2B5EF4-FFF2-40B4-BE49-F238E27FC236}">
+                <a16:creationId xmlns:a16="http://schemas.microsoft.com/office/drawing/2014/main" id="{70AD24DC-7571-901D-3DDC-73EE65294C00}"/>
+              </a:ext>
+            </a:extLst>
+          </p:cNvPr>
+          <p:cNvSpPr txBox="1"/>
+          <p:nvPr/>
+        </p:nvSpPr>
+        <p:spPr>
+          <a:xfrm>
+            <a:off x="767001" y="2497976"/>
+            <a:ext cx="10657997" cy="1862048"/>
+          </a:xfrm>
+          <a:prstGeom prst="rect">
+            <a:avLst/>
+          </a:prstGeom>
+          <a:noFill/>
+        </p:spPr>
+        <p:txBody>
+          <a:bodyPr wrap="square">
+            <a:spAutoFit/>
+          </a:bodyPr>
+          <a:lstStyle/>
+          <a:p>
+            <a:pPr algn="ctr"/>
+            <a:r>
+              <a:rPr lang="ja-JP" altLang="en-US" sz="11500" dirty="0">
+                <a:latin typeface="源ノ角ゴシック JP Heavy" panose="020B0A00000000000000" pitchFamily="34" charset="-128"/>
+                <a:ea typeface="源ノ角ゴシック JP Heavy" panose="020B0A00000000000000" pitchFamily="34" charset="-128"/>
+              </a:rPr>
+              <a:t>大きな違い</a:t>
+            </a:r>
+            <a:endParaRPr lang="ja-JP" altLang="en-US" sz="11500" dirty="0"/>
+          </a:p>
+        </p:txBody>
+      </p:sp>
+    </p:spTree>
+    <p:extLst>
+      <p:ext uri="{BB962C8B-B14F-4D97-AF65-F5344CB8AC3E}">
+        <p14:creationId xmlns:p14="http://schemas.microsoft.com/office/powerpoint/2010/main" val="1689551794"/>
+      </p:ext>
+    </p:extLst>
+  </p:cSld>
+  <p:clrMapOvr>
+    <a:masterClrMapping/>
+  </p:clrMapOvr>
+</p:sld>
+</file>
+
+<file path=ppt/slides/slide36.xml><?xml version="1.0" encoding="utf-8"?>
+<p:sld xmlns:a="http://schemas.openxmlformats.org/drawingml/2006/main" xmlns:r="http://schemas.openxmlformats.org/officeDocument/2006/relationships" xmlns:p="http://schemas.openxmlformats.org/presentationml/2006/main">
+  <p:cSld>
+    <p:bg>
+      <p:bgPr>
+        <a:solidFill>
+          <a:schemeClr val="bg1"/>
+        </a:solidFill>
+        <a:effectLst/>
+      </p:bgPr>
+    </p:bg>
+    <p:spTree>
+      <p:nvGrpSpPr>
+        <p:cNvPr id="1" name="">
+          <a:extLst>
+            <a:ext uri="{FF2B5EF4-FFF2-40B4-BE49-F238E27FC236}">
+              <a16:creationId xmlns:a16="http://schemas.microsoft.com/office/drawing/2014/main" id="{512EA6C5-C3D5-5D81-A420-C58C506C6DA5}"/>
+            </a:ext>
+          </a:extLst>
+        </p:cNvPr>
+        <p:cNvGrpSpPr/>
+        <p:nvPr/>
+      </p:nvGrpSpPr>
+      <p:grpSpPr>
+        <a:xfrm>
+          <a:off x="0" y="0"/>
+          <a:ext cx="0" cy="0"/>
+          <a:chOff x="0" y="0"/>
+          <a:chExt cx="0" cy="0"/>
+        </a:xfrm>
+      </p:grpSpPr>
+      <p:sp>
+        <p:nvSpPr>
+          <p:cNvPr id="2" name="テキスト ボックス 1">
+            <a:extLst>
+              <a:ext uri="{FF2B5EF4-FFF2-40B4-BE49-F238E27FC236}">
+                <a16:creationId xmlns:a16="http://schemas.microsoft.com/office/drawing/2014/main" id="{F6F86056-ED85-0827-FF67-4E9698DD58BA}"/>
+              </a:ext>
+            </a:extLst>
+          </p:cNvPr>
+          <p:cNvSpPr txBox="1"/>
+          <p:nvPr/>
+        </p:nvSpPr>
+        <p:spPr>
+          <a:xfrm>
+            <a:off x="-515696" y="2042144"/>
+            <a:ext cx="10657997" cy="3154710"/>
+          </a:xfrm>
+          <a:prstGeom prst="rect">
+            <a:avLst/>
+          </a:prstGeom>
+          <a:noFill/>
+        </p:spPr>
+        <p:txBody>
+          <a:bodyPr wrap="square">
+            <a:spAutoFit/>
+          </a:bodyPr>
+          <a:lstStyle/>
+          <a:p>
+            <a:pPr algn="ctr"/>
+            <a:r>
+              <a:rPr lang="ja-JP" altLang="en-US" sz="19900" dirty="0">
+                <a:solidFill>
+                  <a:schemeClr val="bg1">
+                    <a:lumMod val="95000"/>
+                  </a:schemeClr>
+                </a:solidFill>
+                <a:latin typeface="源ノ角ゴシック JP Heavy" panose="020B0A00000000000000" pitchFamily="34" charset="-128"/>
+                <a:ea typeface="源ノ角ゴシック JP Heavy" panose="020B0A00000000000000" pitchFamily="34" charset="-128"/>
+              </a:rPr>
+              <a:t>主導権</a:t>
+            </a:r>
+            <a:endParaRPr lang="ja-JP" altLang="en-US" sz="19900" dirty="0">
+              <a:solidFill>
+                <a:schemeClr val="bg1">
+                  <a:lumMod val="95000"/>
+                </a:schemeClr>
+              </a:solidFill>
+            </a:endParaRPr>
+          </a:p>
+        </p:txBody>
+      </p:sp>
+      <p:sp>
+        <p:nvSpPr>
+          <p:cNvPr id="4" name="テキスト ボックス 3">
+            <a:extLst>
+              <a:ext uri="{FF2B5EF4-FFF2-40B4-BE49-F238E27FC236}">
+                <a16:creationId xmlns:a16="http://schemas.microsoft.com/office/drawing/2014/main" id="{9C4FE606-2D3F-A38F-0FC1-FABC8C4E777A}"/>
+              </a:ext>
+            </a:extLst>
+          </p:cNvPr>
+          <p:cNvSpPr txBox="1"/>
+          <p:nvPr/>
+        </p:nvSpPr>
+        <p:spPr>
+          <a:xfrm>
+            <a:off x="2392599" y="2688475"/>
+            <a:ext cx="4986099" cy="1862048"/>
+          </a:xfrm>
+          <a:prstGeom prst="rect">
+            <a:avLst/>
+          </a:prstGeom>
+          <a:noFill/>
+        </p:spPr>
+        <p:txBody>
+          <a:bodyPr wrap="square">
+            <a:spAutoFit/>
+          </a:bodyPr>
+          <a:lstStyle/>
+          <a:p>
+            <a:pPr algn="ctr"/>
+            <a:r>
+              <a:rPr lang="ja-JP" altLang="en-US" sz="11500" dirty="0">
+                <a:latin typeface="源ノ角ゴシック JP Heavy" panose="020B0A00000000000000" pitchFamily="34" charset="-128"/>
+                <a:ea typeface="源ノ角ゴシック JP Heavy" panose="020B0A00000000000000" pitchFamily="34" charset="-128"/>
+              </a:rPr>
+              <a:t>学習者</a:t>
+            </a:r>
+            <a:endParaRPr lang="ja-JP" altLang="en-US" sz="11500" dirty="0"/>
+          </a:p>
+        </p:txBody>
+      </p:sp>
+      <p:sp>
+        <p:nvSpPr>
+          <p:cNvPr id="3" name="テキスト ボックス 2">
+            <a:extLst>
+              <a:ext uri="{FF2B5EF4-FFF2-40B4-BE49-F238E27FC236}">
+                <a16:creationId xmlns:a16="http://schemas.microsoft.com/office/drawing/2014/main" id="{2CD3203D-19B5-E7C6-D9DB-F9E94F43CAF6}"/>
+              </a:ext>
+            </a:extLst>
+          </p:cNvPr>
+          <p:cNvSpPr txBox="1"/>
+          <p:nvPr/>
+        </p:nvSpPr>
+        <p:spPr>
+          <a:xfrm>
+            <a:off x="7378698" y="3065501"/>
+            <a:ext cx="3609495" cy="1107996"/>
+          </a:xfrm>
+          <a:prstGeom prst="rect">
+            <a:avLst/>
+          </a:prstGeom>
+          <a:noFill/>
+        </p:spPr>
+        <p:txBody>
+          <a:bodyPr wrap="square">
+            <a:spAutoFit/>
+          </a:bodyPr>
+          <a:lstStyle/>
+          <a:p>
+            <a:pPr algn="ctr"/>
+            <a:r>
+              <a:rPr lang="en-US" altLang="ja-JP" sz="6600" dirty="0">
+                <a:latin typeface="源ノ角ゴシック JP Heavy" panose="020B0A00000000000000" pitchFamily="34" charset="-128"/>
+                <a:ea typeface="源ノ角ゴシック JP Heavy" panose="020B0A00000000000000" pitchFamily="34" charset="-128"/>
+              </a:rPr>
+              <a:t>AI</a:t>
+            </a:r>
+            <a:endParaRPr lang="ja-JP" altLang="en-US" sz="6600" dirty="0"/>
+          </a:p>
+        </p:txBody>
+      </p:sp>
+    </p:spTree>
+    <p:extLst>
+      <p:ext uri="{BB962C8B-B14F-4D97-AF65-F5344CB8AC3E}">
+        <p14:creationId xmlns:p14="http://schemas.microsoft.com/office/powerpoint/2010/main" val="633265502"/>
+      </p:ext>
+    </p:extLst>
+  </p:cSld>
+  <p:clrMapOvr>
+    <a:masterClrMapping/>
+  </p:clrMapOvr>
+</p:sld>
+</file>
+
+<file path=ppt/slides/slide37.xml><?xml version="1.0" encoding="utf-8"?>
+<p:sld xmlns:a="http://schemas.openxmlformats.org/drawingml/2006/main" xmlns:r="http://schemas.openxmlformats.org/officeDocument/2006/relationships" xmlns:p="http://schemas.openxmlformats.org/presentationml/2006/main">
+  <p:cSld>
+    <p:bg>
+      <p:bgPr>
+        <a:solidFill>
+          <a:srgbClr val="FFFFFF"/>
+        </a:solidFill>
+        <a:effectLst/>
+      </p:bgPr>
+    </p:bg>
+    <p:spTree>
+      <p:nvGrpSpPr>
+        <p:cNvPr id="1" name="">
+          <a:extLst>
+            <a:ext uri="{FF2B5EF4-FFF2-40B4-BE49-F238E27FC236}">
+              <a16:creationId xmlns:a16="http://schemas.microsoft.com/office/drawing/2014/main" id="{3B927739-6EA3-FD52-DC17-B79EE4D43817}"/>
+            </a:ext>
+          </a:extLst>
+        </p:cNvPr>
+        <p:cNvGrpSpPr/>
+        <p:nvPr/>
+      </p:nvGrpSpPr>
+      <p:grpSpPr>
+        <a:xfrm>
+          <a:off x="0" y="0"/>
+          <a:ext cx="0" cy="0"/>
+          <a:chOff x="0" y="0"/>
+          <a:chExt cx="0" cy="0"/>
+        </a:xfrm>
+      </p:grpSpPr>
+      <p:sp>
+        <p:nvSpPr>
+          <p:cNvPr id="5" name="タイトル 1">
+            <a:extLst>
+              <a:ext uri="{FF2B5EF4-FFF2-40B4-BE49-F238E27FC236}">
+                <a16:creationId xmlns:a16="http://schemas.microsoft.com/office/drawing/2014/main" id="{FA28A3FE-23EE-11AA-23C4-5B12F9249B60}"/>
+              </a:ext>
+            </a:extLst>
+          </p:cNvPr>
+          <p:cNvSpPr txBox="1">
+            <a:spLocks/>
+          </p:cNvSpPr>
+          <p:nvPr/>
+        </p:nvSpPr>
+        <p:spPr>
+          <a:xfrm>
+            <a:off x="0" y="269820"/>
+            <a:ext cx="12192000" cy="6858000"/>
+          </a:xfrm>
+          <a:prstGeom prst="rect">
+            <a:avLst/>
+          </a:prstGeom>
+          <a:noFill/>
+        </p:spPr>
+        <p:txBody>
+          <a:bodyPr vert="horz" lIns="91440" tIns="45720" rIns="91440" bIns="45720" rtlCol="0" anchor="ctr" anchorCtr="0">
+            <a:normAutofit/>
+          </a:bodyPr>
+          <a:lstStyle>
+            <a:lvl1pPr algn="ctr" defTabSz="914400" rtl="0" eaLnBrk="1" latinLnBrk="0" hangingPunct="1">
+              <a:lnSpc>
+                <a:spcPct val="90000"/>
+              </a:lnSpc>
+              <a:spcBef>
+                <a:spcPct val="0"/>
+              </a:spcBef>
+              <a:buNone/>
+              <a:defRPr kumimoji="1" sz="6000" kern="1200">
+                <a:solidFill>
+                  <a:schemeClr val="tx1"/>
+                </a:solidFill>
+                <a:latin typeface="+mj-lt"/>
+                <a:ea typeface="+mj-ea"/>
+                <a:cs typeface="+mj-cs"/>
+              </a:defRPr>
+            </a:lvl1pPr>
+          </a:lstStyle>
+          <a:p>
+            <a:r>
+              <a:rPr lang="ja-JP" altLang="en-US" sz="23900" dirty="0">
+                <a:solidFill>
+                  <a:srgbClr val="FFCCCC"/>
+                </a:solidFill>
+                <a:latin typeface="源ノ角ゴシック JP Heavy" panose="020B0A00000000000000" pitchFamily="34" charset="-128"/>
+                <a:ea typeface="源ノ角ゴシック JP Heavy" panose="020B0A00000000000000" pitchFamily="34" charset="-128"/>
+              </a:rPr>
+              <a:t>原則</a:t>
+            </a:r>
+          </a:p>
+        </p:txBody>
+      </p:sp>
+      <p:sp>
+        <p:nvSpPr>
+          <p:cNvPr id="10" name="テキスト ボックス 9">
+            <a:extLst>
+              <a:ext uri="{FF2B5EF4-FFF2-40B4-BE49-F238E27FC236}">
+                <a16:creationId xmlns:a16="http://schemas.microsoft.com/office/drawing/2014/main" id="{4E47E993-5995-1D29-90C8-A5AB9AD791A8}"/>
+              </a:ext>
+            </a:extLst>
+          </p:cNvPr>
+          <p:cNvSpPr txBox="1"/>
+          <p:nvPr/>
+        </p:nvSpPr>
+        <p:spPr>
+          <a:xfrm>
+            <a:off x="893309" y="2967335"/>
+            <a:ext cx="10405382" cy="923330"/>
+          </a:xfrm>
+          <a:prstGeom prst="rect">
+            <a:avLst/>
+          </a:prstGeom>
+          <a:noFill/>
+        </p:spPr>
+        <p:txBody>
+          <a:bodyPr wrap="square" anchor="ctr" anchorCtr="0">
+            <a:spAutoFit/>
+          </a:bodyPr>
+          <a:lstStyle/>
+          <a:p>
+            <a:pPr algn="ctr"/>
+            <a:r>
+              <a:rPr lang="ja-JP" altLang="en-US" sz="5400" dirty="0">
+                <a:latin typeface="源ノ角ゴシック JP Heavy" panose="020B0A00000000000000" pitchFamily="34" charset="-128"/>
+                <a:ea typeface="源ノ角ゴシック JP Heavy" panose="020B0A00000000000000" pitchFamily="34" charset="-128"/>
+              </a:rPr>
+              <a:t>評価しない</a:t>
+            </a:r>
+          </a:p>
+        </p:txBody>
+      </p:sp>
+      <p:sp>
+        <p:nvSpPr>
+          <p:cNvPr id="2" name="テキスト ボックス 1">
+            <a:extLst>
+              <a:ext uri="{FF2B5EF4-FFF2-40B4-BE49-F238E27FC236}">
+                <a16:creationId xmlns:a16="http://schemas.microsoft.com/office/drawing/2014/main" id="{5A7644CB-F7AC-E4F8-3AA3-8DB5403E1A7C}"/>
+              </a:ext>
+            </a:extLst>
+          </p:cNvPr>
+          <p:cNvSpPr txBox="1"/>
+          <p:nvPr/>
+        </p:nvSpPr>
+        <p:spPr>
+          <a:xfrm>
+            <a:off x="893309" y="1253356"/>
+            <a:ext cx="10405382" cy="923330"/>
+          </a:xfrm>
+          <a:prstGeom prst="rect">
+            <a:avLst/>
+          </a:prstGeom>
+          <a:noFill/>
+        </p:spPr>
+        <p:txBody>
+          <a:bodyPr wrap="square" anchor="ctr" anchorCtr="0">
+            <a:spAutoFit/>
+          </a:bodyPr>
+          <a:lstStyle/>
+          <a:p>
+            <a:pPr algn="ctr"/>
+            <a:r>
+              <a:rPr lang="ja-JP" altLang="en-US" sz="5400" dirty="0">
+                <a:latin typeface="源ノ角ゴシック JP Heavy" panose="020B0A00000000000000" pitchFamily="34" charset="-128"/>
+                <a:ea typeface="源ノ角ゴシック JP Heavy" panose="020B0A00000000000000" pitchFamily="34" charset="-128"/>
+              </a:rPr>
+              <a:t>教えない</a:t>
+            </a:r>
+          </a:p>
+        </p:txBody>
+      </p:sp>
+      <p:sp>
+        <p:nvSpPr>
+          <p:cNvPr id="4" name="テキスト ボックス 3">
+            <a:extLst>
+              <a:ext uri="{FF2B5EF4-FFF2-40B4-BE49-F238E27FC236}">
+                <a16:creationId xmlns:a16="http://schemas.microsoft.com/office/drawing/2014/main" id="{9DF9626F-6C4F-BD0B-03FF-630E32345411}"/>
+              </a:ext>
+            </a:extLst>
+          </p:cNvPr>
+          <p:cNvSpPr txBox="1"/>
+          <p:nvPr/>
+        </p:nvSpPr>
+        <p:spPr>
+          <a:xfrm>
+            <a:off x="3049044" y="4681314"/>
+            <a:ext cx="6093912" cy="923330"/>
+          </a:xfrm>
+          <a:prstGeom prst="rect">
+            <a:avLst/>
+          </a:prstGeom>
+          <a:noFill/>
+        </p:spPr>
+        <p:txBody>
+          <a:bodyPr wrap="square" anchor="ctr" anchorCtr="0">
+            <a:spAutoFit/>
+          </a:bodyPr>
+          <a:lstStyle/>
+          <a:p>
+            <a:pPr algn="ctr"/>
+            <a:r>
+              <a:rPr lang="ja-JP" altLang="en-US" sz="5400" dirty="0">
+                <a:latin typeface="源ノ角ゴシック JP Heavy" panose="020B0A00000000000000" pitchFamily="34" charset="-128"/>
+                <a:ea typeface="源ノ角ゴシック JP Heavy" panose="020B0A00000000000000" pitchFamily="34" charset="-128"/>
+              </a:rPr>
+              <a:t>推奨しない</a:t>
+            </a:r>
+            <a:endParaRPr lang="ja-JP" altLang="en-US" sz="5400" dirty="0"/>
+          </a:p>
+        </p:txBody>
+      </p:sp>
+    </p:spTree>
+    <p:extLst>
+      <p:ext uri="{BB962C8B-B14F-4D97-AF65-F5344CB8AC3E}">
+        <p14:creationId xmlns:p14="http://schemas.microsoft.com/office/powerpoint/2010/main" val="3252066308"/>
+      </p:ext>
+    </p:extLst>
+  </p:cSld>
+  <p:clrMapOvr>
+    <a:masterClrMapping/>
+  </p:clrMapOvr>
+</p:sld>
+</file>
+
+<file path=ppt/slides/slide38.xml><?xml version="1.0" encoding="utf-8"?>
+<p:sld xmlns:a="http://schemas.openxmlformats.org/drawingml/2006/main" xmlns:r="http://schemas.openxmlformats.org/officeDocument/2006/relationships" xmlns:p="http://schemas.openxmlformats.org/presentationml/2006/main">
+  <p:cSld>
+    <p:bg>
+      <p:bgPr>
+        <a:pattFill prst="pct5">
+          <a:fgClr>
+            <a:schemeClr val="bg1">
+              <a:lumMod val="50000"/>
+            </a:schemeClr>
+          </a:fgClr>
+          <a:bgClr>
+            <a:schemeClr val="bg1"/>
+          </a:bgClr>
+        </a:pattFill>
+        <a:effectLst/>
+      </p:bgPr>
+    </p:bg>
+    <p:spTree>
+      <p:nvGrpSpPr>
+        <p:cNvPr id="1" name="">
+          <a:extLst>
+            <a:ext uri="{FF2B5EF4-FFF2-40B4-BE49-F238E27FC236}">
+              <a16:creationId xmlns:a16="http://schemas.microsoft.com/office/drawing/2014/main" id="{29ABAD33-1601-E2D1-7EC7-6EB634D97360}"/>
+            </a:ext>
+          </a:extLst>
+        </p:cNvPr>
+        <p:cNvGrpSpPr/>
+        <p:nvPr/>
+      </p:nvGrpSpPr>
+      <p:grpSpPr>
+        <a:xfrm>
+          <a:off x="0" y="0"/>
+          <a:ext cx="0" cy="0"/>
+          <a:chOff x="0" y="0"/>
+          <a:chExt cx="0" cy="0"/>
+        </a:xfrm>
+      </p:grpSpPr>
+      <p:sp>
+        <p:nvSpPr>
+          <p:cNvPr id="4" name="テキスト ボックス 3">
+            <a:extLst>
+              <a:ext uri="{FF2B5EF4-FFF2-40B4-BE49-F238E27FC236}">
+                <a16:creationId xmlns:a16="http://schemas.microsoft.com/office/drawing/2014/main" id="{BD593B43-2060-8E83-A120-B317AD8971D4}"/>
+              </a:ext>
+            </a:extLst>
+          </p:cNvPr>
+          <p:cNvSpPr txBox="1"/>
+          <p:nvPr/>
+        </p:nvSpPr>
+        <p:spPr>
+          <a:xfrm>
+            <a:off x="1885950" y="1613118"/>
+            <a:ext cx="8420100" cy="3631763"/>
+          </a:xfrm>
+          <a:prstGeom prst="rect">
+            <a:avLst/>
+          </a:prstGeom>
+          <a:noFill/>
+        </p:spPr>
+        <p:txBody>
+          <a:bodyPr wrap="square">
+            <a:spAutoFit/>
+          </a:bodyPr>
+          <a:lstStyle/>
+          <a:p>
+            <a:pPr algn="ctr"/>
+            <a:r>
+              <a:rPr lang="ja-JP" altLang="en-US" sz="11500" dirty="0">
+                <a:latin typeface="源ノ角ゴシック JP Heavy" panose="020B0A00000000000000" pitchFamily="34" charset="-128"/>
+                <a:ea typeface="源ノ角ゴシック JP Heavy" panose="020B0A00000000000000" pitchFamily="34" charset="-128"/>
+              </a:rPr>
+              <a:t>認知心理学</a:t>
+            </a:r>
+            <a:endParaRPr lang="en-US" altLang="ja-JP" sz="11500" dirty="0">
+              <a:latin typeface="源ノ角ゴシック JP Heavy" panose="020B0A00000000000000" pitchFamily="34" charset="-128"/>
+              <a:ea typeface="源ノ角ゴシック JP Heavy" panose="020B0A00000000000000" pitchFamily="34" charset="-128"/>
+            </a:endParaRPr>
+          </a:p>
+          <a:p>
+            <a:pPr algn="ctr"/>
+            <a:r>
+              <a:rPr lang="en-US" altLang="ja-JP" sz="11500" dirty="0">
+                <a:latin typeface="源ノ角ゴシック JP Heavy" panose="020B0A00000000000000" pitchFamily="34" charset="-128"/>
+                <a:ea typeface="源ノ角ゴシック JP Heavy" panose="020B0A00000000000000" pitchFamily="34" charset="-128"/>
+              </a:rPr>
+              <a:t> </a:t>
+            </a:r>
+            <a:r>
+              <a:rPr lang="ja-JP" altLang="en-US" sz="11500" dirty="0">
+                <a:latin typeface="源ノ角ゴシック JP Heavy" panose="020B0A00000000000000" pitchFamily="34" charset="-128"/>
+                <a:ea typeface="源ノ角ゴシック JP Heavy" panose="020B0A00000000000000" pitchFamily="34" charset="-128"/>
+              </a:rPr>
+              <a:t>教育心理学</a:t>
+            </a:r>
+            <a:endParaRPr lang="en-US" altLang="ja-JP" sz="11500" dirty="0">
+              <a:latin typeface="源ノ角ゴシック JP Heavy" panose="020B0A00000000000000" pitchFamily="34" charset="-128"/>
+              <a:ea typeface="源ノ角ゴシック JP Heavy" panose="020B0A00000000000000" pitchFamily="34" charset="-128"/>
+            </a:endParaRPr>
+          </a:p>
+        </p:txBody>
+      </p:sp>
+    </p:spTree>
+    <p:extLst>
+      <p:ext uri="{BB962C8B-B14F-4D97-AF65-F5344CB8AC3E}">
+        <p14:creationId xmlns:p14="http://schemas.microsoft.com/office/powerpoint/2010/main" val="619639805"/>
+      </p:ext>
+    </p:extLst>
+  </p:cSld>
+  <p:clrMapOvr>
+    <a:masterClrMapping/>
+  </p:clrMapOvr>
+</p:sld>
+</file>
+
+<file path=ppt/slides/slide39.xml><?xml version="1.0" encoding="utf-8"?>
+<p:sld xmlns:a="http://schemas.openxmlformats.org/drawingml/2006/main" xmlns:r="http://schemas.openxmlformats.org/officeDocument/2006/relationships" xmlns:p="http://schemas.openxmlformats.org/presentationml/2006/main">
+  <p:cSld>
+    <p:bg>
+      <p:bgPr>
+        <a:solidFill>
+          <a:schemeClr val="bg1"/>
+        </a:solidFill>
+        <a:effectLst/>
+      </p:bgPr>
+    </p:bg>
+    <p:spTree>
+      <p:nvGrpSpPr>
+        <p:cNvPr id="1" name="">
+          <a:extLst>
+            <a:ext uri="{FF2B5EF4-FFF2-40B4-BE49-F238E27FC236}">
+              <a16:creationId xmlns:a16="http://schemas.microsoft.com/office/drawing/2014/main" id="{F0153D39-8F10-F369-1A04-3B624EA66DE4}"/>
+            </a:ext>
+          </a:extLst>
+        </p:cNvPr>
+        <p:cNvGrpSpPr/>
+        <p:nvPr/>
+      </p:nvGrpSpPr>
+      <p:grpSpPr>
+        <a:xfrm>
+          <a:off x="0" y="0"/>
+          <a:ext cx="0" cy="0"/>
+          <a:chOff x="0" y="0"/>
+          <a:chExt cx="0" cy="0"/>
+        </a:xfrm>
+      </p:grpSpPr>
+      <p:sp>
+        <p:nvSpPr>
+          <p:cNvPr id="2" name="テキスト ボックス 1">
+            <a:extLst>
+              <a:ext uri="{FF2B5EF4-FFF2-40B4-BE49-F238E27FC236}">
+                <a16:creationId xmlns:a16="http://schemas.microsoft.com/office/drawing/2014/main" id="{D0185B2F-DC1A-DD27-309A-AC50C834C6AB}"/>
+              </a:ext>
+            </a:extLst>
+          </p:cNvPr>
+          <p:cNvSpPr txBox="1"/>
+          <p:nvPr/>
+        </p:nvSpPr>
+        <p:spPr>
+          <a:xfrm>
+            <a:off x="1287286" y="2599849"/>
+            <a:ext cx="4986099" cy="1862048"/>
+          </a:xfrm>
+          <a:prstGeom prst="rect">
+            <a:avLst/>
+          </a:prstGeom>
+          <a:noFill/>
+        </p:spPr>
+        <p:txBody>
+          <a:bodyPr wrap="square">
+            <a:spAutoFit/>
+          </a:bodyPr>
+          <a:lstStyle/>
+          <a:p>
+            <a:pPr algn="ctr"/>
+            <a:r>
+              <a:rPr lang="ja-JP" altLang="en-US" sz="11500" dirty="0">
+                <a:solidFill>
+                  <a:schemeClr val="bg1">
+                    <a:lumMod val="85000"/>
+                  </a:schemeClr>
+                </a:solidFill>
+                <a:latin typeface="源ノ角ゴシック JP Heavy" panose="020B0A00000000000000" pitchFamily="34" charset="-128"/>
+                <a:ea typeface="源ノ角ゴシック JP Heavy" panose="020B0A00000000000000" pitchFamily="34" charset="-128"/>
+              </a:rPr>
+              <a:t>学習者</a:t>
+            </a:r>
+            <a:endParaRPr lang="ja-JP" altLang="en-US" sz="11500" dirty="0">
+              <a:solidFill>
+                <a:schemeClr val="bg1">
+                  <a:lumMod val="85000"/>
+                </a:schemeClr>
+              </a:solidFill>
+            </a:endParaRPr>
+          </a:p>
+        </p:txBody>
+      </p:sp>
+      <p:sp>
+        <p:nvSpPr>
+          <p:cNvPr id="3" name="テキスト ボックス 2">
+            <a:extLst>
+              <a:ext uri="{FF2B5EF4-FFF2-40B4-BE49-F238E27FC236}">
+                <a16:creationId xmlns:a16="http://schemas.microsoft.com/office/drawing/2014/main" id="{E8F91A96-2ADC-5E97-F67E-3865EC18D6A0}"/>
+              </a:ext>
+            </a:extLst>
+          </p:cNvPr>
+          <p:cNvSpPr txBox="1"/>
+          <p:nvPr/>
+        </p:nvSpPr>
+        <p:spPr>
+          <a:xfrm>
+            <a:off x="1287285" y="2930708"/>
+            <a:ext cx="4986099" cy="1323439"/>
+          </a:xfrm>
+          <a:prstGeom prst="rect">
+            <a:avLst/>
+          </a:prstGeom>
+          <a:noFill/>
+        </p:spPr>
+        <p:txBody>
+          <a:bodyPr wrap="square">
+            <a:spAutoFit/>
+          </a:bodyPr>
+          <a:lstStyle/>
+          <a:p>
+            <a:pPr algn="ctr"/>
+            <a:r>
+              <a:rPr lang="ja-JP" altLang="en-US" sz="8000" dirty="0">
+                <a:solidFill>
+                  <a:srgbClr val="FF0000"/>
+                </a:solidFill>
+                <a:latin typeface="源ノ角ゴシック JP Heavy" panose="020B0A00000000000000" pitchFamily="34" charset="-128"/>
+                <a:ea typeface="源ノ角ゴシック JP Heavy" panose="020B0A00000000000000" pitchFamily="34" charset="-128"/>
+              </a:rPr>
+              <a:t>受け身</a:t>
+            </a:r>
+            <a:endParaRPr lang="ja-JP" altLang="en-US" sz="8000" dirty="0">
+              <a:solidFill>
+                <a:srgbClr val="FF0000"/>
+              </a:solidFill>
+            </a:endParaRPr>
+          </a:p>
+        </p:txBody>
+      </p:sp>
+      <p:sp>
+        <p:nvSpPr>
+          <p:cNvPr id="5" name="テキスト ボックス 4">
+            <a:extLst>
+              <a:ext uri="{FF2B5EF4-FFF2-40B4-BE49-F238E27FC236}">
+                <a16:creationId xmlns:a16="http://schemas.microsoft.com/office/drawing/2014/main" id="{230736E2-6329-97A3-D4B5-826974E7775C}"/>
+              </a:ext>
+            </a:extLst>
+          </p:cNvPr>
+          <p:cNvSpPr txBox="1"/>
+          <p:nvPr/>
+        </p:nvSpPr>
+        <p:spPr>
+          <a:xfrm>
+            <a:off x="5274924" y="3207707"/>
+            <a:ext cx="6214151" cy="923330"/>
+          </a:xfrm>
+          <a:prstGeom prst="rect">
+            <a:avLst/>
+          </a:prstGeom>
+          <a:noFill/>
+        </p:spPr>
+        <p:txBody>
+          <a:bodyPr wrap="square">
+            <a:spAutoFit/>
+          </a:bodyPr>
+          <a:lstStyle/>
+          <a:p>
+            <a:pPr algn="ctr"/>
+            <a:r>
+              <a:rPr lang="ja-JP" altLang="en-US" sz="5400" dirty="0">
+                <a:solidFill>
+                  <a:schemeClr val="tx2">
+                    <a:lumMod val="50000"/>
+                    <a:lumOff val="50000"/>
+                  </a:schemeClr>
+                </a:solidFill>
+                <a:latin typeface="源ノ角ゴシック JP Heavy" panose="020B0A00000000000000" pitchFamily="34" charset="-128"/>
+                <a:ea typeface="源ノ角ゴシック JP Heavy" panose="020B0A00000000000000" pitchFamily="34" charset="-128"/>
+              </a:rPr>
+              <a:t>学習効率</a:t>
+            </a:r>
+            <a:endParaRPr lang="ja-JP" altLang="en-US" sz="6000" dirty="0">
+              <a:solidFill>
+                <a:schemeClr val="tx2">
+                  <a:lumMod val="50000"/>
+                  <a:lumOff val="50000"/>
+                </a:schemeClr>
+              </a:solidFill>
+            </a:endParaRPr>
+          </a:p>
+        </p:txBody>
+      </p:sp>
+      <p:cxnSp>
+        <p:nvCxnSpPr>
+          <p:cNvPr id="6" name="直線矢印コネクタ 5">
+            <a:extLst>
+              <a:ext uri="{FF2B5EF4-FFF2-40B4-BE49-F238E27FC236}">
+                <a16:creationId xmlns:a16="http://schemas.microsoft.com/office/drawing/2014/main" id="{537EE99C-1FA9-17B7-7DF4-8EDF5471D608}"/>
+              </a:ext>
+            </a:extLst>
+          </p:cNvPr>
+          <p:cNvCxnSpPr>
+            <a:cxnSpLocks/>
+          </p:cNvCxnSpPr>
+          <p:nvPr/>
+        </p:nvCxnSpPr>
+        <p:spPr>
+          <a:xfrm>
+            <a:off x="9952170" y="2946595"/>
+            <a:ext cx="0" cy="1019012"/>
+          </a:xfrm>
+          <a:prstGeom prst="straightConnector1">
+            <a:avLst/>
+          </a:prstGeom>
+          <a:ln w="114300">
+            <a:solidFill>
+              <a:srgbClr val="4E95D9"/>
+            </a:solidFill>
+            <a:tailEnd type="triangle"/>
+          </a:ln>
+        </p:spPr>
+        <p:style>
+          <a:lnRef idx="2">
+            <a:schemeClr val="accent1"/>
+          </a:lnRef>
+          <a:fillRef idx="0">
+            <a:schemeClr val="accent1"/>
+          </a:fillRef>
+          <a:effectRef idx="1">
+            <a:schemeClr val="accent1"/>
+          </a:effectRef>
+          <a:fontRef idx="minor">
+            <a:schemeClr val="tx1"/>
+          </a:fontRef>
+        </p:style>
+      </p:cxnSp>
+      <p:cxnSp>
+        <p:nvCxnSpPr>
+          <p:cNvPr id="7" name="直線矢印コネクタ 6">
+            <a:extLst>
+              <a:ext uri="{FF2B5EF4-FFF2-40B4-BE49-F238E27FC236}">
+                <a16:creationId xmlns:a16="http://schemas.microsoft.com/office/drawing/2014/main" id="{599DEAAE-2711-B6D8-3FDF-AE4A51852476}"/>
+              </a:ext>
+            </a:extLst>
+          </p:cNvPr>
+          <p:cNvCxnSpPr>
+            <a:cxnSpLocks/>
+          </p:cNvCxnSpPr>
+          <p:nvPr/>
+        </p:nvCxnSpPr>
+        <p:spPr>
+          <a:xfrm>
+            <a:off x="10342121" y="2800688"/>
+            <a:ext cx="0" cy="1129507"/>
+          </a:xfrm>
+          <a:prstGeom prst="straightConnector1">
+            <a:avLst/>
+          </a:prstGeom>
+          <a:ln w="114300">
+            <a:solidFill>
+              <a:srgbClr val="4E95D9"/>
+            </a:solidFill>
+            <a:tailEnd type="triangle"/>
+          </a:ln>
+        </p:spPr>
+        <p:style>
+          <a:lnRef idx="2">
+            <a:schemeClr val="accent1"/>
+          </a:lnRef>
+          <a:fillRef idx="0">
+            <a:schemeClr val="accent1"/>
+          </a:fillRef>
+          <a:effectRef idx="1">
+            <a:schemeClr val="accent1"/>
+          </a:effectRef>
+          <a:fontRef idx="minor">
+            <a:schemeClr val="tx1"/>
+          </a:fontRef>
+        </p:style>
+      </p:cxnSp>
+    </p:spTree>
+    <p:extLst>
+      <p:ext uri="{BB962C8B-B14F-4D97-AF65-F5344CB8AC3E}">
+        <p14:creationId xmlns:p14="http://schemas.microsoft.com/office/powerpoint/2010/main" val="1969546269"/>
+      </p:ext>
+    </p:extLst>
+  </p:cSld>
+  <p:clrMapOvr>
+    <a:masterClrMapping/>
+  </p:clrMapOvr>
+</p:sld>
+</file>
+
 <file path=ppt/slides/slide4.xml><?xml version="1.0" encoding="utf-8"?>
 <p:sld xmlns:a="http://schemas.openxmlformats.org/drawingml/2006/main" xmlns:r="http://schemas.openxmlformats.org/officeDocument/2006/relationships" xmlns:p="http://schemas.openxmlformats.org/presentationml/2006/main">
   <p:cSld>
@@ -8497,6 +12126,1135 @@
     <p:extLst>
       <p:ext uri="{BB962C8B-B14F-4D97-AF65-F5344CB8AC3E}">
         <p14:creationId xmlns:p14="http://schemas.microsoft.com/office/powerpoint/2010/main" val="4043373463"/>
+      </p:ext>
+    </p:extLst>
+  </p:cSld>
+  <p:clrMapOvr>
+    <a:masterClrMapping/>
+  </p:clrMapOvr>
+</p:sld>
+</file>
+
+<file path=ppt/slides/slide40.xml><?xml version="1.0" encoding="utf-8"?>
+<p:sld xmlns:a="http://schemas.openxmlformats.org/drawingml/2006/main" xmlns:r="http://schemas.openxmlformats.org/officeDocument/2006/relationships" xmlns:p="http://schemas.openxmlformats.org/presentationml/2006/main">
+  <p:cSld>
+    <p:bg>
+      <p:bgPr>
+        <a:solidFill>
+          <a:schemeClr val="accent1">
+            <a:lumMod val="40000"/>
+            <a:lumOff val="60000"/>
+          </a:schemeClr>
+        </a:solidFill>
+        <a:effectLst/>
+      </p:bgPr>
+    </p:bg>
+    <p:spTree>
+      <p:nvGrpSpPr>
+        <p:cNvPr id="1" name="">
+          <a:extLst>
+            <a:ext uri="{FF2B5EF4-FFF2-40B4-BE49-F238E27FC236}">
+              <a16:creationId xmlns:a16="http://schemas.microsoft.com/office/drawing/2014/main" id="{2B891083-0984-5A19-F4A3-8EF4E371988F}"/>
+            </a:ext>
+          </a:extLst>
+        </p:cNvPr>
+        <p:cNvGrpSpPr/>
+        <p:nvPr/>
+      </p:nvGrpSpPr>
+      <p:grpSpPr>
+        <a:xfrm>
+          <a:off x="0" y="0"/>
+          <a:ext cx="0" cy="0"/>
+          <a:chOff x="0" y="0"/>
+          <a:chExt cx="0" cy="0"/>
+        </a:xfrm>
+      </p:grpSpPr>
+      <p:sp>
+        <p:nvSpPr>
+          <p:cNvPr id="4" name="テキスト ボックス 3">
+            <a:extLst>
+              <a:ext uri="{FF2B5EF4-FFF2-40B4-BE49-F238E27FC236}">
+                <a16:creationId xmlns:a16="http://schemas.microsoft.com/office/drawing/2014/main" id="{62713B3D-684D-14F5-B97D-EF88B32672DD}"/>
+              </a:ext>
+            </a:extLst>
+          </p:cNvPr>
+          <p:cNvSpPr txBox="1"/>
+          <p:nvPr/>
+        </p:nvSpPr>
+        <p:spPr>
+          <a:xfrm>
+            <a:off x="767001" y="2767280"/>
+            <a:ext cx="10657997" cy="1938992"/>
+          </a:xfrm>
+          <a:prstGeom prst="rect">
+            <a:avLst/>
+          </a:prstGeom>
+          <a:noFill/>
+        </p:spPr>
+        <p:txBody>
+          <a:bodyPr wrap="square">
+            <a:spAutoFit/>
+          </a:bodyPr>
+          <a:lstStyle/>
+          <a:p>
+            <a:pPr algn="ctr"/>
+            <a:r>
+              <a:rPr lang="ja-JP" altLang="en-US" sz="6000" dirty="0">
+                <a:solidFill>
+                  <a:schemeClr val="bg1"/>
+                </a:solidFill>
+                <a:latin typeface="源ノ角ゴシック JP Heavy" panose="020B0A00000000000000" pitchFamily="34" charset="-128"/>
+                <a:ea typeface="源ノ角ゴシック JP Heavy" panose="020B0A00000000000000" pitchFamily="34" charset="-128"/>
+              </a:rPr>
+              <a:t>既存</a:t>
+            </a:r>
+            <a:r>
+              <a:rPr lang="en-US" altLang="ja-JP" sz="6000" dirty="0">
+                <a:solidFill>
+                  <a:schemeClr val="bg1"/>
+                </a:solidFill>
+                <a:latin typeface="源ノ角ゴシック JP Heavy" panose="020B0A00000000000000" pitchFamily="34" charset="-128"/>
+                <a:ea typeface="源ノ角ゴシック JP Heavy" panose="020B0A00000000000000" pitchFamily="34" charset="-128"/>
+              </a:rPr>
+              <a:t>AI</a:t>
+            </a:r>
+            <a:r>
+              <a:rPr lang="ja-JP" altLang="en-US" sz="6000" dirty="0">
+                <a:solidFill>
+                  <a:schemeClr val="bg1"/>
+                </a:solidFill>
+                <a:latin typeface="源ノ角ゴシック JP Heavy" panose="020B0A00000000000000" pitchFamily="34" charset="-128"/>
+                <a:ea typeface="源ノ角ゴシック JP Heavy" panose="020B0A00000000000000" pitchFamily="34" charset="-128"/>
+              </a:rPr>
+              <a:t>サービス</a:t>
+            </a:r>
+            <a:endParaRPr lang="en-US" altLang="ja-JP" sz="6000" dirty="0">
+              <a:solidFill>
+                <a:schemeClr val="bg1"/>
+              </a:solidFill>
+              <a:latin typeface="源ノ角ゴシック JP Heavy" panose="020B0A00000000000000" pitchFamily="34" charset="-128"/>
+              <a:ea typeface="源ノ角ゴシック JP Heavy" panose="020B0A00000000000000" pitchFamily="34" charset="-128"/>
+            </a:endParaRPr>
+          </a:p>
+          <a:p>
+            <a:pPr algn="ctr"/>
+            <a:r>
+              <a:rPr lang="en-US" altLang="ja-JP" sz="6000" dirty="0">
+                <a:solidFill>
+                  <a:schemeClr val="bg1"/>
+                </a:solidFill>
+                <a:latin typeface="源ノ角ゴシック JP Heavy" panose="020B0A00000000000000" pitchFamily="34" charset="-128"/>
+                <a:ea typeface="源ノ角ゴシック JP Heavy" panose="020B0A00000000000000" pitchFamily="34" charset="-128"/>
+              </a:rPr>
+              <a:t>AI</a:t>
+            </a:r>
+            <a:r>
+              <a:rPr lang="ja-JP" altLang="en-US" sz="6000" dirty="0">
+                <a:solidFill>
+                  <a:schemeClr val="bg1"/>
+                </a:solidFill>
+                <a:latin typeface="源ノ角ゴシック JP Heavy" panose="020B0A00000000000000" pitchFamily="34" charset="-128"/>
+                <a:ea typeface="源ノ角ゴシック JP Heavy" panose="020B0A00000000000000" pitchFamily="34" charset="-128"/>
+              </a:rPr>
+              <a:t>が学習を進めてしまう</a:t>
+            </a:r>
+            <a:endParaRPr lang="ja-JP" altLang="en-US" sz="6000" dirty="0">
+              <a:solidFill>
+                <a:schemeClr val="bg1"/>
+              </a:solidFill>
+            </a:endParaRPr>
+          </a:p>
+        </p:txBody>
+      </p:sp>
+    </p:spTree>
+    <p:extLst>
+      <p:ext uri="{BB962C8B-B14F-4D97-AF65-F5344CB8AC3E}">
+        <p14:creationId xmlns:p14="http://schemas.microsoft.com/office/powerpoint/2010/main" val="2104987475"/>
+      </p:ext>
+    </p:extLst>
+  </p:cSld>
+  <p:clrMapOvr>
+    <a:masterClrMapping/>
+  </p:clrMapOvr>
+</p:sld>
+</file>
+
+<file path=ppt/slides/slide41.xml><?xml version="1.0" encoding="utf-8"?>
+<p:sld xmlns:a="http://schemas.openxmlformats.org/drawingml/2006/main" xmlns:r="http://schemas.openxmlformats.org/officeDocument/2006/relationships" xmlns:p="http://schemas.openxmlformats.org/presentationml/2006/main">
+  <p:cSld>
+    <p:bg>
+      <p:bgPr>
+        <a:solidFill>
+          <a:schemeClr val="bg1"/>
+        </a:solidFill>
+        <a:effectLst/>
+      </p:bgPr>
+    </p:bg>
+    <p:spTree>
+      <p:nvGrpSpPr>
+        <p:cNvPr id="1" name="">
+          <a:extLst>
+            <a:ext uri="{FF2B5EF4-FFF2-40B4-BE49-F238E27FC236}">
+              <a16:creationId xmlns:a16="http://schemas.microsoft.com/office/drawing/2014/main" id="{EB2E6B4B-4561-BDDA-EDF6-0DB4C8D4DAD5}"/>
+            </a:ext>
+          </a:extLst>
+        </p:cNvPr>
+        <p:cNvGrpSpPr/>
+        <p:nvPr/>
+      </p:nvGrpSpPr>
+      <p:grpSpPr>
+        <a:xfrm>
+          <a:off x="0" y="0"/>
+          <a:ext cx="0" cy="0"/>
+          <a:chOff x="0" y="0"/>
+          <a:chExt cx="0" cy="0"/>
+        </a:xfrm>
+      </p:grpSpPr>
+      <p:sp>
+        <p:nvSpPr>
+          <p:cNvPr id="7" name="タイトル 1">
+            <a:extLst>
+              <a:ext uri="{FF2B5EF4-FFF2-40B4-BE49-F238E27FC236}">
+                <a16:creationId xmlns:a16="http://schemas.microsoft.com/office/drawing/2014/main" id="{73EF428C-D817-6BF7-4CC3-C5E410E0F88C}"/>
+              </a:ext>
+            </a:extLst>
+          </p:cNvPr>
+          <p:cNvSpPr txBox="1">
+            <a:spLocks/>
+          </p:cNvSpPr>
+          <p:nvPr/>
+        </p:nvSpPr>
+        <p:spPr>
+          <a:xfrm>
+            <a:off x="0" y="269820"/>
+            <a:ext cx="12192000" cy="6858000"/>
+          </a:xfrm>
+          <a:prstGeom prst="rect">
+            <a:avLst/>
+          </a:prstGeom>
+          <a:noFill/>
+        </p:spPr>
+        <p:txBody>
+          <a:bodyPr vert="horz" lIns="91440" tIns="45720" rIns="91440" bIns="45720" rtlCol="0" anchor="ctr" anchorCtr="0">
+            <a:normAutofit/>
+          </a:bodyPr>
+          <a:lstStyle>
+            <a:lvl1pPr algn="ctr" defTabSz="914400" rtl="0" eaLnBrk="1" latinLnBrk="0" hangingPunct="1">
+              <a:lnSpc>
+                <a:spcPct val="90000"/>
+              </a:lnSpc>
+              <a:spcBef>
+                <a:spcPct val="0"/>
+              </a:spcBef>
+              <a:buNone/>
+              <a:defRPr kumimoji="1" sz="6000" kern="1200">
+                <a:solidFill>
+                  <a:schemeClr val="tx1"/>
+                </a:solidFill>
+                <a:latin typeface="+mj-lt"/>
+                <a:ea typeface="+mj-ea"/>
+                <a:cs typeface="+mj-cs"/>
+              </a:defRPr>
+            </a:lvl1pPr>
+          </a:lstStyle>
+          <a:p>
+            <a:r>
+              <a:rPr lang="en-US" altLang="ja-JP" sz="23900" dirty="0">
+                <a:solidFill>
+                  <a:schemeClr val="bg1">
+                    <a:lumMod val="95000"/>
+                  </a:schemeClr>
+                </a:solidFill>
+                <a:latin typeface="源ノ角ゴシック JP Heavy" panose="020B0A00000000000000" pitchFamily="34" charset="-128"/>
+                <a:ea typeface="源ノ角ゴシック JP Heavy" panose="020B0A00000000000000" pitchFamily="34" charset="-128"/>
+              </a:rPr>
+              <a:t>WHYAI</a:t>
+            </a:r>
+            <a:endParaRPr lang="ja-JP" altLang="en-US" sz="23900" dirty="0">
+              <a:solidFill>
+                <a:schemeClr val="bg1">
+                  <a:lumMod val="95000"/>
+                </a:schemeClr>
+              </a:solidFill>
+              <a:latin typeface="源ノ角ゴシック JP Heavy" panose="020B0A00000000000000" pitchFamily="34" charset="-128"/>
+              <a:ea typeface="源ノ角ゴシック JP Heavy" panose="020B0A00000000000000" pitchFamily="34" charset="-128"/>
+            </a:endParaRPr>
+          </a:p>
+        </p:txBody>
+      </p:sp>
+      <p:sp>
+        <p:nvSpPr>
+          <p:cNvPr id="6" name="タイトル 1">
+            <a:extLst>
+              <a:ext uri="{FF2B5EF4-FFF2-40B4-BE49-F238E27FC236}">
+                <a16:creationId xmlns:a16="http://schemas.microsoft.com/office/drawing/2014/main" id="{FA177F9E-8DA0-78BC-60DC-436A6130EA00}"/>
+              </a:ext>
+            </a:extLst>
+          </p:cNvPr>
+          <p:cNvSpPr txBox="1">
+            <a:spLocks/>
+          </p:cNvSpPr>
+          <p:nvPr/>
+        </p:nvSpPr>
+        <p:spPr>
+          <a:xfrm>
+            <a:off x="1865935" y="2508165"/>
+            <a:ext cx="8460129" cy="2381310"/>
+          </a:xfrm>
+          <a:prstGeom prst="rect">
+            <a:avLst/>
+          </a:prstGeom>
+        </p:spPr>
+        <p:txBody>
+          <a:bodyPr vert="horz" lIns="91440" tIns="45720" rIns="91440" bIns="45720" rtlCol="0" anchor="ctr" anchorCtr="0">
+            <a:normAutofit/>
+          </a:bodyPr>
+          <a:lstStyle>
+            <a:lvl1pPr algn="ctr" defTabSz="914400" rtl="0" eaLnBrk="1" latinLnBrk="0" hangingPunct="1">
+              <a:lnSpc>
+                <a:spcPct val="90000"/>
+              </a:lnSpc>
+              <a:spcBef>
+                <a:spcPct val="0"/>
+              </a:spcBef>
+              <a:buNone/>
+              <a:defRPr kumimoji="1" sz="6000" kern="1200">
+                <a:solidFill>
+                  <a:schemeClr val="tx1"/>
+                </a:solidFill>
+                <a:latin typeface="+mj-lt"/>
+                <a:ea typeface="+mj-ea"/>
+                <a:cs typeface="+mj-cs"/>
+              </a:defRPr>
+            </a:lvl1pPr>
+          </a:lstStyle>
+          <a:p>
+            <a:r>
+              <a:rPr lang="ja-JP" altLang="en-US" sz="9600" dirty="0">
+                <a:solidFill>
+                  <a:schemeClr val="tx2">
+                    <a:lumMod val="50000"/>
+                    <a:lumOff val="50000"/>
+                  </a:schemeClr>
+                </a:solidFill>
+                <a:latin typeface="源ノ角ゴシック JP Heavy" panose="020B0A00000000000000" pitchFamily="34" charset="-128"/>
+                <a:ea typeface="源ノ角ゴシック JP Heavy" panose="020B0A00000000000000" pitchFamily="34" charset="-128"/>
+              </a:rPr>
+              <a:t>独自の原則</a:t>
+            </a:r>
+            <a:endParaRPr lang="en-US" altLang="ja-JP" sz="9600" dirty="0">
+              <a:solidFill>
+                <a:schemeClr val="tx2">
+                  <a:lumMod val="50000"/>
+                  <a:lumOff val="50000"/>
+                </a:schemeClr>
+              </a:solidFill>
+              <a:latin typeface="源ノ角ゴシック JP Heavy" panose="020B0A00000000000000" pitchFamily="34" charset="-128"/>
+              <a:ea typeface="源ノ角ゴシック JP Heavy" panose="020B0A00000000000000" pitchFamily="34" charset="-128"/>
+            </a:endParaRPr>
+          </a:p>
+        </p:txBody>
+      </p:sp>
+    </p:spTree>
+    <p:extLst>
+      <p:ext uri="{BB962C8B-B14F-4D97-AF65-F5344CB8AC3E}">
+        <p14:creationId xmlns:p14="http://schemas.microsoft.com/office/powerpoint/2010/main" val="1074296461"/>
+      </p:ext>
+    </p:extLst>
+  </p:cSld>
+  <p:clrMapOvr>
+    <a:masterClrMapping/>
+  </p:clrMapOvr>
+</p:sld>
+</file>
+
+<file path=ppt/slides/slide42.xml><?xml version="1.0" encoding="utf-8"?>
+<p:sld xmlns:a="http://schemas.openxmlformats.org/drawingml/2006/main" xmlns:r="http://schemas.openxmlformats.org/officeDocument/2006/relationships" xmlns:p="http://schemas.openxmlformats.org/presentationml/2006/main">
+  <p:cSld>
+    <p:bg>
+      <p:bgPr>
+        <a:solidFill>
+          <a:srgbClr val="FFCC99"/>
+        </a:solidFill>
+        <a:effectLst/>
+      </p:bgPr>
+    </p:bg>
+    <p:spTree>
+      <p:nvGrpSpPr>
+        <p:cNvPr id="1" name="">
+          <a:extLst>
+            <a:ext uri="{FF2B5EF4-FFF2-40B4-BE49-F238E27FC236}">
+              <a16:creationId xmlns:a16="http://schemas.microsoft.com/office/drawing/2014/main" id="{8C941B1C-D1F8-8FBE-EC45-0B8E55E9C9FE}"/>
+            </a:ext>
+          </a:extLst>
+        </p:cNvPr>
+        <p:cNvGrpSpPr/>
+        <p:nvPr/>
+      </p:nvGrpSpPr>
+      <p:grpSpPr>
+        <a:xfrm>
+          <a:off x="0" y="0"/>
+          <a:ext cx="0" cy="0"/>
+          <a:chOff x="0" y="0"/>
+          <a:chExt cx="0" cy="0"/>
+        </a:xfrm>
+      </p:grpSpPr>
+      <p:sp>
+        <p:nvSpPr>
+          <p:cNvPr id="4" name="テキスト ボックス 3">
+            <a:extLst>
+              <a:ext uri="{FF2B5EF4-FFF2-40B4-BE49-F238E27FC236}">
+                <a16:creationId xmlns:a16="http://schemas.microsoft.com/office/drawing/2014/main" id="{A32CF9B1-2FAC-15BB-373C-D8590B946D31}"/>
+              </a:ext>
+            </a:extLst>
+          </p:cNvPr>
+          <p:cNvSpPr txBox="1"/>
+          <p:nvPr/>
+        </p:nvSpPr>
+        <p:spPr>
+          <a:xfrm>
+            <a:off x="767001" y="1997839"/>
+            <a:ext cx="10657997" cy="2862322"/>
+          </a:xfrm>
+          <a:prstGeom prst="rect">
+            <a:avLst/>
+          </a:prstGeom>
+          <a:noFill/>
+        </p:spPr>
+        <p:txBody>
+          <a:bodyPr wrap="square">
+            <a:spAutoFit/>
+          </a:bodyPr>
+          <a:lstStyle/>
+          <a:p>
+            <a:pPr algn="ctr"/>
+            <a:r>
+              <a:rPr lang="ja-JP" altLang="en-US" sz="6000" dirty="0">
+                <a:latin typeface="源ノ角ゴシック JP Heavy" panose="020B0A00000000000000" pitchFamily="34" charset="-128"/>
+                <a:ea typeface="源ノ角ゴシック JP Heavy" panose="020B0A00000000000000" pitchFamily="34" charset="-128"/>
+              </a:rPr>
+              <a:t>人間が考え</a:t>
+            </a:r>
+            <a:endParaRPr lang="en-US" altLang="ja-JP" sz="6000" dirty="0">
+              <a:latin typeface="源ノ角ゴシック JP Heavy" panose="020B0A00000000000000" pitchFamily="34" charset="-128"/>
+              <a:ea typeface="源ノ角ゴシック JP Heavy" panose="020B0A00000000000000" pitchFamily="34" charset="-128"/>
+            </a:endParaRPr>
+          </a:p>
+          <a:p>
+            <a:pPr algn="ctr"/>
+            <a:r>
+              <a:rPr lang="en-US" altLang="ja-JP" sz="6000" dirty="0">
+                <a:latin typeface="源ノ角ゴシック JP Heavy" panose="020B0A00000000000000" pitchFamily="34" charset="-128"/>
+                <a:ea typeface="源ノ角ゴシック JP Heavy" panose="020B0A00000000000000" pitchFamily="34" charset="-128"/>
+              </a:rPr>
+              <a:t>AI</a:t>
+            </a:r>
+            <a:r>
+              <a:rPr lang="ja-JP" altLang="en-US" sz="6000" dirty="0">
+                <a:latin typeface="源ノ角ゴシック JP Heavy" panose="020B0A00000000000000" pitchFamily="34" charset="-128"/>
+                <a:ea typeface="源ノ角ゴシック JP Heavy" panose="020B0A00000000000000" pitchFamily="34" charset="-128"/>
+              </a:rPr>
+              <a:t>がそれを支える</a:t>
+            </a:r>
+            <a:endParaRPr lang="en-US" altLang="ja-JP" sz="6000" dirty="0">
+              <a:latin typeface="源ノ角ゴシック JP Heavy" panose="020B0A00000000000000" pitchFamily="34" charset="-128"/>
+              <a:ea typeface="源ノ角ゴシック JP Heavy" panose="020B0A00000000000000" pitchFamily="34" charset="-128"/>
+            </a:endParaRPr>
+          </a:p>
+          <a:p>
+            <a:pPr algn="ctr"/>
+            <a:r>
+              <a:rPr lang="ja-JP" altLang="en-US" sz="6000" dirty="0">
+                <a:latin typeface="源ノ角ゴシック JP Heavy" panose="020B0A00000000000000" pitchFamily="34" charset="-128"/>
+                <a:ea typeface="源ノ角ゴシック JP Heavy" panose="020B0A00000000000000" pitchFamily="34" charset="-128"/>
+              </a:rPr>
+              <a:t>関係性</a:t>
+            </a:r>
+            <a:endParaRPr lang="ja-JP" altLang="en-US" sz="6000" dirty="0"/>
+          </a:p>
+        </p:txBody>
+      </p:sp>
+    </p:spTree>
+    <p:extLst>
+      <p:ext uri="{BB962C8B-B14F-4D97-AF65-F5344CB8AC3E}">
+        <p14:creationId xmlns:p14="http://schemas.microsoft.com/office/powerpoint/2010/main" val="2718527676"/>
+      </p:ext>
+    </p:extLst>
+  </p:cSld>
+  <p:clrMapOvr>
+    <a:masterClrMapping/>
+  </p:clrMapOvr>
+</p:sld>
+</file>
+
+<file path=ppt/slides/slide43.xml><?xml version="1.0" encoding="utf-8"?>
+<p:sld xmlns:a="http://schemas.openxmlformats.org/drawingml/2006/main" xmlns:r="http://schemas.openxmlformats.org/officeDocument/2006/relationships" xmlns:p="http://schemas.openxmlformats.org/presentationml/2006/main">
+  <p:cSld>
+    <p:bg>
+      <p:bgPr>
+        <a:solidFill>
+          <a:schemeClr val="bg1"/>
+        </a:solidFill>
+        <a:effectLst/>
+      </p:bgPr>
+    </p:bg>
+    <p:spTree>
+      <p:nvGrpSpPr>
+        <p:cNvPr id="1" name="">
+          <a:extLst>
+            <a:ext uri="{FF2B5EF4-FFF2-40B4-BE49-F238E27FC236}">
+              <a16:creationId xmlns:a16="http://schemas.microsoft.com/office/drawing/2014/main" id="{0A7B8C2F-998F-CFB6-AAE4-24DD8B25414F}"/>
+            </a:ext>
+          </a:extLst>
+        </p:cNvPr>
+        <p:cNvGrpSpPr/>
+        <p:nvPr/>
+      </p:nvGrpSpPr>
+      <p:grpSpPr>
+        <a:xfrm>
+          <a:off x="0" y="0"/>
+          <a:ext cx="0" cy="0"/>
+          <a:chOff x="0" y="0"/>
+          <a:chExt cx="0" cy="0"/>
+        </a:xfrm>
+      </p:grpSpPr>
+      <p:sp>
+        <p:nvSpPr>
+          <p:cNvPr id="13" name="タイトル 1">
+            <a:extLst>
+              <a:ext uri="{FF2B5EF4-FFF2-40B4-BE49-F238E27FC236}">
+                <a16:creationId xmlns:a16="http://schemas.microsoft.com/office/drawing/2014/main" id="{A9245E6D-F68A-79D1-C91F-DB477D765687}"/>
+              </a:ext>
+            </a:extLst>
+          </p:cNvPr>
+          <p:cNvSpPr txBox="1">
+            <a:spLocks/>
+          </p:cNvSpPr>
+          <p:nvPr/>
+        </p:nvSpPr>
+        <p:spPr>
+          <a:xfrm>
+            <a:off x="0" y="269820"/>
+            <a:ext cx="12192000" cy="6858000"/>
+          </a:xfrm>
+          <a:prstGeom prst="rect">
+            <a:avLst/>
+          </a:prstGeom>
+          <a:noFill/>
+        </p:spPr>
+        <p:txBody>
+          <a:bodyPr vert="horz" lIns="91440" tIns="45720" rIns="91440" bIns="45720" rtlCol="0" anchor="ctr" anchorCtr="0">
+            <a:normAutofit/>
+          </a:bodyPr>
+          <a:lstStyle>
+            <a:lvl1pPr algn="ctr" defTabSz="914400" rtl="0" eaLnBrk="1" latinLnBrk="0" hangingPunct="1">
+              <a:lnSpc>
+                <a:spcPct val="90000"/>
+              </a:lnSpc>
+              <a:spcBef>
+                <a:spcPct val="0"/>
+              </a:spcBef>
+              <a:buNone/>
+              <a:defRPr kumimoji="1" sz="6000" kern="1200">
+                <a:solidFill>
+                  <a:schemeClr val="tx1"/>
+                </a:solidFill>
+                <a:latin typeface="+mj-lt"/>
+                <a:ea typeface="+mj-ea"/>
+                <a:cs typeface="+mj-cs"/>
+              </a:defRPr>
+            </a:lvl1pPr>
+          </a:lstStyle>
+          <a:p>
+            <a:r>
+              <a:rPr lang="ja-JP" altLang="en-US" sz="23900" dirty="0">
+                <a:solidFill>
+                  <a:schemeClr val="bg1">
+                    <a:lumMod val="95000"/>
+                  </a:schemeClr>
+                </a:solidFill>
+                <a:latin typeface="源ノ角ゴシック JP Heavy" panose="020B0A00000000000000" pitchFamily="34" charset="-128"/>
+                <a:ea typeface="源ノ角ゴシック JP Heavy" panose="020B0A00000000000000" pitchFamily="34" charset="-128"/>
+              </a:rPr>
+              <a:t>環境</a:t>
+            </a:r>
+          </a:p>
+        </p:txBody>
+      </p:sp>
+      <p:sp>
+        <p:nvSpPr>
+          <p:cNvPr id="2" name="タイトル 1">
+            <a:extLst>
+              <a:ext uri="{FF2B5EF4-FFF2-40B4-BE49-F238E27FC236}">
+                <a16:creationId xmlns:a16="http://schemas.microsoft.com/office/drawing/2014/main" id="{BC7C9862-5A30-976C-45B1-59CD55C00383}"/>
+              </a:ext>
+            </a:extLst>
+          </p:cNvPr>
+          <p:cNvSpPr>
+            <a:spLocks noGrp="1"/>
+          </p:cNvSpPr>
+          <p:nvPr>
+            <p:ph type="ctrTitle"/>
+          </p:nvPr>
+        </p:nvSpPr>
+        <p:spPr>
+          <a:xfrm>
+            <a:off x="-197503" y="2395331"/>
+            <a:ext cx="6860899" cy="2067338"/>
+          </a:xfrm>
+        </p:spPr>
+        <p:txBody>
+          <a:bodyPr anchor="ctr" anchorCtr="0">
+            <a:normAutofit/>
+          </a:bodyPr>
+          <a:lstStyle/>
+          <a:p>
+            <a:r>
+              <a:rPr kumimoji="1" lang="en-US" altLang="ja-JP" sz="5400" dirty="0">
+                <a:latin typeface="源ノ角ゴシック JP Heavy" panose="020B0A00000000000000" pitchFamily="34" charset="-128"/>
+                <a:ea typeface="源ノ角ゴシック JP Heavy" panose="020B0A00000000000000" pitchFamily="34" charset="-128"/>
+              </a:rPr>
+              <a:t>AI</a:t>
+            </a:r>
+            <a:r>
+              <a:rPr kumimoji="1" lang="ja-JP" altLang="en-US" sz="5400" dirty="0">
+                <a:latin typeface="源ノ角ゴシック JP Heavy" panose="020B0A00000000000000" pitchFamily="34" charset="-128"/>
+                <a:ea typeface="源ノ角ゴシック JP Heavy" panose="020B0A00000000000000" pitchFamily="34" charset="-128"/>
+              </a:rPr>
+              <a:t>時代</a:t>
+            </a:r>
+          </a:p>
+        </p:txBody>
+      </p:sp>
+      <p:sp>
+        <p:nvSpPr>
+          <p:cNvPr id="12" name="タイトル 1">
+            <a:extLst>
+              <a:ext uri="{FF2B5EF4-FFF2-40B4-BE49-F238E27FC236}">
+                <a16:creationId xmlns:a16="http://schemas.microsoft.com/office/drawing/2014/main" id="{95CF7896-B08F-4791-1287-64962AF9C52F}"/>
+              </a:ext>
+            </a:extLst>
+          </p:cNvPr>
+          <p:cNvSpPr txBox="1">
+            <a:spLocks/>
+          </p:cNvSpPr>
+          <p:nvPr/>
+        </p:nvSpPr>
+        <p:spPr>
+          <a:xfrm>
+            <a:off x="4603097" y="2585831"/>
+            <a:ext cx="6860899" cy="2067338"/>
+          </a:xfrm>
+          <a:prstGeom prst="rect">
+            <a:avLst/>
+          </a:prstGeom>
+        </p:spPr>
+        <p:txBody>
+          <a:bodyPr vert="horz" lIns="91440" tIns="45720" rIns="91440" bIns="45720" rtlCol="0" anchor="ctr" anchorCtr="0">
+            <a:normAutofit lnSpcReduction="10000"/>
+          </a:bodyPr>
+          <a:lstStyle>
+            <a:lvl1pPr algn="ctr" defTabSz="914400" rtl="0" eaLnBrk="1" latinLnBrk="0" hangingPunct="1">
+              <a:lnSpc>
+                <a:spcPct val="90000"/>
+              </a:lnSpc>
+              <a:spcBef>
+                <a:spcPct val="0"/>
+              </a:spcBef>
+              <a:buNone/>
+              <a:defRPr kumimoji="1" sz="6000" kern="1200">
+                <a:solidFill>
+                  <a:schemeClr val="tx1"/>
+                </a:solidFill>
+                <a:latin typeface="+mj-lt"/>
+                <a:ea typeface="+mj-ea"/>
+                <a:cs typeface="+mj-cs"/>
+              </a:defRPr>
+            </a:lvl1pPr>
+          </a:lstStyle>
+          <a:p>
+            <a:r>
+              <a:rPr lang="ja-JP" altLang="en-US" sz="8000" dirty="0">
+                <a:solidFill>
+                  <a:srgbClr val="4E95D9"/>
+                </a:solidFill>
+                <a:latin typeface="源ノ角ゴシック JP Heavy" panose="020B0A00000000000000" pitchFamily="34" charset="-128"/>
+                <a:ea typeface="源ノ角ゴシック JP Heavy" panose="020B0A00000000000000" pitchFamily="34" charset="-128"/>
+              </a:rPr>
+              <a:t>色々なもの</a:t>
+            </a:r>
+            <a:r>
+              <a:rPr lang="en-US" altLang="ja-JP" sz="8000" dirty="0">
+                <a:solidFill>
+                  <a:srgbClr val="4E95D9"/>
+                </a:solidFill>
+                <a:latin typeface="源ノ角ゴシック JP Heavy" panose="020B0A00000000000000" pitchFamily="34" charset="-128"/>
+                <a:ea typeface="源ノ角ゴシック JP Heavy" panose="020B0A00000000000000" pitchFamily="34" charset="-128"/>
+              </a:rPr>
+              <a:t>+AI</a:t>
+            </a:r>
+            <a:r>
+              <a:rPr lang="ja-JP" altLang="en-US" sz="8000" dirty="0">
+                <a:solidFill>
+                  <a:srgbClr val="4E95D9"/>
+                </a:solidFill>
+                <a:latin typeface="源ノ角ゴシック JP Heavy" panose="020B0A00000000000000" pitchFamily="34" charset="-128"/>
+                <a:ea typeface="源ノ角ゴシック JP Heavy" panose="020B0A00000000000000" pitchFamily="34" charset="-128"/>
+              </a:rPr>
+              <a:t>の統合</a:t>
+            </a:r>
+          </a:p>
+        </p:txBody>
+      </p:sp>
+    </p:spTree>
+    <p:extLst>
+      <p:ext uri="{BB962C8B-B14F-4D97-AF65-F5344CB8AC3E}">
+        <p14:creationId xmlns:p14="http://schemas.microsoft.com/office/powerpoint/2010/main" val="3011672207"/>
+      </p:ext>
+    </p:extLst>
+  </p:cSld>
+  <p:clrMapOvr>
+    <a:masterClrMapping/>
+  </p:clrMapOvr>
+</p:sld>
+</file>
+
+<file path=ppt/slides/slide44.xml><?xml version="1.0" encoding="utf-8"?>
+<p:sld xmlns:a="http://schemas.openxmlformats.org/drawingml/2006/main" xmlns:r="http://schemas.openxmlformats.org/officeDocument/2006/relationships" xmlns:p="http://schemas.openxmlformats.org/presentationml/2006/main">
+  <p:cSld>
+    <p:bg>
+      <p:bgPr>
+        <a:solidFill>
+          <a:schemeClr val="bg1"/>
+        </a:solidFill>
+        <a:effectLst/>
+      </p:bgPr>
+    </p:bg>
+    <p:spTree>
+      <p:nvGrpSpPr>
+        <p:cNvPr id="1" name="">
+          <a:extLst>
+            <a:ext uri="{FF2B5EF4-FFF2-40B4-BE49-F238E27FC236}">
+              <a16:creationId xmlns:a16="http://schemas.microsoft.com/office/drawing/2014/main" id="{392C3929-8B41-0C4C-8F79-4D336EABC68A}"/>
+            </a:ext>
+          </a:extLst>
+        </p:cNvPr>
+        <p:cNvGrpSpPr/>
+        <p:nvPr/>
+      </p:nvGrpSpPr>
+      <p:grpSpPr>
+        <a:xfrm>
+          <a:off x="0" y="0"/>
+          <a:ext cx="0" cy="0"/>
+          <a:chOff x="0" y="0"/>
+          <a:chExt cx="0" cy="0"/>
+        </a:xfrm>
+      </p:grpSpPr>
+      <p:sp>
+        <p:nvSpPr>
+          <p:cNvPr id="2" name="タイトル 1">
+            <a:extLst>
+              <a:ext uri="{FF2B5EF4-FFF2-40B4-BE49-F238E27FC236}">
+                <a16:creationId xmlns:a16="http://schemas.microsoft.com/office/drawing/2014/main" id="{9DEC6B74-786F-F0F5-88A5-B4C65C259536}"/>
+              </a:ext>
+            </a:extLst>
+          </p:cNvPr>
+          <p:cNvSpPr txBox="1">
+            <a:spLocks/>
+          </p:cNvSpPr>
+          <p:nvPr/>
+        </p:nvSpPr>
+        <p:spPr>
+          <a:xfrm>
+            <a:off x="0" y="269820"/>
+            <a:ext cx="12192000" cy="6858000"/>
+          </a:xfrm>
+          <a:prstGeom prst="rect">
+            <a:avLst/>
+          </a:prstGeom>
+          <a:noFill/>
+        </p:spPr>
+        <p:txBody>
+          <a:bodyPr vert="horz" lIns="91440" tIns="45720" rIns="91440" bIns="45720" rtlCol="0" anchor="ctr" anchorCtr="0">
+            <a:normAutofit/>
+          </a:bodyPr>
+          <a:lstStyle>
+            <a:lvl1pPr algn="ctr" defTabSz="914400" rtl="0" eaLnBrk="1" latinLnBrk="0" hangingPunct="1">
+              <a:lnSpc>
+                <a:spcPct val="90000"/>
+              </a:lnSpc>
+              <a:spcBef>
+                <a:spcPct val="0"/>
+              </a:spcBef>
+              <a:buNone/>
+              <a:defRPr kumimoji="1" sz="6000" kern="1200">
+                <a:solidFill>
+                  <a:schemeClr val="tx1"/>
+                </a:solidFill>
+                <a:latin typeface="+mj-lt"/>
+                <a:ea typeface="+mj-ea"/>
+                <a:cs typeface="+mj-cs"/>
+              </a:defRPr>
+            </a:lvl1pPr>
+          </a:lstStyle>
+          <a:p>
+            <a:r>
+              <a:rPr lang="en-US" altLang="ja-JP" sz="23900" dirty="0">
+                <a:solidFill>
+                  <a:schemeClr val="bg1">
+                    <a:lumMod val="95000"/>
+                  </a:schemeClr>
+                </a:solidFill>
+                <a:latin typeface="源ノ角ゴシック JP Heavy" panose="020B0A00000000000000" pitchFamily="34" charset="-128"/>
+                <a:ea typeface="源ノ角ゴシック JP Heavy" panose="020B0A00000000000000" pitchFamily="34" charset="-128"/>
+              </a:rPr>
+              <a:t>WHYAI</a:t>
+            </a:r>
+            <a:endParaRPr lang="ja-JP" altLang="en-US" sz="23900" dirty="0">
+              <a:solidFill>
+                <a:schemeClr val="bg1">
+                  <a:lumMod val="95000"/>
+                </a:schemeClr>
+              </a:solidFill>
+              <a:latin typeface="源ノ角ゴシック JP Heavy" panose="020B0A00000000000000" pitchFamily="34" charset="-128"/>
+              <a:ea typeface="源ノ角ゴシック JP Heavy" panose="020B0A00000000000000" pitchFamily="34" charset="-128"/>
+            </a:endParaRPr>
+          </a:p>
+        </p:txBody>
+      </p:sp>
+      <p:sp>
+        <p:nvSpPr>
+          <p:cNvPr id="4" name="テキスト ボックス 3">
+            <a:extLst>
+              <a:ext uri="{FF2B5EF4-FFF2-40B4-BE49-F238E27FC236}">
+                <a16:creationId xmlns:a16="http://schemas.microsoft.com/office/drawing/2014/main" id="{DBCA1B4C-30A1-CCCA-41A5-C342636DCC08}"/>
+              </a:ext>
+            </a:extLst>
+          </p:cNvPr>
+          <p:cNvSpPr txBox="1"/>
+          <p:nvPr/>
+        </p:nvSpPr>
+        <p:spPr>
+          <a:xfrm>
+            <a:off x="767001" y="2459504"/>
+            <a:ext cx="10657997" cy="1938992"/>
+          </a:xfrm>
+          <a:prstGeom prst="rect">
+            <a:avLst/>
+          </a:prstGeom>
+          <a:noFill/>
+        </p:spPr>
+        <p:txBody>
+          <a:bodyPr wrap="square">
+            <a:spAutoFit/>
+          </a:bodyPr>
+          <a:lstStyle/>
+          <a:p>
+            <a:pPr algn="ctr"/>
+            <a:r>
+              <a:rPr lang="ja-JP" altLang="en-US" sz="6000" dirty="0">
+                <a:latin typeface="源ノ角ゴシック JP Heavy" panose="020B0A00000000000000" pitchFamily="34" charset="-128"/>
+                <a:ea typeface="源ノ角ゴシック JP Heavy" panose="020B0A00000000000000" pitchFamily="34" charset="-128"/>
+              </a:rPr>
+              <a:t>エンジニアが主体的に学習するための</a:t>
+            </a:r>
+            <a:r>
+              <a:rPr lang="en-US" altLang="ja-JP" sz="6000" dirty="0">
+                <a:latin typeface="源ノ角ゴシック JP Heavy" panose="020B0A00000000000000" pitchFamily="34" charset="-128"/>
+                <a:ea typeface="源ノ角ゴシック JP Heavy" panose="020B0A00000000000000" pitchFamily="34" charset="-128"/>
+              </a:rPr>
+              <a:t>IT</a:t>
+            </a:r>
+            <a:r>
+              <a:rPr lang="ja-JP" altLang="en-US" sz="6000" dirty="0">
+                <a:latin typeface="源ノ角ゴシック JP Heavy" panose="020B0A00000000000000" pitchFamily="34" charset="-128"/>
+                <a:ea typeface="源ノ角ゴシック JP Heavy" panose="020B0A00000000000000" pitchFamily="34" charset="-128"/>
+              </a:rPr>
+              <a:t>学習支援サービス</a:t>
+            </a:r>
+          </a:p>
+        </p:txBody>
+      </p:sp>
+    </p:spTree>
+    <p:extLst>
+      <p:ext uri="{BB962C8B-B14F-4D97-AF65-F5344CB8AC3E}">
+        <p14:creationId xmlns:p14="http://schemas.microsoft.com/office/powerpoint/2010/main" val="3966493083"/>
+      </p:ext>
+    </p:extLst>
+  </p:cSld>
+  <p:clrMapOvr>
+    <a:masterClrMapping/>
+  </p:clrMapOvr>
+</p:sld>
+</file>
+
+<file path=ppt/slides/slide45.xml><?xml version="1.0" encoding="utf-8"?>
+<p:sld xmlns:a="http://schemas.openxmlformats.org/drawingml/2006/main" xmlns:r="http://schemas.openxmlformats.org/officeDocument/2006/relationships" xmlns:p="http://schemas.openxmlformats.org/presentationml/2006/main">
+  <p:cSld>
+    <p:bg>
+      <p:bgPr>
+        <a:solidFill>
+          <a:schemeClr val="accent4">
+            <a:lumMod val="60000"/>
+            <a:lumOff val="40000"/>
+          </a:schemeClr>
+        </a:solidFill>
+        <a:effectLst/>
+      </p:bgPr>
+    </p:bg>
+    <p:spTree>
+      <p:nvGrpSpPr>
+        <p:cNvPr id="1" name="">
+          <a:extLst>
+            <a:ext uri="{FF2B5EF4-FFF2-40B4-BE49-F238E27FC236}">
+              <a16:creationId xmlns:a16="http://schemas.microsoft.com/office/drawing/2014/main" id="{C1A7B639-C236-8387-C81D-442F6523F008}"/>
+            </a:ext>
+          </a:extLst>
+        </p:cNvPr>
+        <p:cNvGrpSpPr/>
+        <p:nvPr/>
+      </p:nvGrpSpPr>
+      <p:grpSpPr>
+        <a:xfrm>
+          <a:off x="0" y="0"/>
+          <a:ext cx="0" cy="0"/>
+          <a:chOff x="0" y="0"/>
+          <a:chExt cx="0" cy="0"/>
+        </a:xfrm>
+      </p:grpSpPr>
+      <p:sp>
+        <p:nvSpPr>
+          <p:cNvPr id="2" name="タイトル 1">
+            <a:extLst>
+              <a:ext uri="{FF2B5EF4-FFF2-40B4-BE49-F238E27FC236}">
+                <a16:creationId xmlns:a16="http://schemas.microsoft.com/office/drawing/2014/main" id="{63BA8DF2-B51E-8846-29D6-4274E354116D}"/>
+              </a:ext>
+            </a:extLst>
+          </p:cNvPr>
+          <p:cNvSpPr>
+            <a:spLocks noGrp="1"/>
+          </p:cNvSpPr>
+          <p:nvPr>
+            <p:ph type="ctrTitle"/>
+          </p:nvPr>
+        </p:nvSpPr>
+        <p:spPr>
+          <a:xfrm>
+            <a:off x="1524000" y="2410239"/>
+            <a:ext cx="9144000" cy="1480930"/>
+          </a:xfrm>
+        </p:spPr>
+        <p:txBody>
+          <a:bodyPr>
+            <a:normAutofit/>
+          </a:bodyPr>
+          <a:lstStyle/>
+          <a:p>
+            <a:r>
+              <a:rPr kumimoji="1" lang="en-US" altLang="ja-JP" sz="9600" dirty="0">
+                <a:solidFill>
+                  <a:schemeClr val="bg1"/>
+                </a:solidFill>
+                <a:latin typeface="源ノ角ゴシック JP Heavy" panose="020B0A00000000000000" pitchFamily="34" charset="-128"/>
+                <a:ea typeface="源ノ角ゴシック JP Heavy" panose="020B0A00000000000000" pitchFamily="34" charset="-128"/>
+              </a:rPr>
+              <a:t>WHYAI</a:t>
+            </a:r>
+            <a:endParaRPr kumimoji="1" lang="ja-JP" altLang="en-US" sz="9600" dirty="0">
+              <a:solidFill>
+                <a:schemeClr val="bg1"/>
+              </a:solidFill>
+              <a:latin typeface="源ノ角ゴシック JP Heavy" panose="020B0A00000000000000" pitchFamily="34" charset="-128"/>
+              <a:ea typeface="源ノ角ゴシック JP Heavy" panose="020B0A00000000000000" pitchFamily="34" charset="-128"/>
+            </a:endParaRPr>
+          </a:p>
+        </p:txBody>
+      </p:sp>
+      <p:sp>
+        <p:nvSpPr>
+          <p:cNvPr id="3" name="字幕 2">
+            <a:extLst>
+              <a:ext uri="{FF2B5EF4-FFF2-40B4-BE49-F238E27FC236}">
+                <a16:creationId xmlns:a16="http://schemas.microsoft.com/office/drawing/2014/main" id="{E46CDCC9-8049-CCF6-037D-63C69CFA6809}"/>
+              </a:ext>
+            </a:extLst>
+          </p:cNvPr>
+          <p:cNvSpPr>
+            <a:spLocks noGrp="1"/>
+          </p:cNvSpPr>
+          <p:nvPr>
+            <p:ph type="subTitle" idx="1"/>
+          </p:nvPr>
+        </p:nvSpPr>
+        <p:spPr>
+          <a:xfrm>
+            <a:off x="1524000" y="3851831"/>
+            <a:ext cx="9144000" cy="446842"/>
+          </a:xfrm>
+        </p:spPr>
+        <p:txBody>
+          <a:bodyPr>
+            <a:normAutofit/>
+          </a:bodyPr>
+          <a:lstStyle/>
+          <a:p>
+            <a:r>
+              <a:rPr lang="ja-JP" altLang="en-US" dirty="0">
+                <a:solidFill>
+                  <a:schemeClr val="bg1"/>
+                </a:solidFill>
+                <a:latin typeface="源ノ角ゴシック JP Heavy" panose="020B0A00000000000000" pitchFamily="34" charset="-128"/>
+                <a:ea typeface="源ノ角ゴシック JP Heavy" panose="020B0A00000000000000" pitchFamily="34" charset="-128"/>
+              </a:rPr>
+              <a:t>学習の「はじめの一歩」を支える</a:t>
+            </a:r>
+            <a:endParaRPr lang="ja-JP" altLang="en-US" dirty="0">
+              <a:solidFill>
+                <a:schemeClr val="bg1"/>
+              </a:solidFill>
+            </a:endParaRPr>
+          </a:p>
+        </p:txBody>
+      </p:sp>
+    </p:spTree>
+    <p:extLst>
+      <p:ext uri="{BB962C8B-B14F-4D97-AF65-F5344CB8AC3E}">
+        <p14:creationId xmlns:p14="http://schemas.microsoft.com/office/powerpoint/2010/main" val="3298743986"/>
+      </p:ext>
+    </p:extLst>
+  </p:cSld>
+  <p:clrMapOvr>
+    <a:masterClrMapping/>
+  </p:clrMapOvr>
+</p:sld>
+</file>
+
+<file path=ppt/slides/slide46.xml><?xml version="1.0" encoding="utf-8"?>
+<p:sld xmlns:a="http://schemas.openxmlformats.org/drawingml/2006/main" xmlns:r="http://schemas.openxmlformats.org/officeDocument/2006/relationships" xmlns:p="http://schemas.openxmlformats.org/presentationml/2006/main">
+  <p:cSld>
+    <p:bg>
+      <p:bgPr>
+        <a:pattFill prst="pct5">
+          <a:fgClr>
+            <a:schemeClr val="bg1">
+              <a:lumMod val="50000"/>
+            </a:schemeClr>
+          </a:fgClr>
+          <a:bgClr>
+            <a:schemeClr val="bg1"/>
+          </a:bgClr>
+        </a:pattFill>
+        <a:effectLst/>
+      </p:bgPr>
+    </p:bg>
+    <p:spTree>
+      <p:nvGrpSpPr>
+        <p:cNvPr id="1" name="">
+          <a:extLst>
+            <a:ext uri="{FF2B5EF4-FFF2-40B4-BE49-F238E27FC236}">
+              <a16:creationId xmlns:a16="http://schemas.microsoft.com/office/drawing/2014/main" id="{28D32CC7-ADEC-C0C2-9614-824C1FA60E75}"/>
+            </a:ext>
+          </a:extLst>
+        </p:cNvPr>
+        <p:cNvGrpSpPr/>
+        <p:nvPr/>
+      </p:nvGrpSpPr>
+      <p:grpSpPr>
+        <a:xfrm>
+          <a:off x="0" y="0"/>
+          <a:ext cx="0" cy="0"/>
+          <a:chOff x="0" y="0"/>
+          <a:chExt cx="0" cy="0"/>
+        </a:xfrm>
+      </p:grpSpPr>
+      <p:sp>
+        <p:nvSpPr>
+          <p:cNvPr id="2" name="タイトル 1">
+            <a:extLst>
+              <a:ext uri="{FF2B5EF4-FFF2-40B4-BE49-F238E27FC236}">
+                <a16:creationId xmlns:a16="http://schemas.microsoft.com/office/drawing/2014/main" id="{BDC942F5-0D32-8E0E-2098-F6A8EF44918C}"/>
+              </a:ext>
+            </a:extLst>
+          </p:cNvPr>
+          <p:cNvSpPr>
+            <a:spLocks noGrp="1"/>
+          </p:cNvSpPr>
+          <p:nvPr>
+            <p:ph type="ctrTitle"/>
+          </p:nvPr>
+        </p:nvSpPr>
+        <p:spPr>
+          <a:xfrm>
+            <a:off x="1524000" y="2410239"/>
+            <a:ext cx="9144000" cy="1480930"/>
+          </a:xfrm>
+        </p:spPr>
+        <p:txBody>
+          <a:bodyPr>
+            <a:normAutofit/>
+          </a:bodyPr>
+          <a:lstStyle/>
+          <a:p>
+            <a:r>
+              <a:rPr kumimoji="1" lang="en-US" altLang="ja-JP" sz="9600" dirty="0">
+                <a:latin typeface="源ノ角ゴシック JP Heavy" panose="020B0A00000000000000" pitchFamily="34" charset="-128"/>
+                <a:ea typeface="源ノ角ゴシック JP Heavy" panose="020B0A00000000000000" pitchFamily="34" charset="-128"/>
+              </a:rPr>
+              <a:t>WHYAI</a:t>
+            </a:r>
+            <a:endParaRPr kumimoji="1" lang="ja-JP" altLang="en-US" sz="9600" dirty="0">
+              <a:latin typeface="源ノ角ゴシック JP Heavy" panose="020B0A00000000000000" pitchFamily="34" charset="-128"/>
+              <a:ea typeface="源ノ角ゴシック JP Heavy" panose="020B0A00000000000000" pitchFamily="34" charset="-128"/>
+            </a:endParaRPr>
+          </a:p>
+        </p:txBody>
+      </p:sp>
+      <p:sp>
+        <p:nvSpPr>
+          <p:cNvPr id="3" name="字幕 2">
+            <a:extLst>
+              <a:ext uri="{FF2B5EF4-FFF2-40B4-BE49-F238E27FC236}">
+                <a16:creationId xmlns:a16="http://schemas.microsoft.com/office/drawing/2014/main" id="{21B95902-BFA2-56A0-CEAD-07B4375DD017}"/>
+              </a:ext>
+            </a:extLst>
+          </p:cNvPr>
+          <p:cNvSpPr>
+            <a:spLocks noGrp="1"/>
+          </p:cNvSpPr>
+          <p:nvPr>
+            <p:ph type="subTitle" idx="1"/>
+          </p:nvPr>
+        </p:nvSpPr>
+        <p:spPr>
+          <a:xfrm>
+            <a:off x="1524000" y="3851831"/>
+            <a:ext cx="9144000" cy="446842"/>
+          </a:xfrm>
+        </p:spPr>
+        <p:txBody>
+          <a:bodyPr>
+            <a:normAutofit/>
+          </a:bodyPr>
+          <a:lstStyle/>
+          <a:p>
+            <a:r>
+              <a:rPr lang="ja-JP" altLang="en-US" dirty="0">
+                <a:latin typeface="源ノ角ゴシック JP Heavy" panose="020B0A00000000000000" pitchFamily="34" charset="-128"/>
+                <a:ea typeface="源ノ角ゴシック JP Heavy" panose="020B0A00000000000000" pitchFamily="34" charset="-128"/>
+              </a:rPr>
+              <a:t>「考えて学ぶ」エンジニア学習サービス</a:t>
+            </a:r>
+            <a:endParaRPr kumimoji="1" lang="ja-JP" altLang="en-US" dirty="0">
+              <a:latin typeface="源ノ角ゴシック JP Heavy" panose="020B0A00000000000000" pitchFamily="34" charset="-128"/>
+              <a:ea typeface="源ノ角ゴシック JP Heavy" panose="020B0A00000000000000" pitchFamily="34" charset="-128"/>
+            </a:endParaRPr>
+          </a:p>
+        </p:txBody>
+      </p:sp>
+    </p:spTree>
+    <p:extLst>
+      <p:ext uri="{BB962C8B-B14F-4D97-AF65-F5344CB8AC3E}">
+        <p14:creationId xmlns:p14="http://schemas.microsoft.com/office/powerpoint/2010/main" val="3110470757"/>
       </p:ext>
     </p:extLst>
   </p:cSld>
@@ -9223,7 +13981,7 @@
                 <a:latin typeface="源ノ角ゴシック JP Heavy" panose="020B0A00000000000000" pitchFamily="34" charset="-128"/>
                 <a:ea typeface="源ノ角ゴシック JP Heavy" panose="020B0A00000000000000" pitchFamily="34" charset="-128"/>
               </a:rPr>
-              <a:t>何て言っているかも</a:t>
+              <a:t>何を言っているかも</a:t>
             </a:r>
             <a:endParaRPr lang="en-US" altLang="ja-JP" sz="5400" dirty="0">
               <a:latin typeface="源ノ角ゴシック JP Heavy" panose="020B0A00000000000000" pitchFamily="34" charset="-128"/>
@@ -9718,4 +14476,319 @@
     </a:ext>
   </a:extLst>
 </a:theme>
+</file>
+
+<file path=ppt/theme/theme2.xml><?xml version="1.0" encoding="utf-8"?>
+<a:theme xmlns:a="http://schemas.openxmlformats.org/drawingml/2006/main" name="Office テーマ">
+  <a:themeElements>
+    <a:clrScheme name="Office">
+      <a:dk1>
+        <a:sysClr val="windowText" lastClr="000000"/>
+      </a:dk1>
+      <a:lt1>
+        <a:sysClr val="window" lastClr="FFFFFF"/>
+      </a:lt1>
+      <a:dk2>
+        <a:srgbClr val="0E2841"/>
+      </a:dk2>
+      <a:lt2>
+        <a:srgbClr val="E8E8E8"/>
+      </a:lt2>
+      <a:accent1>
+        <a:srgbClr val="156082"/>
+      </a:accent1>
+      <a:accent2>
+        <a:srgbClr val="E97132"/>
+      </a:accent2>
+      <a:accent3>
+        <a:srgbClr val="196B24"/>
+      </a:accent3>
+      <a:accent4>
+        <a:srgbClr val="0F9ED5"/>
+      </a:accent4>
+      <a:accent5>
+        <a:srgbClr val="A02B93"/>
+      </a:accent5>
+      <a:accent6>
+        <a:srgbClr val="4EA72E"/>
+      </a:accent6>
+      <a:hlink>
+        <a:srgbClr val="467886"/>
+      </a:hlink>
+      <a:folHlink>
+        <a:srgbClr val="96607D"/>
+      </a:folHlink>
+    </a:clrScheme>
+    <a:fontScheme name="Office">
+      <a:majorFont>
+        <a:latin typeface="游ゴシック Light" panose="02110004020202020204"/>
+        <a:ea typeface=""/>
+        <a:cs typeface=""/>
+        <a:font script="Jpan" typeface="游ゴシック Light"/>
+        <a:font script="Hang" typeface="맑은 고딕"/>
+        <a:font script="Hans" typeface="等线 Light"/>
+        <a:font script="Hant" typeface="新細明體"/>
+        <a:font script="Arab" typeface="Times New Roman"/>
+        <a:font script="Hebr" typeface="Times New Roman"/>
+        <a:font script="Thai" typeface="Angsana New"/>
+        <a:font script="Ethi" typeface="Nyala"/>
+        <a:font script="Beng" typeface="Vrinda"/>
+        <a:font script="Gujr" typeface="Shruti"/>
+        <a:font script="Khmr" typeface="MoolBoran"/>
+        <a:font script="Knda" typeface="Tunga"/>
+        <a:font script="Guru" typeface="Raavi"/>
+        <a:font script="Cans" typeface="Euphemia"/>
+        <a:font script="Cher" typeface="Plantagenet Cherokee"/>
+        <a:font script="Yiii" typeface="Microsoft Yi Baiti"/>
+        <a:font script="Tibt" typeface="Microsoft Himalaya"/>
+        <a:font script="Thaa" typeface="MV Boli"/>
+        <a:font script="Deva" typeface="Mangal"/>
+        <a:font script="Telu" typeface="Gautami"/>
+        <a:font script="Taml" typeface="Latha"/>
+        <a:font script="Syrc" typeface="Estrangelo Edessa"/>
+        <a:font script="Orya" typeface="Kalinga"/>
+        <a:font script="Mlym" typeface="Kartika"/>
+        <a:font script="Laoo" typeface="DokChampa"/>
+        <a:font script="Sinh" typeface="Iskoola Pota"/>
+        <a:font script="Mong" typeface="Mongolian Baiti"/>
+        <a:font script="Viet" typeface="Times New Roman"/>
+        <a:font script="Uigh" typeface="Microsoft Uighur"/>
+        <a:font script="Geor" typeface="Sylfaen"/>
+        <a:font script="Armn" typeface="Arial"/>
+        <a:font script="Bugi" typeface="Leelawadee UI"/>
+        <a:font script="Bopo" typeface="Microsoft JhengHei"/>
+        <a:font script="Java" typeface="Javanese Text"/>
+        <a:font script="Lisu" typeface="Segoe UI"/>
+        <a:font script="Mymr" typeface="Myanmar Text"/>
+        <a:font script="Nkoo" typeface="Ebrima"/>
+        <a:font script="Olck" typeface="Nirmala UI"/>
+        <a:font script="Osma" typeface="Ebrima"/>
+        <a:font script="Phag" typeface="Phagspa"/>
+        <a:font script="Syrn" typeface="Estrangelo Edessa"/>
+        <a:font script="Syrj" typeface="Estrangelo Edessa"/>
+        <a:font script="Syre" typeface="Estrangelo Edessa"/>
+        <a:font script="Sora" typeface="Nirmala UI"/>
+        <a:font script="Tale" typeface="Microsoft Tai Le"/>
+        <a:font script="Talu" typeface="Microsoft New Tai Lue"/>
+        <a:font script="Tfng" typeface="Ebrima"/>
+      </a:majorFont>
+      <a:minorFont>
+        <a:latin typeface="游ゴシック" panose="02110004020202020204"/>
+        <a:ea typeface=""/>
+        <a:cs typeface=""/>
+        <a:font script="Jpan" typeface="游ゴシック"/>
+        <a:font script="Hang" typeface="맑은 고딕"/>
+        <a:font script="Hans" typeface="等线"/>
+        <a:font script="Hant" typeface="新細明體"/>
+        <a:font script="Arab" typeface="Arial"/>
+        <a:font script="Hebr" typeface="Arial"/>
+        <a:font script="Thai" typeface="Cordia New"/>
+        <a:font script="Ethi" typeface="Nyala"/>
+        <a:font script="Beng" typeface="Vrinda"/>
+        <a:font script="Gujr" typeface="Shruti"/>
+        <a:font script="Khmr" typeface="DaunPenh"/>
+        <a:font script="Knda" typeface="Tunga"/>
+        <a:font script="Guru" typeface="Raavi"/>
+        <a:font script="Cans" typeface="Euphemia"/>
+        <a:font script="Cher" typeface="Plantagenet Cherokee"/>
+        <a:font script="Yiii" typeface="Microsoft Yi Baiti"/>
+        <a:font script="Tibt" typeface="Microsoft Himalaya"/>
+        <a:font script="Thaa" typeface="MV Boli"/>
+        <a:font script="Deva" typeface="Mangal"/>
+        <a:font script="Telu" typeface="Gautami"/>
+        <a:font script="Taml" typeface="Latha"/>
+        <a:font script="Syrc" typeface="Estrangelo Edessa"/>
+        <a:font script="Orya" typeface="Kalinga"/>
+        <a:font script="Mlym" typeface="Kartika"/>
+        <a:font script="Laoo" typeface="DokChampa"/>
+        <a:font script="Sinh" typeface="Iskoola Pota"/>
+        <a:font script="Mong" typeface="Mongolian Baiti"/>
+        <a:font script="Viet" typeface="Arial"/>
+        <a:font script="Uigh" typeface="Microsoft Uighur"/>
+        <a:font script="Geor" typeface="Sylfaen"/>
+        <a:font script="Armn" typeface="Arial"/>
+        <a:font script="Bugi" typeface="Leelawadee UI"/>
+        <a:font script="Bopo" typeface="Microsoft JhengHei"/>
+        <a:font script="Java" typeface="Javanese Text"/>
+        <a:font script="Lisu" typeface="Segoe UI"/>
+        <a:font script="Mymr" typeface="Myanmar Text"/>
+        <a:font script="Nkoo" typeface="Ebrima"/>
+        <a:font script="Olck" typeface="Nirmala UI"/>
+        <a:font script="Osma" typeface="Ebrima"/>
+        <a:font script="Phag" typeface="Phagspa"/>
+        <a:font script="Syrn" typeface="Estrangelo Edessa"/>
+        <a:font script="Syrj" typeface="Estrangelo Edessa"/>
+        <a:font script="Syre" typeface="Estrangelo Edessa"/>
+        <a:font script="Sora" typeface="Nirmala UI"/>
+        <a:font script="Tale" typeface="Microsoft Tai Le"/>
+        <a:font script="Talu" typeface="Microsoft New Tai Lue"/>
+        <a:font script="Tfng" typeface="Ebrima"/>
+      </a:minorFont>
+    </a:fontScheme>
+    <a:fmtScheme name="Office">
+      <a:fillStyleLst>
+        <a:solidFill>
+          <a:schemeClr val="phClr"/>
+        </a:solidFill>
+        <a:gradFill rotWithShape="1">
+          <a:gsLst>
+            <a:gs pos="0">
+              <a:schemeClr val="phClr">
+                <a:lumMod val="110000"/>
+                <a:satMod val="105000"/>
+                <a:tint val="67000"/>
+              </a:schemeClr>
+            </a:gs>
+            <a:gs pos="50000">
+              <a:schemeClr val="phClr">
+                <a:lumMod val="105000"/>
+                <a:satMod val="103000"/>
+                <a:tint val="73000"/>
+              </a:schemeClr>
+            </a:gs>
+            <a:gs pos="100000">
+              <a:schemeClr val="phClr">
+                <a:lumMod val="105000"/>
+                <a:satMod val="109000"/>
+                <a:tint val="81000"/>
+              </a:schemeClr>
+            </a:gs>
+          </a:gsLst>
+          <a:lin ang="5400000" scaled="0"/>
+        </a:gradFill>
+        <a:gradFill rotWithShape="1">
+          <a:gsLst>
+            <a:gs pos="0">
+              <a:schemeClr val="phClr">
+                <a:satMod val="103000"/>
+                <a:lumMod val="102000"/>
+                <a:tint val="94000"/>
+              </a:schemeClr>
+            </a:gs>
+            <a:gs pos="50000">
+              <a:schemeClr val="phClr">
+                <a:satMod val="110000"/>
+                <a:lumMod val="100000"/>
+                <a:shade val="100000"/>
+              </a:schemeClr>
+            </a:gs>
+            <a:gs pos="100000">
+              <a:schemeClr val="phClr">
+                <a:lumMod val="99000"/>
+                <a:satMod val="120000"/>
+                <a:shade val="78000"/>
+              </a:schemeClr>
+            </a:gs>
+          </a:gsLst>
+          <a:lin ang="5400000" scaled="0"/>
+        </a:gradFill>
+      </a:fillStyleLst>
+      <a:lnStyleLst>
+        <a:ln w="12700" cap="flat" cmpd="sng" algn="ctr">
+          <a:solidFill>
+            <a:schemeClr val="phClr"/>
+          </a:solidFill>
+          <a:prstDash val="solid"/>
+          <a:miter lim="800000"/>
+        </a:ln>
+        <a:ln w="19050" cap="flat" cmpd="sng" algn="ctr">
+          <a:solidFill>
+            <a:schemeClr val="phClr"/>
+          </a:solidFill>
+          <a:prstDash val="solid"/>
+          <a:miter lim="800000"/>
+        </a:ln>
+        <a:ln w="25400" cap="flat" cmpd="sng" algn="ctr">
+          <a:solidFill>
+            <a:schemeClr val="phClr"/>
+          </a:solidFill>
+          <a:prstDash val="solid"/>
+          <a:miter lim="800000"/>
+        </a:ln>
+      </a:lnStyleLst>
+      <a:effectStyleLst>
+        <a:effectStyle>
+          <a:effectLst/>
+        </a:effectStyle>
+        <a:effectStyle>
+          <a:effectLst/>
+        </a:effectStyle>
+        <a:effectStyle>
+          <a:effectLst>
+            <a:outerShdw blurRad="57150" dist="19050" dir="5400000" algn="ctr" rotWithShape="0">
+              <a:srgbClr val="000000">
+                <a:alpha val="63000"/>
+              </a:srgbClr>
+            </a:outerShdw>
+          </a:effectLst>
+        </a:effectStyle>
+      </a:effectStyleLst>
+      <a:bgFillStyleLst>
+        <a:solidFill>
+          <a:schemeClr val="phClr"/>
+        </a:solidFill>
+        <a:solidFill>
+          <a:schemeClr val="phClr">
+            <a:tint val="95000"/>
+            <a:satMod val="170000"/>
+          </a:schemeClr>
+        </a:solidFill>
+        <a:gradFill rotWithShape="1">
+          <a:gsLst>
+            <a:gs pos="0">
+              <a:schemeClr val="phClr">
+                <a:tint val="93000"/>
+                <a:satMod val="150000"/>
+                <a:shade val="98000"/>
+                <a:lumMod val="102000"/>
+              </a:schemeClr>
+            </a:gs>
+            <a:gs pos="50000">
+              <a:schemeClr val="phClr">
+                <a:tint val="98000"/>
+                <a:satMod val="130000"/>
+                <a:shade val="90000"/>
+                <a:lumMod val="103000"/>
+              </a:schemeClr>
+            </a:gs>
+            <a:gs pos="100000">
+              <a:schemeClr val="phClr">
+                <a:shade val="63000"/>
+                <a:satMod val="120000"/>
+              </a:schemeClr>
+            </a:gs>
+          </a:gsLst>
+          <a:lin ang="5400000" scaled="0"/>
+        </a:gradFill>
+      </a:bgFillStyleLst>
+    </a:fmtScheme>
+  </a:themeElements>
+  <a:objectDefaults>
+    <a:lnDef>
+      <a:spPr/>
+      <a:bodyPr/>
+      <a:lstStyle/>
+      <a:style>
+        <a:lnRef idx="2">
+          <a:schemeClr val="accent1"/>
+        </a:lnRef>
+        <a:fillRef idx="0">
+          <a:schemeClr val="accent1"/>
+        </a:fillRef>
+        <a:effectRef idx="1">
+          <a:schemeClr val="accent1"/>
+        </a:effectRef>
+        <a:fontRef idx="minor">
+          <a:schemeClr val="tx1"/>
+        </a:fontRef>
+      </a:style>
+    </a:lnDef>
+  </a:objectDefaults>
+  <a:extraClrSchemeLst/>
+  <a:extLst>
+    <a:ext uri="{05A4C25C-085E-4340-85A3-A5531E510DB2}">
+      <thm15:themeFamily xmlns:thm15="http://schemas.microsoft.com/office/thememl/2012/main" name="Office Theme" id="{2E142A2C-CD16-42D6-873A-C26D2A0506FA}" vid="{1BDDFF52-6CD6-40A5-AB3C-68EB2F1E4D0A}"/>
+    </a:ext>
+  </a:extLst>
+</a:theme>
 </file>